--- a/LectureSlides/03b_WhenOneThingDependsOnAother.pptx
+++ b/LectureSlides/03b_WhenOneThingDependsOnAother.pptx
@@ -238,7 +238,7 @@
           <a:p>
             <a:fld id="{4A4A0935-8C25-438A-84D4-96B1DB833474}" type="datetimeFigureOut">
               <a:rPr lang="en-US" smtClean="0"/>
-              <a:t>9/23/2025</a:t>
+              <a:t>2/24/2026</a:t>
             </a:fld>
             <a:endParaRPr lang="en-US"/>
           </a:p>
@@ -768,7 +768,7 @@
           <a:p>
             <a:fld id="{241EB5C9-1307-BA42-ABA2-0BC069CD8E7F}" type="datetimeFigureOut">
               <a:rPr lang="en-US" smtClean="0"/>
-              <a:t>9/23/2025</a:t>
+              <a:t>2/24/2026</a:t>
             </a:fld>
             <a:endParaRPr lang="en-US"/>
           </a:p>
@@ -936,7 +936,7 @@
           <a:p>
             <a:fld id="{241EB5C9-1307-BA42-ABA2-0BC069CD8E7F}" type="datetimeFigureOut">
               <a:rPr lang="en-US" smtClean="0"/>
-              <a:t>9/23/2025</a:t>
+              <a:t>2/24/2026</a:t>
             </a:fld>
             <a:endParaRPr lang="en-US"/>
           </a:p>
@@ -1114,7 +1114,7 @@
           <a:p>
             <a:fld id="{241EB5C9-1307-BA42-ABA2-0BC069CD8E7F}" type="datetimeFigureOut">
               <a:rPr lang="en-US" smtClean="0"/>
-              <a:t>9/23/2025</a:t>
+              <a:t>2/24/2026</a:t>
             </a:fld>
             <a:endParaRPr lang="en-US"/>
           </a:p>
@@ -1282,7 +1282,7 @@
           <a:p>
             <a:fld id="{241EB5C9-1307-BA42-ABA2-0BC069CD8E7F}" type="datetimeFigureOut">
               <a:rPr lang="en-US" smtClean="0"/>
-              <a:t>9/23/2025</a:t>
+              <a:t>2/24/2026</a:t>
             </a:fld>
             <a:endParaRPr lang="en-US"/>
           </a:p>
@@ -1527,7 +1527,7 @@
           <a:p>
             <a:fld id="{241EB5C9-1307-BA42-ABA2-0BC069CD8E7F}" type="datetimeFigureOut">
               <a:rPr lang="en-US" smtClean="0"/>
-              <a:t>9/23/2025</a:t>
+              <a:t>2/24/2026</a:t>
             </a:fld>
             <a:endParaRPr lang="en-US"/>
           </a:p>
@@ -1812,7 +1812,7 @@
           <a:p>
             <a:fld id="{241EB5C9-1307-BA42-ABA2-0BC069CD8E7F}" type="datetimeFigureOut">
               <a:rPr lang="en-US" smtClean="0"/>
-              <a:t>9/23/2025</a:t>
+              <a:t>2/24/2026</a:t>
             </a:fld>
             <a:endParaRPr lang="en-US"/>
           </a:p>
@@ -2231,7 +2231,7 @@
           <a:p>
             <a:fld id="{241EB5C9-1307-BA42-ABA2-0BC069CD8E7F}" type="datetimeFigureOut">
               <a:rPr lang="en-US" smtClean="0"/>
-              <a:t>9/23/2025</a:t>
+              <a:t>2/24/2026</a:t>
             </a:fld>
             <a:endParaRPr lang="en-US"/>
           </a:p>
@@ -2348,7 +2348,7 @@
           <a:p>
             <a:fld id="{241EB5C9-1307-BA42-ABA2-0BC069CD8E7F}" type="datetimeFigureOut">
               <a:rPr lang="en-US" smtClean="0"/>
-              <a:t>9/23/2025</a:t>
+              <a:t>2/24/2026</a:t>
             </a:fld>
             <a:endParaRPr lang="en-US"/>
           </a:p>
@@ -2443,7 +2443,7 @@
           <a:p>
             <a:fld id="{241EB5C9-1307-BA42-ABA2-0BC069CD8E7F}" type="datetimeFigureOut">
               <a:rPr lang="en-US" smtClean="0"/>
-              <a:t>9/23/2025</a:t>
+              <a:t>2/24/2026</a:t>
             </a:fld>
             <a:endParaRPr lang="en-US"/>
           </a:p>
@@ -2718,7 +2718,7 @@
           <a:p>
             <a:fld id="{241EB5C9-1307-BA42-ABA2-0BC069CD8E7F}" type="datetimeFigureOut">
               <a:rPr lang="en-US" smtClean="0"/>
-              <a:t>9/23/2025</a:t>
+              <a:t>2/24/2026</a:t>
             </a:fld>
             <a:endParaRPr lang="en-US"/>
           </a:p>
@@ -2970,7 +2970,7 @@
           <a:p>
             <a:fld id="{241EB5C9-1307-BA42-ABA2-0BC069CD8E7F}" type="datetimeFigureOut">
               <a:rPr lang="en-US" smtClean="0"/>
-              <a:t>9/23/2025</a:t>
+              <a:t>2/24/2026</a:t>
             </a:fld>
             <a:endParaRPr lang="en-US"/>
           </a:p>
@@ -3181,7 +3181,7 @@
           <a:p>
             <a:fld id="{241EB5C9-1307-BA42-ABA2-0BC069CD8E7F}" type="datetimeFigureOut">
               <a:rPr lang="en-US" smtClean="0"/>
-              <a:t>9/23/2025</a:t>
+              <a:t>2/24/2026</a:t>
             </a:fld>
             <a:endParaRPr lang="en-US"/>
           </a:p>
@@ -3727,7 +3727,15 @@
             <a:pPr algn="ctr"/>
             <a:r>
               <a:rPr lang="en-US" sz="1100" dirty="0"/>
-              <a:t>Copyright 2018, 2019, 2020, 2021, 2022, 2023 2024, Stephen F Elston. All rights reserved</a:t>
+              <a:t>Copyright 2018, 2019, 2020, 2021, 2022, </a:t>
+            </a:r>
+            <a:r>
+              <a:rPr lang="en-US" sz="1100"/>
+              <a:t>2023 2024, 2025, </a:t>
+            </a:r>
+            <a:r>
+              <a:rPr lang="en-US" sz="1100" dirty="0"/>
+              <a:t>Stephen F Elston. All rights reserved</a:t>
             </a:r>
             <a:r>
               <a:rPr lang="en-US" dirty="0"/>
@@ -3788,8 +3796,8 @@
           </a:p>
         </p:txBody>
       </p:sp>
-      <mc:AlternateContent xmlns:mc="http://schemas.openxmlformats.org/markup-compatibility/2006">
-        <mc:Choice xmlns:a14="http://schemas.microsoft.com/office/drawing/2010/main" Requires="a14">
+      <mc:AlternateContent xmlns:mc="http://schemas.openxmlformats.org/markup-compatibility/2006" xmlns:a14="http://schemas.microsoft.com/office/drawing/2010/main">
+        <mc:Choice Requires="a14">
           <p:sp>
             <p:nvSpPr>
               <p:cNvPr id="3" name="Content Placeholder 2"/>
@@ -4388,7 +4396,7 @@
             </p:txBody>
           </p:sp>
         </mc:Choice>
-        <mc:Fallback>
+        <mc:Fallback xmlns="">
           <p:sp>
             <p:nvSpPr>
               <p:cNvPr id="3" name="Content Placeholder 2"/>
@@ -4427,6 +4435,289 @@
   <p:clrMapOvr>
     <a:masterClrMapping/>
   </p:clrMapOvr>
+  <p:timing>
+    <p:tnLst>
+      <p:par>
+        <p:cTn id="1" dur="indefinite" restart="never" nodeType="tmRoot">
+          <p:childTnLst>
+            <p:seq concurrent="1" nextAc="seek">
+              <p:cTn id="2" dur="indefinite" nodeType="mainSeq">
+                <p:childTnLst>
+                  <p:par>
+                    <p:cTn id="3" fill="hold">
+                      <p:stCondLst>
+                        <p:cond delay="indefinite"/>
+                      </p:stCondLst>
+                      <p:childTnLst>
+                        <p:par>
+                          <p:cTn id="4" fill="hold">
+                            <p:stCondLst>
+                              <p:cond delay="0"/>
+                            </p:stCondLst>
+                            <p:childTnLst>
+                              <p:par>
+                                <p:cTn id="5" presetID="1" presetClass="entr" presetSubtype="0" fill="hold" nodeType="clickEffect">
+                                  <p:stCondLst>
+                                    <p:cond delay="0"/>
+                                  </p:stCondLst>
+                                  <p:childTnLst>
+                                    <p:set>
+                                      <p:cBhvr>
+                                        <p:cTn id="6" dur="1" fill="hold">
+                                          <p:stCondLst>
+                                            <p:cond delay="0"/>
+                                          </p:stCondLst>
+                                        </p:cTn>
+                                        <p:tgtEl>
+                                          <p:spTgt spid="3">
+                                            <p:txEl>
+                                              <p:pRg st="2" end="2"/>
+                                            </p:txEl>
+                                          </p:spTgt>
+                                        </p:tgtEl>
+                                        <p:attrNameLst>
+                                          <p:attrName>style.visibility</p:attrName>
+                                        </p:attrNameLst>
+                                      </p:cBhvr>
+                                      <p:to>
+                                        <p:strVal val="visible"/>
+                                      </p:to>
+                                    </p:set>
+                                  </p:childTnLst>
+                                </p:cTn>
+                              </p:par>
+                              <p:par>
+                                <p:cTn id="7" presetID="1" presetClass="entr" presetSubtype="0" fill="hold" nodeType="withEffect">
+                                  <p:stCondLst>
+                                    <p:cond delay="0"/>
+                                  </p:stCondLst>
+                                  <p:childTnLst>
+                                    <p:set>
+                                      <p:cBhvr>
+                                        <p:cTn id="8" dur="1" fill="hold">
+                                          <p:stCondLst>
+                                            <p:cond delay="0"/>
+                                          </p:stCondLst>
+                                        </p:cTn>
+                                        <p:tgtEl>
+                                          <p:spTgt spid="3">
+                                            <p:txEl>
+                                              <p:pRg st="3" end="3"/>
+                                            </p:txEl>
+                                          </p:spTgt>
+                                        </p:tgtEl>
+                                        <p:attrNameLst>
+                                          <p:attrName>style.visibility</p:attrName>
+                                        </p:attrNameLst>
+                                      </p:cBhvr>
+                                      <p:to>
+                                        <p:strVal val="visible"/>
+                                      </p:to>
+                                    </p:set>
+                                  </p:childTnLst>
+                                </p:cTn>
+                              </p:par>
+                              <p:par>
+                                <p:cTn id="9" presetID="1" presetClass="entr" presetSubtype="0" fill="hold" nodeType="withEffect">
+                                  <p:stCondLst>
+                                    <p:cond delay="0"/>
+                                  </p:stCondLst>
+                                  <p:childTnLst>
+                                    <p:set>
+                                      <p:cBhvr>
+                                        <p:cTn id="10" dur="1" fill="hold">
+                                          <p:stCondLst>
+                                            <p:cond delay="0"/>
+                                          </p:stCondLst>
+                                        </p:cTn>
+                                        <p:tgtEl>
+                                          <p:spTgt spid="3">
+                                            <p:txEl>
+                                              <p:pRg st="4" end="4"/>
+                                            </p:txEl>
+                                          </p:spTgt>
+                                        </p:tgtEl>
+                                        <p:attrNameLst>
+                                          <p:attrName>style.visibility</p:attrName>
+                                        </p:attrNameLst>
+                                      </p:cBhvr>
+                                      <p:to>
+                                        <p:strVal val="visible"/>
+                                      </p:to>
+                                    </p:set>
+                                  </p:childTnLst>
+                                </p:cTn>
+                              </p:par>
+                              <p:par>
+                                <p:cTn id="11" presetID="1" presetClass="entr" presetSubtype="0" fill="hold" nodeType="withEffect">
+                                  <p:stCondLst>
+                                    <p:cond delay="0"/>
+                                  </p:stCondLst>
+                                  <p:childTnLst>
+                                    <p:set>
+                                      <p:cBhvr>
+                                        <p:cTn id="12" dur="1" fill="hold">
+                                          <p:stCondLst>
+                                            <p:cond delay="0"/>
+                                          </p:stCondLst>
+                                        </p:cTn>
+                                        <p:tgtEl>
+                                          <p:spTgt spid="3">
+                                            <p:txEl>
+                                              <p:pRg st="5" end="5"/>
+                                            </p:txEl>
+                                          </p:spTgt>
+                                        </p:tgtEl>
+                                        <p:attrNameLst>
+                                          <p:attrName>style.visibility</p:attrName>
+                                        </p:attrNameLst>
+                                      </p:cBhvr>
+                                      <p:to>
+                                        <p:strVal val="visible"/>
+                                      </p:to>
+                                    </p:set>
+                                  </p:childTnLst>
+                                </p:cTn>
+                              </p:par>
+                              <p:par>
+                                <p:cTn id="13" presetID="1" presetClass="entr" presetSubtype="0" fill="hold" nodeType="withEffect">
+                                  <p:stCondLst>
+                                    <p:cond delay="0"/>
+                                  </p:stCondLst>
+                                  <p:childTnLst>
+                                    <p:set>
+                                      <p:cBhvr>
+                                        <p:cTn id="14" dur="1" fill="hold">
+                                          <p:stCondLst>
+                                            <p:cond delay="0"/>
+                                          </p:stCondLst>
+                                        </p:cTn>
+                                        <p:tgtEl>
+                                          <p:spTgt spid="3">
+                                            <p:txEl>
+                                              <p:pRg st="6" end="6"/>
+                                            </p:txEl>
+                                          </p:spTgt>
+                                        </p:tgtEl>
+                                        <p:attrNameLst>
+                                          <p:attrName>style.visibility</p:attrName>
+                                        </p:attrNameLst>
+                                      </p:cBhvr>
+                                      <p:to>
+                                        <p:strVal val="visible"/>
+                                      </p:to>
+                                    </p:set>
+                                  </p:childTnLst>
+                                </p:cTn>
+                              </p:par>
+                            </p:childTnLst>
+                          </p:cTn>
+                        </p:par>
+                      </p:childTnLst>
+                    </p:cTn>
+                  </p:par>
+                  <p:par>
+                    <p:cTn id="15" fill="hold">
+                      <p:stCondLst>
+                        <p:cond delay="indefinite"/>
+                      </p:stCondLst>
+                      <p:childTnLst>
+                        <p:par>
+                          <p:cTn id="16" fill="hold">
+                            <p:stCondLst>
+                              <p:cond delay="0"/>
+                            </p:stCondLst>
+                            <p:childTnLst>
+                              <p:par>
+                                <p:cTn id="17" presetID="1" presetClass="entr" presetSubtype="0" fill="hold" nodeType="clickEffect">
+                                  <p:stCondLst>
+                                    <p:cond delay="0"/>
+                                  </p:stCondLst>
+                                  <p:childTnLst>
+                                    <p:set>
+                                      <p:cBhvr>
+                                        <p:cTn id="18" dur="1" fill="hold">
+                                          <p:stCondLst>
+                                            <p:cond delay="0"/>
+                                          </p:stCondLst>
+                                        </p:cTn>
+                                        <p:tgtEl>
+                                          <p:spTgt spid="3">
+                                            <p:txEl>
+                                              <p:pRg st="7" end="7"/>
+                                            </p:txEl>
+                                          </p:spTgt>
+                                        </p:tgtEl>
+                                        <p:attrNameLst>
+                                          <p:attrName>style.visibility</p:attrName>
+                                        </p:attrNameLst>
+                                      </p:cBhvr>
+                                      <p:to>
+                                        <p:strVal val="visible"/>
+                                      </p:to>
+                                    </p:set>
+                                  </p:childTnLst>
+                                </p:cTn>
+                              </p:par>
+                              <p:par>
+                                <p:cTn id="19" presetID="1" presetClass="entr" presetSubtype="0" fill="hold" nodeType="withEffect">
+                                  <p:stCondLst>
+                                    <p:cond delay="0"/>
+                                  </p:stCondLst>
+                                  <p:childTnLst>
+                                    <p:set>
+                                      <p:cBhvr>
+                                        <p:cTn id="20" dur="1" fill="hold">
+                                          <p:stCondLst>
+                                            <p:cond delay="0"/>
+                                          </p:stCondLst>
+                                        </p:cTn>
+                                        <p:tgtEl>
+                                          <p:spTgt spid="3">
+                                            <p:txEl>
+                                              <p:pRg st="8" end="8"/>
+                                            </p:txEl>
+                                          </p:spTgt>
+                                        </p:tgtEl>
+                                        <p:attrNameLst>
+                                          <p:attrName>style.visibility</p:attrName>
+                                        </p:attrNameLst>
+                                      </p:cBhvr>
+                                      <p:to>
+                                        <p:strVal val="visible"/>
+                                      </p:to>
+                                    </p:set>
+                                  </p:childTnLst>
+                                </p:cTn>
+                              </p:par>
+                            </p:childTnLst>
+                          </p:cTn>
+                        </p:par>
+                      </p:childTnLst>
+                    </p:cTn>
+                  </p:par>
+                </p:childTnLst>
+              </p:cTn>
+              <p:prevCondLst>
+                <p:cond evt="onPrev" delay="0">
+                  <p:tgtEl>
+                    <p:sldTgt/>
+                  </p:tgtEl>
+                </p:cond>
+              </p:prevCondLst>
+              <p:nextCondLst>
+                <p:cond evt="onNext" delay="0">
+                  <p:tgtEl>
+                    <p:sldTgt/>
+                  </p:tgtEl>
+                </p:cond>
+              </p:nextCondLst>
+            </p:seq>
+          </p:childTnLst>
+        </p:cTn>
+      </p:par>
+    </p:tnLst>
+  </p:timing>
 </p:sld>
 </file>
 
@@ -4517,15 +4808,7 @@
                 <a:pPr lvl="0"/>
                 <a:r>
                   <a:rPr lang="en-US" dirty="0"/>
-                  <a:t>The probability that a given patient, drawn at random from the population </a:t>
-                </a:r>
-                <a:r>
-                  <a:rPr lang="en-US"/>
-                  <a:t>of people </a:t>
-                </a:r>
-                <a:r>
-                  <a:rPr lang="en-US" dirty="0"/>
-                  <a:t>in the United States, has the disease is </a:t>
+                  <a:t>The probability that a given patient, drawn at random from the population of people in the United States, has the disease is </a:t>
                 </a:r>
                 <a:endParaRPr lang="en-US" dirty="0">
                   <a:latin typeface="Cambria Math" panose="02040503050406030204" pitchFamily="18" charset="0"/>
@@ -4844,6 +5127,338 @@
   <p:clrMapOvr>
     <a:masterClrMapping/>
   </p:clrMapOvr>
+  <p:timing>
+    <p:tnLst>
+      <p:par>
+        <p:cTn id="1" dur="indefinite" restart="never" nodeType="tmRoot">
+          <p:childTnLst>
+            <p:seq concurrent="1" nextAc="seek">
+              <p:cTn id="2" dur="indefinite" nodeType="mainSeq">
+                <p:childTnLst>
+                  <p:par>
+                    <p:cTn id="3" fill="hold">
+                      <p:stCondLst>
+                        <p:cond delay="indefinite"/>
+                      </p:stCondLst>
+                      <p:childTnLst>
+                        <p:par>
+                          <p:cTn id="4" fill="hold">
+                            <p:stCondLst>
+                              <p:cond delay="0"/>
+                            </p:stCondLst>
+                            <p:childTnLst>
+                              <p:par>
+                                <p:cTn id="5" presetID="1" presetClass="entr" presetSubtype="0" fill="hold" nodeType="clickEffect">
+                                  <p:stCondLst>
+                                    <p:cond delay="0"/>
+                                  </p:stCondLst>
+                                  <p:childTnLst>
+                                    <p:set>
+                                      <p:cBhvr>
+                                        <p:cTn id="6" dur="1" fill="hold">
+                                          <p:stCondLst>
+                                            <p:cond delay="0"/>
+                                          </p:stCondLst>
+                                        </p:cTn>
+                                        <p:tgtEl>
+                                          <p:spTgt spid="3">
+                                            <p:txEl>
+                                              <p:pRg st="1" end="1"/>
+                                            </p:txEl>
+                                          </p:spTgt>
+                                        </p:tgtEl>
+                                        <p:attrNameLst>
+                                          <p:attrName>style.visibility</p:attrName>
+                                        </p:attrNameLst>
+                                      </p:cBhvr>
+                                      <p:to>
+                                        <p:strVal val="visible"/>
+                                      </p:to>
+                                    </p:set>
+                                  </p:childTnLst>
+                                </p:cTn>
+                              </p:par>
+                            </p:childTnLst>
+                          </p:cTn>
+                        </p:par>
+                      </p:childTnLst>
+                    </p:cTn>
+                  </p:par>
+                  <p:par>
+                    <p:cTn id="7" fill="hold">
+                      <p:stCondLst>
+                        <p:cond delay="indefinite"/>
+                      </p:stCondLst>
+                      <p:childTnLst>
+                        <p:par>
+                          <p:cTn id="8" fill="hold">
+                            <p:stCondLst>
+                              <p:cond delay="0"/>
+                            </p:stCondLst>
+                            <p:childTnLst>
+                              <p:par>
+                                <p:cTn id="9" presetID="1" presetClass="entr" presetSubtype="0" fill="hold" nodeType="clickEffect">
+                                  <p:stCondLst>
+                                    <p:cond delay="0"/>
+                                  </p:stCondLst>
+                                  <p:childTnLst>
+                                    <p:set>
+                                      <p:cBhvr>
+                                        <p:cTn id="10" dur="1" fill="hold">
+                                          <p:stCondLst>
+                                            <p:cond delay="0"/>
+                                          </p:stCondLst>
+                                        </p:cTn>
+                                        <p:tgtEl>
+                                          <p:spTgt spid="3">
+                                            <p:txEl>
+                                              <p:pRg st="2" end="2"/>
+                                            </p:txEl>
+                                          </p:spTgt>
+                                        </p:tgtEl>
+                                        <p:attrNameLst>
+                                          <p:attrName>style.visibility</p:attrName>
+                                        </p:attrNameLst>
+                                      </p:cBhvr>
+                                      <p:to>
+                                        <p:strVal val="visible"/>
+                                      </p:to>
+                                    </p:set>
+                                  </p:childTnLst>
+                                </p:cTn>
+                              </p:par>
+                              <p:par>
+                                <p:cTn id="11" presetID="1" presetClass="entr" presetSubtype="0" fill="hold" nodeType="withEffect">
+                                  <p:stCondLst>
+                                    <p:cond delay="0"/>
+                                  </p:stCondLst>
+                                  <p:childTnLst>
+                                    <p:set>
+                                      <p:cBhvr>
+                                        <p:cTn id="12" dur="1" fill="hold">
+                                          <p:stCondLst>
+                                            <p:cond delay="0"/>
+                                          </p:stCondLst>
+                                        </p:cTn>
+                                        <p:tgtEl>
+                                          <p:spTgt spid="3">
+                                            <p:txEl>
+                                              <p:pRg st="3" end="3"/>
+                                            </p:txEl>
+                                          </p:spTgt>
+                                        </p:tgtEl>
+                                        <p:attrNameLst>
+                                          <p:attrName>style.visibility</p:attrName>
+                                        </p:attrNameLst>
+                                      </p:cBhvr>
+                                      <p:to>
+                                        <p:strVal val="visible"/>
+                                      </p:to>
+                                    </p:set>
+                                  </p:childTnLst>
+                                </p:cTn>
+                              </p:par>
+                            </p:childTnLst>
+                          </p:cTn>
+                        </p:par>
+                      </p:childTnLst>
+                    </p:cTn>
+                  </p:par>
+                  <p:par>
+                    <p:cTn id="13" fill="hold">
+                      <p:stCondLst>
+                        <p:cond delay="indefinite"/>
+                      </p:stCondLst>
+                      <p:childTnLst>
+                        <p:par>
+                          <p:cTn id="14" fill="hold">
+                            <p:stCondLst>
+                              <p:cond delay="0"/>
+                            </p:stCondLst>
+                            <p:childTnLst>
+                              <p:par>
+                                <p:cTn id="15" presetID="1" presetClass="entr" presetSubtype="0" fill="hold" nodeType="clickEffect">
+                                  <p:stCondLst>
+                                    <p:cond delay="0"/>
+                                  </p:stCondLst>
+                                  <p:childTnLst>
+                                    <p:set>
+                                      <p:cBhvr>
+                                        <p:cTn id="16" dur="1" fill="hold">
+                                          <p:stCondLst>
+                                            <p:cond delay="0"/>
+                                          </p:stCondLst>
+                                        </p:cTn>
+                                        <p:tgtEl>
+                                          <p:spTgt spid="3">
+                                            <p:txEl>
+                                              <p:pRg st="4" end="4"/>
+                                            </p:txEl>
+                                          </p:spTgt>
+                                        </p:tgtEl>
+                                        <p:attrNameLst>
+                                          <p:attrName>style.visibility</p:attrName>
+                                        </p:attrNameLst>
+                                      </p:cBhvr>
+                                      <p:to>
+                                        <p:strVal val="visible"/>
+                                      </p:to>
+                                    </p:set>
+                                  </p:childTnLst>
+                                </p:cTn>
+                              </p:par>
+                              <p:par>
+                                <p:cTn id="17" presetID="1" presetClass="entr" presetSubtype="0" fill="hold" nodeType="withEffect">
+                                  <p:stCondLst>
+                                    <p:cond delay="0"/>
+                                  </p:stCondLst>
+                                  <p:childTnLst>
+                                    <p:set>
+                                      <p:cBhvr>
+                                        <p:cTn id="18" dur="1" fill="hold">
+                                          <p:stCondLst>
+                                            <p:cond delay="0"/>
+                                          </p:stCondLst>
+                                        </p:cTn>
+                                        <p:tgtEl>
+                                          <p:spTgt spid="3">
+                                            <p:txEl>
+                                              <p:pRg st="5" end="5"/>
+                                            </p:txEl>
+                                          </p:spTgt>
+                                        </p:tgtEl>
+                                        <p:attrNameLst>
+                                          <p:attrName>style.visibility</p:attrName>
+                                        </p:attrNameLst>
+                                      </p:cBhvr>
+                                      <p:to>
+                                        <p:strVal val="visible"/>
+                                      </p:to>
+                                    </p:set>
+                                  </p:childTnLst>
+                                </p:cTn>
+                              </p:par>
+                              <p:par>
+                                <p:cTn id="19" presetID="1" presetClass="entr" presetSubtype="0" fill="hold" nodeType="withEffect">
+                                  <p:stCondLst>
+                                    <p:cond delay="0"/>
+                                  </p:stCondLst>
+                                  <p:childTnLst>
+                                    <p:set>
+                                      <p:cBhvr>
+                                        <p:cTn id="20" dur="1" fill="hold">
+                                          <p:stCondLst>
+                                            <p:cond delay="0"/>
+                                          </p:stCondLst>
+                                        </p:cTn>
+                                        <p:tgtEl>
+                                          <p:spTgt spid="3">
+                                            <p:txEl>
+                                              <p:pRg st="6" end="6"/>
+                                            </p:txEl>
+                                          </p:spTgt>
+                                        </p:tgtEl>
+                                        <p:attrNameLst>
+                                          <p:attrName>style.visibility</p:attrName>
+                                        </p:attrNameLst>
+                                      </p:cBhvr>
+                                      <p:to>
+                                        <p:strVal val="visible"/>
+                                      </p:to>
+                                    </p:set>
+                                  </p:childTnLst>
+                                </p:cTn>
+                              </p:par>
+                              <p:par>
+                                <p:cTn id="21" presetID="1" presetClass="entr" presetSubtype="0" fill="hold" nodeType="withEffect">
+                                  <p:stCondLst>
+                                    <p:cond delay="0"/>
+                                  </p:stCondLst>
+                                  <p:childTnLst>
+                                    <p:set>
+                                      <p:cBhvr>
+                                        <p:cTn id="22" dur="1" fill="hold">
+                                          <p:stCondLst>
+                                            <p:cond delay="0"/>
+                                          </p:stCondLst>
+                                        </p:cTn>
+                                        <p:tgtEl>
+                                          <p:spTgt spid="3">
+                                            <p:txEl>
+                                              <p:pRg st="7" end="7"/>
+                                            </p:txEl>
+                                          </p:spTgt>
+                                        </p:tgtEl>
+                                        <p:attrNameLst>
+                                          <p:attrName>style.visibility</p:attrName>
+                                        </p:attrNameLst>
+                                      </p:cBhvr>
+                                      <p:to>
+                                        <p:strVal val="visible"/>
+                                      </p:to>
+                                    </p:set>
+                                  </p:childTnLst>
+                                </p:cTn>
+                              </p:par>
+                              <p:par>
+                                <p:cTn id="23" presetID="1" presetClass="entr" presetSubtype="0" fill="hold" nodeType="withEffect">
+                                  <p:stCondLst>
+                                    <p:cond delay="0"/>
+                                  </p:stCondLst>
+                                  <p:childTnLst>
+                                    <p:set>
+                                      <p:cBhvr>
+                                        <p:cTn id="24" dur="1" fill="hold">
+                                          <p:stCondLst>
+                                            <p:cond delay="0"/>
+                                          </p:stCondLst>
+                                        </p:cTn>
+                                        <p:tgtEl>
+                                          <p:spTgt spid="3">
+                                            <p:txEl>
+                                              <p:pRg st="8" end="8"/>
+                                            </p:txEl>
+                                          </p:spTgt>
+                                        </p:tgtEl>
+                                        <p:attrNameLst>
+                                          <p:attrName>style.visibility</p:attrName>
+                                        </p:attrNameLst>
+                                      </p:cBhvr>
+                                      <p:to>
+                                        <p:strVal val="visible"/>
+                                      </p:to>
+                                    </p:set>
+                                  </p:childTnLst>
+                                </p:cTn>
+                              </p:par>
+                            </p:childTnLst>
+                          </p:cTn>
+                        </p:par>
+                      </p:childTnLst>
+                    </p:cTn>
+                  </p:par>
+                </p:childTnLst>
+              </p:cTn>
+              <p:prevCondLst>
+                <p:cond evt="onPrev" delay="0">
+                  <p:tgtEl>
+                    <p:sldTgt/>
+                  </p:tgtEl>
+                </p:cond>
+              </p:prevCondLst>
+              <p:nextCondLst>
+                <p:cond evt="onNext" delay="0">
+                  <p:tgtEl>
+                    <p:sldTgt/>
+                  </p:tgtEl>
+                </p:cond>
+              </p:nextCondLst>
+            </p:seq>
+          </p:childTnLst>
+        </p:cTn>
+      </p:par>
+    </p:tnLst>
+  </p:timing>
 </p:sld>
 </file>
 
@@ -5121,6 +5736,258 @@
   <p:clrMapOvr>
     <a:masterClrMapping/>
   </p:clrMapOvr>
+  <p:timing>
+    <p:tnLst>
+      <p:par>
+        <p:cTn id="1" dur="indefinite" restart="never" nodeType="tmRoot">
+          <p:childTnLst>
+            <p:seq concurrent="1" nextAc="seek">
+              <p:cTn id="2" dur="indefinite" nodeType="mainSeq">
+                <p:childTnLst>
+                  <p:par>
+                    <p:cTn id="3" fill="hold">
+                      <p:stCondLst>
+                        <p:cond delay="indefinite"/>
+                      </p:stCondLst>
+                      <p:childTnLst>
+                        <p:par>
+                          <p:cTn id="4" fill="hold">
+                            <p:stCondLst>
+                              <p:cond delay="0"/>
+                            </p:stCondLst>
+                            <p:childTnLst>
+                              <p:par>
+                                <p:cTn id="5" presetID="1" presetClass="entr" presetSubtype="0" fill="hold" nodeType="clickEffect">
+                                  <p:stCondLst>
+                                    <p:cond delay="0"/>
+                                  </p:stCondLst>
+                                  <p:childTnLst>
+                                    <p:set>
+                                      <p:cBhvr>
+                                        <p:cTn id="6" dur="1" fill="hold">
+                                          <p:stCondLst>
+                                            <p:cond delay="0"/>
+                                          </p:stCondLst>
+                                        </p:cTn>
+                                        <p:tgtEl>
+                                          <p:spTgt spid="3">
+                                            <p:txEl>
+                                              <p:pRg st="1" end="1"/>
+                                            </p:txEl>
+                                          </p:spTgt>
+                                        </p:tgtEl>
+                                        <p:attrNameLst>
+                                          <p:attrName>style.visibility</p:attrName>
+                                        </p:attrNameLst>
+                                      </p:cBhvr>
+                                      <p:to>
+                                        <p:strVal val="visible"/>
+                                      </p:to>
+                                    </p:set>
+                                  </p:childTnLst>
+                                </p:cTn>
+                              </p:par>
+                              <p:par>
+                                <p:cTn id="7" presetID="1" presetClass="entr" presetSubtype="0" fill="hold" nodeType="withEffect">
+                                  <p:stCondLst>
+                                    <p:cond delay="0"/>
+                                  </p:stCondLst>
+                                  <p:childTnLst>
+                                    <p:set>
+                                      <p:cBhvr>
+                                        <p:cTn id="8" dur="1" fill="hold">
+                                          <p:stCondLst>
+                                            <p:cond delay="0"/>
+                                          </p:stCondLst>
+                                        </p:cTn>
+                                        <p:tgtEl>
+                                          <p:spTgt spid="3">
+                                            <p:txEl>
+                                              <p:pRg st="2" end="2"/>
+                                            </p:txEl>
+                                          </p:spTgt>
+                                        </p:tgtEl>
+                                        <p:attrNameLst>
+                                          <p:attrName>style.visibility</p:attrName>
+                                        </p:attrNameLst>
+                                      </p:cBhvr>
+                                      <p:to>
+                                        <p:strVal val="visible"/>
+                                      </p:to>
+                                    </p:set>
+                                  </p:childTnLst>
+                                </p:cTn>
+                              </p:par>
+                              <p:par>
+                                <p:cTn id="9" presetID="1" presetClass="entr" presetSubtype="0" fill="hold" nodeType="withEffect">
+                                  <p:stCondLst>
+                                    <p:cond delay="0"/>
+                                  </p:stCondLst>
+                                  <p:childTnLst>
+                                    <p:set>
+                                      <p:cBhvr>
+                                        <p:cTn id="10" dur="1" fill="hold">
+                                          <p:stCondLst>
+                                            <p:cond delay="0"/>
+                                          </p:stCondLst>
+                                        </p:cTn>
+                                        <p:tgtEl>
+                                          <p:spTgt spid="3">
+                                            <p:txEl>
+                                              <p:pRg st="3" end="3"/>
+                                            </p:txEl>
+                                          </p:spTgt>
+                                        </p:tgtEl>
+                                        <p:attrNameLst>
+                                          <p:attrName>style.visibility</p:attrName>
+                                        </p:attrNameLst>
+                                      </p:cBhvr>
+                                      <p:to>
+                                        <p:strVal val="visible"/>
+                                      </p:to>
+                                    </p:set>
+                                  </p:childTnLst>
+                                </p:cTn>
+                              </p:par>
+                            </p:childTnLst>
+                          </p:cTn>
+                        </p:par>
+                      </p:childTnLst>
+                    </p:cTn>
+                  </p:par>
+                  <p:par>
+                    <p:cTn id="11" fill="hold">
+                      <p:stCondLst>
+                        <p:cond delay="indefinite"/>
+                      </p:stCondLst>
+                      <p:childTnLst>
+                        <p:par>
+                          <p:cTn id="12" fill="hold">
+                            <p:stCondLst>
+                              <p:cond delay="0"/>
+                            </p:stCondLst>
+                            <p:childTnLst>
+                              <p:par>
+                                <p:cTn id="13" presetID="1" presetClass="entr" presetSubtype="0" fill="hold" nodeType="clickEffect">
+                                  <p:stCondLst>
+                                    <p:cond delay="0"/>
+                                  </p:stCondLst>
+                                  <p:childTnLst>
+                                    <p:set>
+                                      <p:cBhvr>
+                                        <p:cTn id="14" dur="1" fill="hold">
+                                          <p:stCondLst>
+                                            <p:cond delay="0"/>
+                                          </p:stCondLst>
+                                        </p:cTn>
+                                        <p:tgtEl>
+                                          <p:spTgt spid="3">
+                                            <p:txEl>
+                                              <p:pRg st="4" end="4"/>
+                                            </p:txEl>
+                                          </p:spTgt>
+                                        </p:tgtEl>
+                                        <p:attrNameLst>
+                                          <p:attrName>style.visibility</p:attrName>
+                                        </p:attrNameLst>
+                                      </p:cBhvr>
+                                      <p:to>
+                                        <p:strVal val="visible"/>
+                                      </p:to>
+                                    </p:set>
+                                  </p:childTnLst>
+                                </p:cTn>
+                              </p:par>
+                              <p:par>
+                                <p:cTn id="15" presetID="1" presetClass="entr" presetSubtype="0" fill="hold" nodeType="withEffect">
+                                  <p:stCondLst>
+                                    <p:cond delay="0"/>
+                                  </p:stCondLst>
+                                  <p:childTnLst>
+                                    <p:set>
+                                      <p:cBhvr>
+                                        <p:cTn id="16" dur="1" fill="hold">
+                                          <p:stCondLst>
+                                            <p:cond delay="0"/>
+                                          </p:stCondLst>
+                                        </p:cTn>
+                                        <p:tgtEl>
+                                          <p:spTgt spid="3">
+                                            <p:txEl>
+                                              <p:pRg st="5" end="5"/>
+                                            </p:txEl>
+                                          </p:spTgt>
+                                        </p:tgtEl>
+                                        <p:attrNameLst>
+                                          <p:attrName>style.visibility</p:attrName>
+                                        </p:attrNameLst>
+                                      </p:cBhvr>
+                                      <p:to>
+                                        <p:strVal val="visible"/>
+                                      </p:to>
+                                    </p:set>
+                                  </p:childTnLst>
+                                </p:cTn>
+                              </p:par>
+                              <p:par>
+                                <p:cTn id="17" presetID="1" presetClass="entr" presetSubtype="0" fill="hold" nodeType="withEffect">
+                                  <p:stCondLst>
+                                    <p:cond delay="0"/>
+                                  </p:stCondLst>
+                                  <p:childTnLst>
+                                    <p:set>
+                                      <p:cBhvr>
+                                        <p:cTn id="18" dur="1" fill="hold">
+                                          <p:stCondLst>
+                                            <p:cond delay="0"/>
+                                          </p:stCondLst>
+                                        </p:cTn>
+                                        <p:tgtEl>
+                                          <p:spTgt spid="3">
+                                            <p:txEl>
+                                              <p:pRg st="6" end="6"/>
+                                            </p:txEl>
+                                          </p:spTgt>
+                                        </p:tgtEl>
+                                        <p:attrNameLst>
+                                          <p:attrName>style.visibility</p:attrName>
+                                        </p:attrNameLst>
+                                      </p:cBhvr>
+                                      <p:to>
+                                        <p:strVal val="visible"/>
+                                      </p:to>
+                                    </p:set>
+                                  </p:childTnLst>
+                                </p:cTn>
+                              </p:par>
+                            </p:childTnLst>
+                          </p:cTn>
+                        </p:par>
+                      </p:childTnLst>
+                    </p:cTn>
+                  </p:par>
+                </p:childTnLst>
+              </p:cTn>
+              <p:prevCondLst>
+                <p:cond evt="onPrev" delay="0">
+                  <p:tgtEl>
+                    <p:sldTgt/>
+                  </p:tgtEl>
+                </p:cond>
+              </p:prevCondLst>
+              <p:nextCondLst>
+                <p:cond evt="onNext" delay="0">
+                  <p:tgtEl>
+                    <p:sldTgt/>
+                  </p:tgtEl>
+                </p:cond>
+              </p:nextCondLst>
+            </p:seq>
+          </p:childTnLst>
+        </p:cTn>
+      </p:par>
+    </p:tnLst>
+  </p:timing>
 </p:sld>
 </file>
 
@@ -6032,8 +6899,8 @@
           </a:p>
         </p:txBody>
       </p:sp>
-      <mc:AlternateContent xmlns:mc="http://schemas.openxmlformats.org/markup-compatibility/2006">
-        <mc:Choice xmlns:a14="http://schemas.microsoft.com/office/drawing/2010/main" Requires="a14">
+      <mc:AlternateContent xmlns:mc="http://schemas.openxmlformats.org/markup-compatibility/2006" xmlns:a14="http://schemas.microsoft.com/office/drawing/2010/main">
+        <mc:Choice Requires="a14">
           <p:sp>
             <p:nvSpPr>
               <p:cNvPr id="3" name="Content Placeholder 2">
@@ -7278,7 +8145,7 @@
             </p:txBody>
           </p:sp>
         </mc:Choice>
-        <mc:Fallback>
+        <mc:Fallback xmlns="">
           <p:sp>
             <p:nvSpPr>
               <p:cNvPr id="3" name="Content Placeholder 2">
@@ -7332,6 +8199,258 @@
   <p:clrMapOvr>
     <a:masterClrMapping/>
   </p:clrMapOvr>
+  <p:timing>
+    <p:tnLst>
+      <p:par>
+        <p:cTn id="1" dur="indefinite" restart="never" nodeType="tmRoot">
+          <p:childTnLst>
+            <p:seq concurrent="1" nextAc="seek">
+              <p:cTn id="2" dur="indefinite" nodeType="mainSeq">
+                <p:childTnLst>
+                  <p:par>
+                    <p:cTn id="3" fill="hold">
+                      <p:stCondLst>
+                        <p:cond delay="indefinite"/>
+                      </p:stCondLst>
+                      <p:childTnLst>
+                        <p:par>
+                          <p:cTn id="4" fill="hold">
+                            <p:stCondLst>
+                              <p:cond delay="0"/>
+                            </p:stCondLst>
+                            <p:childTnLst>
+                              <p:par>
+                                <p:cTn id="5" presetID="1" presetClass="entr" presetSubtype="0" fill="hold" nodeType="clickEffect">
+                                  <p:stCondLst>
+                                    <p:cond delay="0"/>
+                                  </p:stCondLst>
+                                  <p:childTnLst>
+                                    <p:set>
+                                      <p:cBhvr>
+                                        <p:cTn id="6" dur="1" fill="hold">
+                                          <p:stCondLst>
+                                            <p:cond delay="0"/>
+                                          </p:stCondLst>
+                                        </p:cTn>
+                                        <p:tgtEl>
+                                          <p:spTgt spid="3">
+                                            <p:txEl>
+                                              <p:pRg st="1" end="1"/>
+                                            </p:txEl>
+                                          </p:spTgt>
+                                        </p:tgtEl>
+                                        <p:attrNameLst>
+                                          <p:attrName>style.visibility</p:attrName>
+                                        </p:attrNameLst>
+                                      </p:cBhvr>
+                                      <p:to>
+                                        <p:strVal val="visible"/>
+                                      </p:to>
+                                    </p:set>
+                                  </p:childTnLst>
+                                </p:cTn>
+                              </p:par>
+                              <p:par>
+                                <p:cTn id="7" presetID="1" presetClass="entr" presetSubtype="0" fill="hold" nodeType="withEffect">
+                                  <p:stCondLst>
+                                    <p:cond delay="0"/>
+                                  </p:stCondLst>
+                                  <p:childTnLst>
+                                    <p:set>
+                                      <p:cBhvr>
+                                        <p:cTn id="8" dur="1" fill="hold">
+                                          <p:stCondLst>
+                                            <p:cond delay="0"/>
+                                          </p:stCondLst>
+                                        </p:cTn>
+                                        <p:tgtEl>
+                                          <p:spTgt spid="3">
+                                            <p:txEl>
+                                              <p:pRg st="2" end="2"/>
+                                            </p:txEl>
+                                          </p:spTgt>
+                                        </p:tgtEl>
+                                        <p:attrNameLst>
+                                          <p:attrName>style.visibility</p:attrName>
+                                        </p:attrNameLst>
+                                      </p:cBhvr>
+                                      <p:to>
+                                        <p:strVal val="visible"/>
+                                      </p:to>
+                                    </p:set>
+                                  </p:childTnLst>
+                                </p:cTn>
+                              </p:par>
+                              <p:par>
+                                <p:cTn id="9" presetID="1" presetClass="entr" presetSubtype="0" fill="hold" nodeType="withEffect">
+                                  <p:stCondLst>
+                                    <p:cond delay="0"/>
+                                  </p:stCondLst>
+                                  <p:childTnLst>
+                                    <p:set>
+                                      <p:cBhvr>
+                                        <p:cTn id="10" dur="1" fill="hold">
+                                          <p:stCondLst>
+                                            <p:cond delay="0"/>
+                                          </p:stCondLst>
+                                        </p:cTn>
+                                        <p:tgtEl>
+                                          <p:spTgt spid="3">
+                                            <p:txEl>
+                                              <p:pRg st="3" end="3"/>
+                                            </p:txEl>
+                                          </p:spTgt>
+                                        </p:tgtEl>
+                                        <p:attrNameLst>
+                                          <p:attrName>style.visibility</p:attrName>
+                                        </p:attrNameLst>
+                                      </p:cBhvr>
+                                      <p:to>
+                                        <p:strVal val="visible"/>
+                                      </p:to>
+                                    </p:set>
+                                  </p:childTnLst>
+                                </p:cTn>
+                              </p:par>
+                              <p:par>
+                                <p:cTn id="11" presetID="1" presetClass="entr" presetSubtype="0" fill="hold" nodeType="withEffect">
+                                  <p:stCondLst>
+                                    <p:cond delay="0"/>
+                                  </p:stCondLst>
+                                  <p:childTnLst>
+                                    <p:set>
+                                      <p:cBhvr>
+                                        <p:cTn id="12" dur="1" fill="hold">
+                                          <p:stCondLst>
+                                            <p:cond delay="0"/>
+                                          </p:stCondLst>
+                                        </p:cTn>
+                                        <p:tgtEl>
+                                          <p:spTgt spid="3">
+                                            <p:txEl>
+                                              <p:pRg st="4" end="4"/>
+                                            </p:txEl>
+                                          </p:spTgt>
+                                        </p:tgtEl>
+                                        <p:attrNameLst>
+                                          <p:attrName>style.visibility</p:attrName>
+                                        </p:attrNameLst>
+                                      </p:cBhvr>
+                                      <p:to>
+                                        <p:strVal val="visible"/>
+                                      </p:to>
+                                    </p:set>
+                                  </p:childTnLst>
+                                </p:cTn>
+                              </p:par>
+                              <p:par>
+                                <p:cTn id="13" presetID="1" presetClass="entr" presetSubtype="0" fill="hold" nodeType="withEffect">
+                                  <p:stCondLst>
+                                    <p:cond delay="0"/>
+                                  </p:stCondLst>
+                                  <p:childTnLst>
+                                    <p:set>
+                                      <p:cBhvr>
+                                        <p:cTn id="14" dur="1" fill="hold">
+                                          <p:stCondLst>
+                                            <p:cond delay="0"/>
+                                          </p:stCondLst>
+                                        </p:cTn>
+                                        <p:tgtEl>
+                                          <p:spTgt spid="3">
+                                            <p:txEl>
+                                              <p:pRg st="5" end="5"/>
+                                            </p:txEl>
+                                          </p:spTgt>
+                                        </p:tgtEl>
+                                        <p:attrNameLst>
+                                          <p:attrName>style.visibility</p:attrName>
+                                        </p:attrNameLst>
+                                      </p:cBhvr>
+                                      <p:to>
+                                        <p:strVal val="visible"/>
+                                      </p:to>
+                                    </p:set>
+                                  </p:childTnLst>
+                                </p:cTn>
+                              </p:par>
+                            </p:childTnLst>
+                          </p:cTn>
+                        </p:par>
+                      </p:childTnLst>
+                    </p:cTn>
+                  </p:par>
+                  <p:par>
+                    <p:cTn id="15" fill="hold">
+                      <p:stCondLst>
+                        <p:cond delay="indefinite"/>
+                      </p:stCondLst>
+                      <p:childTnLst>
+                        <p:par>
+                          <p:cTn id="16" fill="hold">
+                            <p:stCondLst>
+                              <p:cond delay="0"/>
+                            </p:stCondLst>
+                            <p:childTnLst>
+                              <p:par>
+                                <p:cTn id="17" presetID="1" presetClass="entr" presetSubtype="0" fill="hold" nodeType="clickEffect">
+                                  <p:stCondLst>
+                                    <p:cond delay="0"/>
+                                  </p:stCondLst>
+                                  <p:childTnLst>
+                                    <p:set>
+                                      <p:cBhvr>
+                                        <p:cTn id="18" dur="1" fill="hold">
+                                          <p:stCondLst>
+                                            <p:cond delay="0"/>
+                                          </p:stCondLst>
+                                        </p:cTn>
+                                        <p:tgtEl>
+                                          <p:spTgt spid="3">
+                                            <p:txEl>
+                                              <p:pRg st="6" end="6"/>
+                                            </p:txEl>
+                                          </p:spTgt>
+                                        </p:tgtEl>
+                                        <p:attrNameLst>
+                                          <p:attrName>style.visibility</p:attrName>
+                                        </p:attrNameLst>
+                                      </p:cBhvr>
+                                      <p:to>
+                                        <p:strVal val="visible"/>
+                                      </p:to>
+                                    </p:set>
+                                  </p:childTnLst>
+                                </p:cTn>
+                              </p:par>
+                            </p:childTnLst>
+                          </p:cTn>
+                        </p:par>
+                      </p:childTnLst>
+                    </p:cTn>
+                  </p:par>
+                </p:childTnLst>
+              </p:cTn>
+              <p:prevCondLst>
+                <p:cond evt="onPrev" delay="0">
+                  <p:tgtEl>
+                    <p:sldTgt/>
+                  </p:tgtEl>
+                </p:cond>
+              </p:prevCondLst>
+              <p:nextCondLst>
+                <p:cond evt="onNext" delay="0">
+                  <p:tgtEl>
+                    <p:sldTgt/>
+                  </p:tgtEl>
+                </p:cond>
+              </p:nextCondLst>
+            </p:seq>
+          </p:childTnLst>
+        </p:cTn>
+      </p:par>
+    </p:tnLst>
+  </p:timing>
 </p:sld>
 </file>
 
@@ -8101,6 +9220,338 @@
   <p:clrMapOvr>
     <a:masterClrMapping/>
   </p:clrMapOvr>
+  <p:timing>
+    <p:tnLst>
+      <p:par>
+        <p:cTn id="1" dur="indefinite" restart="never" nodeType="tmRoot">
+          <p:childTnLst>
+            <p:seq concurrent="1" nextAc="seek">
+              <p:cTn id="2" dur="indefinite" nodeType="mainSeq">
+                <p:childTnLst>
+                  <p:par>
+                    <p:cTn id="3" fill="hold">
+                      <p:stCondLst>
+                        <p:cond delay="indefinite"/>
+                      </p:stCondLst>
+                      <p:childTnLst>
+                        <p:par>
+                          <p:cTn id="4" fill="hold">
+                            <p:stCondLst>
+                              <p:cond delay="0"/>
+                            </p:stCondLst>
+                            <p:childTnLst>
+                              <p:par>
+                                <p:cTn id="5" presetID="1" presetClass="entr" presetSubtype="0" fill="hold" nodeType="clickEffect">
+                                  <p:stCondLst>
+                                    <p:cond delay="0"/>
+                                  </p:stCondLst>
+                                  <p:childTnLst>
+                                    <p:set>
+                                      <p:cBhvr>
+                                        <p:cTn id="6" dur="1" fill="hold">
+                                          <p:stCondLst>
+                                            <p:cond delay="0"/>
+                                          </p:stCondLst>
+                                        </p:cTn>
+                                        <p:tgtEl>
+                                          <p:spTgt spid="3">
+                                            <p:txEl>
+                                              <p:pRg st="1" end="1"/>
+                                            </p:txEl>
+                                          </p:spTgt>
+                                        </p:tgtEl>
+                                        <p:attrNameLst>
+                                          <p:attrName>style.visibility</p:attrName>
+                                        </p:attrNameLst>
+                                      </p:cBhvr>
+                                      <p:to>
+                                        <p:strVal val="visible"/>
+                                      </p:to>
+                                    </p:set>
+                                  </p:childTnLst>
+                                </p:cTn>
+                              </p:par>
+                              <p:par>
+                                <p:cTn id="7" presetID="1" presetClass="entr" presetSubtype="0" fill="hold" nodeType="withEffect">
+                                  <p:stCondLst>
+                                    <p:cond delay="0"/>
+                                  </p:stCondLst>
+                                  <p:childTnLst>
+                                    <p:set>
+                                      <p:cBhvr>
+                                        <p:cTn id="8" dur="1" fill="hold">
+                                          <p:stCondLst>
+                                            <p:cond delay="0"/>
+                                          </p:stCondLst>
+                                        </p:cTn>
+                                        <p:tgtEl>
+                                          <p:spTgt spid="3">
+                                            <p:txEl>
+                                              <p:pRg st="2" end="2"/>
+                                            </p:txEl>
+                                          </p:spTgt>
+                                        </p:tgtEl>
+                                        <p:attrNameLst>
+                                          <p:attrName>style.visibility</p:attrName>
+                                        </p:attrNameLst>
+                                      </p:cBhvr>
+                                      <p:to>
+                                        <p:strVal val="visible"/>
+                                      </p:to>
+                                    </p:set>
+                                  </p:childTnLst>
+                                </p:cTn>
+                              </p:par>
+                              <p:par>
+                                <p:cTn id="9" presetID="1" presetClass="entr" presetSubtype="0" fill="hold" nodeType="withEffect">
+                                  <p:stCondLst>
+                                    <p:cond delay="0"/>
+                                  </p:stCondLst>
+                                  <p:childTnLst>
+                                    <p:set>
+                                      <p:cBhvr>
+                                        <p:cTn id="10" dur="1" fill="hold">
+                                          <p:stCondLst>
+                                            <p:cond delay="0"/>
+                                          </p:stCondLst>
+                                        </p:cTn>
+                                        <p:tgtEl>
+                                          <p:spTgt spid="3">
+                                            <p:txEl>
+                                              <p:pRg st="3" end="3"/>
+                                            </p:txEl>
+                                          </p:spTgt>
+                                        </p:tgtEl>
+                                        <p:attrNameLst>
+                                          <p:attrName>style.visibility</p:attrName>
+                                        </p:attrNameLst>
+                                      </p:cBhvr>
+                                      <p:to>
+                                        <p:strVal val="visible"/>
+                                      </p:to>
+                                    </p:set>
+                                  </p:childTnLst>
+                                </p:cTn>
+                              </p:par>
+                              <p:par>
+                                <p:cTn id="11" presetID="1" presetClass="entr" presetSubtype="0" fill="hold" nodeType="withEffect">
+                                  <p:stCondLst>
+                                    <p:cond delay="0"/>
+                                  </p:stCondLst>
+                                  <p:childTnLst>
+                                    <p:set>
+                                      <p:cBhvr>
+                                        <p:cTn id="12" dur="1" fill="hold">
+                                          <p:stCondLst>
+                                            <p:cond delay="0"/>
+                                          </p:stCondLst>
+                                        </p:cTn>
+                                        <p:tgtEl>
+                                          <p:spTgt spid="3">
+                                            <p:txEl>
+                                              <p:pRg st="4" end="4"/>
+                                            </p:txEl>
+                                          </p:spTgt>
+                                        </p:tgtEl>
+                                        <p:attrNameLst>
+                                          <p:attrName>style.visibility</p:attrName>
+                                        </p:attrNameLst>
+                                      </p:cBhvr>
+                                      <p:to>
+                                        <p:strVal val="visible"/>
+                                      </p:to>
+                                    </p:set>
+                                  </p:childTnLst>
+                                </p:cTn>
+                              </p:par>
+                            </p:childTnLst>
+                          </p:cTn>
+                        </p:par>
+                      </p:childTnLst>
+                    </p:cTn>
+                  </p:par>
+                  <p:par>
+                    <p:cTn id="13" fill="hold">
+                      <p:stCondLst>
+                        <p:cond delay="indefinite"/>
+                      </p:stCondLst>
+                      <p:childTnLst>
+                        <p:par>
+                          <p:cTn id="14" fill="hold">
+                            <p:stCondLst>
+                              <p:cond delay="0"/>
+                            </p:stCondLst>
+                            <p:childTnLst>
+                              <p:par>
+                                <p:cTn id="15" presetID="1" presetClass="entr" presetSubtype="0" fill="hold" nodeType="clickEffect">
+                                  <p:stCondLst>
+                                    <p:cond delay="0"/>
+                                  </p:stCondLst>
+                                  <p:childTnLst>
+                                    <p:set>
+                                      <p:cBhvr>
+                                        <p:cTn id="16" dur="1" fill="hold">
+                                          <p:stCondLst>
+                                            <p:cond delay="0"/>
+                                          </p:stCondLst>
+                                        </p:cTn>
+                                        <p:tgtEl>
+                                          <p:spTgt spid="3">
+                                            <p:txEl>
+                                              <p:pRg st="5" end="5"/>
+                                            </p:txEl>
+                                          </p:spTgt>
+                                        </p:tgtEl>
+                                        <p:attrNameLst>
+                                          <p:attrName>style.visibility</p:attrName>
+                                        </p:attrNameLst>
+                                      </p:cBhvr>
+                                      <p:to>
+                                        <p:strVal val="visible"/>
+                                      </p:to>
+                                    </p:set>
+                                  </p:childTnLst>
+                                </p:cTn>
+                              </p:par>
+                              <p:par>
+                                <p:cTn id="17" presetID="1" presetClass="entr" presetSubtype="0" fill="hold" nodeType="withEffect">
+                                  <p:stCondLst>
+                                    <p:cond delay="0"/>
+                                  </p:stCondLst>
+                                  <p:childTnLst>
+                                    <p:set>
+                                      <p:cBhvr>
+                                        <p:cTn id="18" dur="1" fill="hold">
+                                          <p:stCondLst>
+                                            <p:cond delay="0"/>
+                                          </p:stCondLst>
+                                        </p:cTn>
+                                        <p:tgtEl>
+                                          <p:spTgt spid="3">
+                                            <p:txEl>
+                                              <p:pRg st="6" end="6"/>
+                                            </p:txEl>
+                                          </p:spTgt>
+                                        </p:tgtEl>
+                                        <p:attrNameLst>
+                                          <p:attrName>style.visibility</p:attrName>
+                                        </p:attrNameLst>
+                                      </p:cBhvr>
+                                      <p:to>
+                                        <p:strVal val="visible"/>
+                                      </p:to>
+                                    </p:set>
+                                  </p:childTnLst>
+                                </p:cTn>
+                              </p:par>
+                              <p:par>
+                                <p:cTn id="19" presetID="1" presetClass="entr" presetSubtype="0" fill="hold" nodeType="withEffect">
+                                  <p:stCondLst>
+                                    <p:cond delay="0"/>
+                                  </p:stCondLst>
+                                  <p:childTnLst>
+                                    <p:set>
+                                      <p:cBhvr>
+                                        <p:cTn id="20" dur="1" fill="hold">
+                                          <p:stCondLst>
+                                            <p:cond delay="0"/>
+                                          </p:stCondLst>
+                                        </p:cTn>
+                                        <p:tgtEl>
+                                          <p:spTgt spid="3">
+                                            <p:txEl>
+                                              <p:pRg st="7" end="7"/>
+                                            </p:txEl>
+                                          </p:spTgt>
+                                        </p:tgtEl>
+                                        <p:attrNameLst>
+                                          <p:attrName>style.visibility</p:attrName>
+                                        </p:attrNameLst>
+                                      </p:cBhvr>
+                                      <p:to>
+                                        <p:strVal val="visible"/>
+                                      </p:to>
+                                    </p:set>
+                                  </p:childTnLst>
+                                </p:cTn>
+                              </p:par>
+                            </p:childTnLst>
+                          </p:cTn>
+                        </p:par>
+                      </p:childTnLst>
+                    </p:cTn>
+                  </p:par>
+                  <p:par>
+                    <p:cTn id="21" fill="hold">
+                      <p:stCondLst>
+                        <p:cond delay="indefinite"/>
+                      </p:stCondLst>
+                      <p:childTnLst>
+                        <p:par>
+                          <p:cTn id="22" fill="hold">
+                            <p:stCondLst>
+                              <p:cond delay="0"/>
+                            </p:stCondLst>
+                            <p:childTnLst>
+                              <p:par>
+                                <p:cTn id="23" presetID="1" presetClass="entr" presetSubtype="0" fill="hold" nodeType="clickEffect">
+                                  <p:stCondLst>
+                                    <p:cond delay="0"/>
+                                  </p:stCondLst>
+                                  <p:childTnLst>
+                                    <p:set>
+                                      <p:cBhvr>
+                                        <p:cTn id="24" dur="1" fill="hold">
+                                          <p:stCondLst>
+                                            <p:cond delay="0"/>
+                                          </p:stCondLst>
+                                        </p:cTn>
+                                        <p:tgtEl>
+                                          <p:spTgt spid="3">
+                                            <p:txEl>
+                                              <p:pRg st="8" end="8"/>
+                                            </p:txEl>
+                                          </p:spTgt>
+                                        </p:tgtEl>
+                                        <p:attrNameLst>
+                                          <p:attrName>style.visibility</p:attrName>
+                                        </p:attrNameLst>
+                                      </p:cBhvr>
+                                      <p:to>
+                                        <p:strVal val="visible"/>
+                                      </p:to>
+                                    </p:set>
+                                  </p:childTnLst>
+                                </p:cTn>
+                              </p:par>
+                            </p:childTnLst>
+                          </p:cTn>
+                        </p:par>
+                      </p:childTnLst>
+                    </p:cTn>
+                  </p:par>
+                </p:childTnLst>
+              </p:cTn>
+              <p:prevCondLst>
+                <p:cond evt="onPrev" delay="0">
+                  <p:tgtEl>
+                    <p:sldTgt/>
+                  </p:tgtEl>
+                </p:cond>
+              </p:prevCondLst>
+              <p:nextCondLst>
+                <p:cond evt="onNext" delay="0">
+                  <p:tgtEl>
+                    <p:sldTgt/>
+                  </p:tgtEl>
+                </p:cond>
+              </p:nextCondLst>
+            </p:seq>
+          </p:childTnLst>
+        </p:cTn>
+      </p:par>
+    </p:tnLst>
+  </p:timing>
 </p:sld>
 </file>
 
@@ -8410,6 +9861,245 @@
   <p:clrMapOvr>
     <a:masterClrMapping/>
   </p:clrMapOvr>
+  <p:timing>
+    <p:tnLst>
+      <p:par>
+        <p:cTn id="1" dur="indefinite" restart="never" nodeType="tmRoot">
+          <p:childTnLst>
+            <p:seq concurrent="1" nextAc="seek">
+              <p:cTn id="2" dur="indefinite" nodeType="mainSeq">
+                <p:childTnLst>
+                  <p:par>
+                    <p:cTn id="3" fill="hold">
+                      <p:stCondLst>
+                        <p:cond delay="indefinite"/>
+                      </p:stCondLst>
+                      <p:childTnLst>
+                        <p:par>
+                          <p:cTn id="4" fill="hold">
+                            <p:stCondLst>
+                              <p:cond delay="0"/>
+                            </p:stCondLst>
+                            <p:childTnLst>
+                              <p:par>
+                                <p:cTn id="5" presetID="1" presetClass="entr" presetSubtype="0" fill="hold" nodeType="clickEffect">
+                                  <p:stCondLst>
+                                    <p:cond delay="0"/>
+                                  </p:stCondLst>
+                                  <p:childTnLst>
+                                    <p:set>
+                                      <p:cBhvr>
+                                        <p:cTn id="6" dur="1" fill="hold">
+                                          <p:stCondLst>
+                                            <p:cond delay="0"/>
+                                          </p:stCondLst>
+                                        </p:cTn>
+                                        <p:tgtEl>
+                                          <p:spTgt spid="3">
+                                            <p:txEl>
+                                              <p:pRg st="1" end="1"/>
+                                            </p:txEl>
+                                          </p:spTgt>
+                                        </p:tgtEl>
+                                        <p:attrNameLst>
+                                          <p:attrName>style.visibility</p:attrName>
+                                        </p:attrNameLst>
+                                      </p:cBhvr>
+                                      <p:to>
+                                        <p:strVal val="visible"/>
+                                      </p:to>
+                                    </p:set>
+                                  </p:childTnLst>
+                                </p:cTn>
+                              </p:par>
+                            </p:childTnLst>
+                          </p:cTn>
+                        </p:par>
+                      </p:childTnLst>
+                    </p:cTn>
+                  </p:par>
+                  <p:par>
+                    <p:cTn id="7" fill="hold">
+                      <p:stCondLst>
+                        <p:cond delay="indefinite"/>
+                      </p:stCondLst>
+                      <p:childTnLst>
+                        <p:par>
+                          <p:cTn id="8" fill="hold">
+                            <p:stCondLst>
+                              <p:cond delay="0"/>
+                            </p:stCondLst>
+                            <p:childTnLst>
+                              <p:par>
+                                <p:cTn id="9" presetID="1" presetClass="entr" presetSubtype="0" fill="hold" nodeType="clickEffect">
+                                  <p:stCondLst>
+                                    <p:cond delay="0"/>
+                                  </p:stCondLst>
+                                  <p:childTnLst>
+                                    <p:set>
+                                      <p:cBhvr>
+                                        <p:cTn id="10" dur="1" fill="hold">
+                                          <p:stCondLst>
+                                            <p:cond delay="0"/>
+                                          </p:stCondLst>
+                                        </p:cTn>
+                                        <p:tgtEl>
+                                          <p:spTgt spid="3">
+                                            <p:txEl>
+                                              <p:pRg st="2" end="2"/>
+                                            </p:txEl>
+                                          </p:spTgt>
+                                        </p:tgtEl>
+                                        <p:attrNameLst>
+                                          <p:attrName>style.visibility</p:attrName>
+                                        </p:attrNameLst>
+                                      </p:cBhvr>
+                                      <p:to>
+                                        <p:strVal val="visible"/>
+                                      </p:to>
+                                    </p:set>
+                                  </p:childTnLst>
+                                </p:cTn>
+                              </p:par>
+                              <p:par>
+                                <p:cTn id="11" presetID="1" presetClass="entr" presetSubtype="0" fill="hold" nodeType="withEffect">
+                                  <p:stCondLst>
+                                    <p:cond delay="0"/>
+                                  </p:stCondLst>
+                                  <p:childTnLst>
+                                    <p:set>
+                                      <p:cBhvr>
+                                        <p:cTn id="12" dur="1" fill="hold">
+                                          <p:stCondLst>
+                                            <p:cond delay="0"/>
+                                          </p:stCondLst>
+                                        </p:cTn>
+                                        <p:tgtEl>
+                                          <p:spTgt spid="3">
+                                            <p:txEl>
+                                              <p:pRg st="3" end="3"/>
+                                            </p:txEl>
+                                          </p:spTgt>
+                                        </p:tgtEl>
+                                        <p:attrNameLst>
+                                          <p:attrName>style.visibility</p:attrName>
+                                        </p:attrNameLst>
+                                      </p:cBhvr>
+                                      <p:to>
+                                        <p:strVal val="visible"/>
+                                      </p:to>
+                                    </p:set>
+                                  </p:childTnLst>
+                                </p:cTn>
+                              </p:par>
+                            </p:childTnLst>
+                          </p:cTn>
+                        </p:par>
+                      </p:childTnLst>
+                    </p:cTn>
+                  </p:par>
+                  <p:par>
+                    <p:cTn id="13" fill="hold">
+                      <p:stCondLst>
+                        <p:cond delay="indefinite"/>
+                      </p:stCondLst>
+                      <p:childTnLst>
+                        <p:par>
+                          <p:cTn id="14" fill="hold">
+                            <p:stCondLst>
+                              <p:cond delay="0"/>
+                            </p:stCondLst>
+                            <p:childTnLst>
+                              <p:par>
+                                <p:cTn id="15" presetID="1" presetClass="entr" presetSubtype="0" fill="hold" nodeType="clickEffect">
+                                  <p:stCondLst>
+                                    <p:cond delay="0"/>
+                                  </p:stCondLst>
+                                  <p:childTnLst>
+                                    <p:set>
+                                      <p:cBhvr>
+                                        <p:cTn id="16" dur="1" fill="hold">
+                                          <p:stCondLst>
+                                            <p:cond delay="0"/>
+                                          </p:stCondLst>
+                                        </p:cTn>
+                                        <p:tgtEl>
+                                          <p:spTgt spid="3">
+                                            <p:txEl>
+                                              <p:pRg st="4" end="4"/>
+                                            </p:txEl>
+                                          </p:spTgt>
+                                        </p:tgtEl>
+                                        <p:attrNameLst>
+                                          <p:attrName>style.visibility</p:attrName>
+                                        </p:attrNameLst>
+                                      </p:cBhvr>
+                                      <p:to>
+                                        <p:strVal val="visible"/>
+                                      </p:to>
+                                    </p:set>
+                                  </p:childTnLst>
+                                </p:cTn>
+                              </p:par>
+                              <p:par>
+                                <p:cTn id="17" presetID="1" presetClass="entr" presetSubtype="0" fill="hold" nodeType="withEffect">
+                                  <p:stCondLst>
+                                    <p:cond delay="0"/>
+                                  </p:stCondLst>
+                                  <p:childTnLst>
+                                    <p:set>
+                                      <p:cBhvr>
+                                        <p:cTn id="18" dur="1" fill="hold">
+                                          <p:stCondLst>
+                                            <p:cond delay="0"/>
+                                          </p:stCondLst>
+                                        </p:cTn>
+                                        <p:tgtEl>
+                                          <p:spTgt spid="3">
+                                            <p:txEl>
+                                              <p:pRg st="5" end="5"/>
+                                            </p:txEl>
+                                          </p:spTgt>
+                                        </p:tgtEl>
+                                        <p:attrNameLst>
+                                          <p:attrName>style.visibility</p:attrName>
+                                        </p:attrNameLst>
+                                      </p:cBhvr>
+                                      <p:to>
+                                        <p:strVal val="visible"/>
+                                      </p:to>
+                                    </p:set>
+                                  </p:childTnLst>
+                                </p:cTn>
+                              </p:par>
+                            </p:childTnLst>
+                          </p:cTn>
+                        </p:par>
+                      </p:childTnLst>
+                    </p:cTn>
+                  </p:par>
+                </p:childTnLst>
+              </p:cTn>
+              <p:prevCondLst>
+                <p:cond evt="onPrev" delay="0">
+                  <p:tgtEl>
+                    <p:sldTgt/>
+                  </p:tgtEl>
+                </p:cond>
+              </p:prevCondLst>
+              <p:nextCondLst>
+                <p:cond evt="onNext" delay="0">
+                  <p:tgtEl>
+                    <p:sldTgt/>
+                  </p:tgtEl>
+                </p:cond>
+              </p:nextCondLst>
+            </p:seq>
+          </p:childTnLst>
+        </p:cTn>
+      </p:par>
+    </p:tnLst>
+  </p:timing>
 </p:sld>
 </file>
 
@@ -8457,8 +10147,8 @@
           </a:p>
         </p:txBody>
       </p:sp>
-      <mc:AlternateContent xmlns:mc="http://schemas.openxmlformats.org/markup-compatibility/2006" xmlns:a14="http://schemas.microsoft.com/office/drawing/2010/main">
-        <mc:Choice Requires="a14">
+      <mc:AlternateContent xmlns:mc="http://schemas.openxmlformats.org/markup-compatibility/2006">
+        <mc:Choice xmlns:a14="http://schemas.microsoft.com/office/drawing/2010/main" Requires="a14">
           <p:sp>
             <p:nvSpPr>
               <p:cNvPr id="3" name="Content Placeholder 2"/>
@@ -8881,7 +10571,7 @@
             </p:txBody>
           </p:sp>
         </mc:Choice>
-        <mc:Fallback xmlns="">
+        <mc:Fallback>
           <p:sp>
             <p:nvSpPr>
               <p:cNvPr id="3" name="Content Placeholder 2"/>
@@ -8920,6 +10610,196 @@
   <p:clrMapOvr>
     <a:masterClrMapping/>
   </p:clrMapOvr>
+  <p:timing>
+    <p:tnLst>
+      <p:par>
+        <p:cTn id="1" dur="indefinite" restart="never" nodeType="tmRoot">
+          <p:childTnLst>
+            <p:seq concurrent="1" nextAc="seek">
+              <p:cTn id="2" dur="indefinite" nodeType="mainSeq">
+                <p:childTnLst>
+                  <p:par>
+                    <p:cTn id="3" fill="hold">
+                      <p:stCondLst>
+                        <p:cond delay="indefinite"/>
+                      </p:stCondLst>
+                      <p:childTnLst>
+                        <p:par>
+                          <p:cTn id="4" fill="hold">
+                            <p:stCondLst>
+                              <p:cond delay="0"/>
+                            </p:stCondLst>
+                            <p:childTnLst>
+                              <p:par>
+                                <p:cTn id="5" presetID="1" presetClass="entr" presetSubtype="0" fill="hold" nodeType="clickEffect">
+                                  <p:stCondLst>
+                                    <p:cond delay="0"/>
+                                  </p:stCondLst>
+                                  <p:childTnLst>
+                                    <p:set>
+                                      <p:cBhvr>
+                                        <p:cTn id="6" dur="1" fill="hold">
+                                          <p:stCondLst>
+                                            <p:cond delay="0"/>
+                                          </p:stCondLst>
+                                        </p:cTn>
+                                        <p:tgtEl>
+                                          <p:spTgt spid="3">
+                                            <p:txEl>
+                                              <p:pRg st="2" end="2"/>
+                                            </p:txEl>
+                                          </p:spTgt>
+                                        </p:tgtEl>
+                                        <p:attrNameLst>
+                                          <p:attrName>style.visibility</p:attrName>
+                                        </p:attrNameLst>
+                                      </p:cBhvr>
+                                      <p:to>
+                                        <p:strVal val="visible"/>
+                                      </p:to>
+                                    </p:set>
+                                  </p:childTnLst>
+                                </p:cTn>
+                              </p:par>
+                            </p:childTnLst>
+                          </p:cTn>
+                        </p:par>
+                      </p:childTnLst>
+                    </p:cTn>
+                  </p:par>
+                  <p:par>
+                    <p:cTn id="7" fill="hold">
+                      <p:stCondLst>
+                        <p:cond delay="indefinite"/>
+                      </p:stCondLst>
+                      <p:childTnLst>
+                        <p:par>
+                          <p:cTn id="8" fill="hold">
+                            <p:stCondLst>
+                              <p:cond delay="0"/>
+                            </p:stCondLst>
+                            <p:childTnLst>
+                              <p:par>
+                                <p:cTn id="9" presetID="1" presetClass="entr" presetSubtype="0" fill="hold" nodeType="clickEffect">
+                                  <p:stCondLst>
+                                    <p:cond delay="0"/>
+                                  </p:stCondLst>
+                                  <p:childTnLst>
+                                    <p:set>
+                                      <p:cBhvr>
+                                        <p:cTn id="10" dur="1" fill="hold">
+                                          <p:stCondLst>
+                                            <p:cond delay="0"/>
+                                          </p:stCondLst>
+                                        </p:cTn>
+                                        <p:tgtEl>
+                                          <p:spTgt spid="3">
+                                            <p:txEl>
+                                              <p:pRg st="3" end="3"/>
+                                            </p:txEl>
+                                          </p:spTgt>
+                                        </p:tgtEl>
+                                        <p:attrNameLst>
+                                          <p:attrName>style.visibility</p:attrName>
+                                        </p:attrNameLst>
+                                      </p:cBhvr>
+                                      <p:to>
+                                        <p:strVal val="visible"/>
+                                      </p:to>
+                                    </p:set>
+                                  </p:childTnLst>
+                                </p:cTn>
+                              </p:par>
+                              <p:par>
+                                <p:cTn id="11" presetID="1" presetClass="entr" presetSubtype="0" fill="hold" nodeType="withEffect">
+                                  <p:stCondLst>
+                                    <p:cond delay="0"/>
+                                  </p:stCondLst>
+                                  <p:childTnLst>
+                                    <p:set>
+                                      <p:cBhvr>
+                                        <p:cTn id="12" dur="1" fill="hold">
+                                          <p:stCondLst>
+                                            <p:cond delay="0"/>
+                                          </p:stCondLst>
+                                        </p:cTn>
+                                        <p:tgtEl>
+                                          <p:spTgt spid="3">
+                                            <p:txEl>
+                                              <p:pRg st="4" end="4"/>
+                                            </p:txEl>
+                                          </p:spTgt>
+                                        </p:tgtEl>
+                                        <p:attrNameLst>
+                                          <p:attrName>style.visibility</p:attrName>
+                                        </p:attrNameLst>
+                                      </p:cBhvr>
+                                      <p:to>
+                                        <p:strVal val="visible"/>
+                                      </p:to>
+                                    </p:set>
+                                  </p:childTnLst>
+                                </p:cTn>
+                              </p:par>
+                              <p:par>
+                                <p:cTn id="13" presetID="1" presetClass="entr" presetSubtype="0" fill="hold" nodeType="withEffect">
+                                  <p:stCondLst>
+                                    <p:cond delay="0"/>
+                                  </p:stCondLst>
+                                  <p:childTnLst>
+                                    <p:set>
+                                      <p:cBhvr>
+                                        <p:cTn id="14" dur="1" fill="hold">
+                                          <p:stCondLst>
+                                            <p:cond delay="0"/>
+                                          </p:stCondLst>
+                                        </p:cTn>
+                                        <p:tgtEl>
+                                          <p:spTgt spid="3">
+                                            <p:txEl>
+                                              <p:pRg st="5" end="5"/>
+                                            </p:txEl>
+                                          </p:spTgt>
+                                        </p:tgtEl>
+                                        <p:attrNameLst>
+                                          <p:attrName>style.visibility</p:attrName>
+                                        </p:attrNameLst>
+                                      </p:cBhvr>
+                                      <p:to>
+                                        <p:strVal val="visible"/>
+                                      </p:to>
+                                    </p:set>
+                                  </p:childTnLst>
+                                </p:cTn>
+                              </p:par>
+                            </p:childTnLst>
+                          </p:cTn>
+                        </p:par>
+                      </p:childTnLst>
+                    </p:cTn>
+                  </p:par>
+                </p:childTnLst>
+              </p:cTn>
+              <p:prevCondLst>
+                <p:cond evt="onPrev" delay="0">
+                  <p:tgtEl>
+                    <p:sldTgt/>
+                  </p:tgtEl>
+                </p:cond>
+              </p:prevCondLst>
+              <p:nextCondLst>
+                <p:cond evt="onNext" delay="0">
+                  <p:tgtEl>
+                    <p:sldTgt/>
+                  </p:tgtEl>
+                </p:cond>
+              </p:nextCondLst>
+            </p:seq>
+          </p:childTnLst>
+        </p:cTn>
+      </p:par>
+    </p:tnLst>
+  </p:timing>
 </p:sld>
 </file>
 
@@ -9166,6 +11046,325 @@
   <p:clrMapOvr>
     <a:masterClrMapping/>
   </p:clrMapOvr>
+  <p:timing>
+    <p:tnLst>
+      <p:par>
+        <p:cTn id="1" dur="indefinite" restart="never" nodeType="tmRoot">
+          <p:childTnLst>
+            <p:seq concurrent="1" nextAc="seek">
+              <p:cTn id="2" dur="indefinite" nodeType="mainSeq">
+                <p:childTnLst>
+                  <p:par>
+                    <p:cTn id="3" fill="hold">
+                      <p:stCondLst>
+                        <p:cond delay="indefinite"/>
+                      </p:stCondLst>
+                      <p:childTnLst>
+                        <p:par>
+                          <p:cTn id="4" fill="hold">
+                            <p:stCondLst>
+                              <p:cond delay="0"/>
+                            </p:stCondLst>
+                            <p:childTnLst>
+                              <p:par>
+                                <p:cTn id="5" presetID="1" presetClass="entr" presetSubtype="0" fill="hold" nodeType="clickEffect">
+                                  <p:stCondLst>
+                                    <p:cond delay="0"/>
+                                  </p:stCondLst>
+                                  <p:childTnLst>
+                                    <p:set>
+                                      <p:cBhvr>
+                                        <p:cTn id="6" dur="1" fill="hold">
+                                          <p:stCondLst>
+                                            <p:cond delay="0"/>
+                                          </p:stCondLst>
+                                        </p:cTn>
+                                        <p:tgtEl>
+                                          <p:spTgt spid="3">
+                                            <p:txEl>
+                                              <p:pRg st="1" end="1"/>
+                                            </p:txEl>
+                                          </p:spTgt>
+                                        </p:tgtEl>
+                                        <p:attrNameLst>
+                                          <p:attrName>style.visibility</p:attrName>
+                                        </p:attrNameLst>
+                                      </p:cBhvr>
+                                      <p:to>
+                                        <p:strVal val="visible"/>
+                                      </p:to>
+                                    </p:set>
+                                  </p:childTnLst>
+                                </p:cTn>
+                              </p:par>
+                            </p:childTnLst>
+                          </p:cTn>
+                        </p:par>
+                      </p:childTnLst>
+                    </p:cTn>
+                  </p:par>
+                  <p:par>
+                    <p:cTn id="7" fill="hold">
+                      <p:stCondLst>
+                        <p:cond delay="indefinite"/>
+                      </p:stCondLst>
+                      <p:childTnLst>
+                        <p:par>
+                          <p:cTn id="8" fill="hold">
+                            <p:stCondLst>
+                              <p:cond delay="0"/>
+                            </p:stCondLst>
+                            <p:childTnLst>
+                              <p:par>
+                                <p:cTn id="9" presetID="1" presetClass="entr" presetSubtype="0" fill="hold" nodeType="clickEffect">
+                                  <p:stCondLst>
+                                    <p:cond delay="0"/>
+                                  </p:stCondLst>
+                                  <p:childTnLst>
+                                    <p:set>
+                                      <p:cBhvr>
+                                        <p:cTn id="10" dur="1" fill="hold">
+                                          <p:stCondLst>
+                                            <p:cond delay="0"/>
+                                          </p:stCondLst>
+                                        </p:cTn>
+                                        <p:tgtEl>
+                                          <p:spTgt spid="3">
+                                            <p:txEl>
+                                              <p:pRg st="2" end="2"/>
+                                            </p:txEl>
+                                          </p:spTgt>
+                                        </p:tgtEl>
+                                        <p:attrNameLst>
+                                          <p:attrName>style.visibility</p:attrName>
+                                        </p:attrNameLst>
+                                      </p:cBhvr>
+                                      <p:to>
+                                        <p:strVal val="visible"/>
+                                      </p:to>
+                                    </p:set>
+                                  </p:childTnLst>
+                                </p:cTn>
+                              </p:par>
+                            </p:childTnLst>
+                          </p:cTn>
+                        </p:par>
+                      </p:childTnLst>
+                    </p:cTn>
+                  </p:par>
+                  <p:par>
+                    <p:cTn id="11" fill="hold">
+                      <p:stCondLst>
+                        <p:cond delay="indefinite"/>
+                      </p:stCondLst>
+                      <p:childTnLst>
+                        <p:par>
+                          <p:cTn id="12" fill="hold">
+                            <p:stCondLst>
+                              <p:cond delay="0"/>
+                            </p:stCondLst>
+                            <p:childTnLst>
+                              <p:par>
+                                <p:cTn id="13" presetID="1" presetClass="entr" presetSubtype="0" fill="hold" nodeType="clickEffect">
+                                  <p:stCondLst>
+                                    <p:cond delay="0"/>
+                                  </p:stCondLst>
+                                  <p:childTnLst>
+                                    <p:set>
+                                      <p:cBhvr>
+                                        <p:cTn id="14" dur="1" fill="hold">
+                                          <p:stCondLst>
+                                            <p:cond delay="0"/>
+                                          </p:stCondLst>
+                                        </p:cTn>
+                                        <p:tgtEl>
+                                          <p:spTgt spid="3">
+                                            <p:txEl>
+                                              <p:pRg st="3" end="3"/>
+                                            </p:txEl>
+                                          </p:spTgt>
+                                        </p:tgtEl>
+                                        <p:attrNameLst>
+                                          <p:attrName>style.visibility</p:attrName>
+                                        </p:attrNameLst>
+                                      </p:cBhvr>
+                                      <p:to>
+                                        <p:strVal val="visible"/>
+                                      </p:to>
+                                    </p:set>
+                                  </p:childTnLst>
+                                </p:cTn>
+                              </p:par>
+                              <p:par>
+                                <p:cTn id="15" presetID="1" presetClass="entr" presetSubtype="0" fill="hold" nodeType="withEffect">
+                                  <p:stCondLst>
+                                    <p:cond delay="0"/>
+                                  </p:stCondLst>
+                                  <p:childTnLst>
+                                    <p:set>
+                                      <p:cBhvr>
+                                        <p:cTn id="16" dur="1" fill="hold">
+                                          <p:stCondLst>
+                                            <p:cond delay="0"/>
+                                          </p:stCondLst>
+                                        </p:cTn>
+                                        <p:tgtEl>
+                                          <p:spTgt spid="3">
+                                            <p:txEl>
+                                              <p:pRg st="4" end="4"/>
+                                            </p:txEl>
+                                          </p:spTgt>
+                                        </p:tgtEl>
+                                        <p:attrNameLst>
+                                          <p:attrName>style.visibility</p:attrName>
+                                        </p:attrNameLst>
+                                      </p:cBhvr>
+                                      <p:to>
+                                        <p:strVal val="visible"/>
+                                      </p:to>
+                                    </p:set>
+                                  </p:childTnLst>
+                                </p:cTn>
+                              </p:par>
+                            </p:childTnLst>
+                          </p:cTn>
+                        </p:par>
+                      </p:childTnLst>
+                    </p:cTn>
+                  </p:par>
+                  <p:par>
+                    <p:cTn id="17" fill="hold">
+                      <p:stCondLst>
+                        <p:cond delay="indefinite"/>
+                      </p:stCondLst>
+                      <p:childTnLst>
+                        <p:par>
+                          <p:cTn id="18" fill="hold">
+                            <p:stCondLst>
+                              <p:cond delay="0"/>
+                            </p:stCondLst>
+                            <p:childTnLst>
+                              <p:par>
+                                <p:cTn id="19" presetID="1" presetClass="entr" presetSubtype="0" fill="hold" nodeType="clickEffect">
+                                  <p:stCondLst>
+                                    <p:cond delay="0"/>
+                                  </p:stCondLst>
+                                  <p:childTnLst>
+                                    <p:set>
+                                      <p:cBhvr>
+                                        <p:cTn id="20" dur="1" fill="hold">
+                                          <p:stCondLst>
+                                            <p:cond delay="0"/>
+                                          </p:stCondLst>
+                                        </p:cTn>
+                                        <p:tgtEl>
+                                          <p:spTgt spid="3">
+                                            <p:txEl>
+                                              <p:pRg st="5" end="5"/>
+                                            </p:txEl>
+                                          </p:spTgt>
+                                        </p:tgtEl>
+                                        <p:attrNameLst>
+                                          <p:attrName>style.visibility</p:attrName>
+                                        </p:attrNameLst>
+                                      </p:cBhvr>
+                                      <p:to>
+                                        <p:strVal val="visible"/>
+                                      </p:to>
+                                    </p:set>
+                                  </p:childTnLst>
+                                </p:cTn>
+                              </p:par>
+                              <p:par>
+                                <p:cTn id="21" presetID="1" presetClass="entr" presetSubtype="0" fill="hold" nodeType="withEffect">
+                                  <p:stCondLst>
+                                    <p:cond delay="0"/>
+                                  </p:stCondLst>
+                                  <p:childTnLst>
+                                    <p:set>
+                                      <p:cBhvr>
+                                        <p:cTn id="22" dur="1" fill="hold">
+                                          <p:stCondLst>
+                                            <p:cond delay="0"/>
+                                          </p:stCondLst>
+                                        </p:cTn>
+                                        <p:tgtEl>
+                                          <p:spTgt spid="3">
+                                            <p:txEl>
+                                              <p:pRg st="6" end="6"/>
+                                            </p:txEl>
+                                          </p:spTgt>
+                                        </p:tgtEl>
+                                        <p:attrNameLst>
+                                          <p:attrName>style.visibility</p:attrName>
+                                        </p:attrNameLst>
+                                      </p:cBhvr>
+                                      <p:to>
+                                        <p:strVal val="visible"/>
+                                      </p:to>
+                                    </p:set>
+                                  </p:childTnLst>
+                                </p:cTn>
+                              </p:par>
+                              <p:par>
+                                <p:cTn id="23" presetID="1" presetClass="entr" presetSubtype="0" fill="hold" nodeType="withEffect">
+                                  <p:stCondLst>
+                                    <p:cond delay="0"/>
+                                  </p:stCondLst>
+                                  <p:childTnLst>
+                                    <p:set>
+                                      <p:cBhvr>
+                                        <p:cTn id="24" dur="1" fill="hold">
+                                          <p:stCondLst>
+                                            <p:cond delay="0"/>
+                                          </p:stCondLst>
+                                        </p:cTn>
+                                        <p:tgtEl>
+                                          <p:spTgt spid="3">
+                                            <p:txEl>
+                                              <p:pRg st="7" end="7"/>
+                                            </p:txEl>
+                                          </p:spTgt>
+                                        </p:tgtEl>
+                                        <p:attrNameLst>
+                                          <p:attrName>style.visibility</p:attrName>
+                                        </p:attrNameLst>
+                                      </p:cBhvr>
+                                      <p:to>
+                                        <p:strVal val="visible"/>
+                                      </p:to>
+                                    </p:set>
+                                  </p:childTnLst>
+                                </p:cTn>
+                              </p:par>
+                            </p:childTnLst>
+                          </p:cTn>
+                        </p:par>
+                      </p:childTnLst>
+                    </p:cTn>
+                  </p:par>
+                </p:childTnLst>
+              </p:cTn>
+              <p:prevCondLst>
+                <p:cond evt="onPrev" delay="0">
+                  <p:tgtEl>
+                    <p:sldTgt/>
+                  </p:tgtEl>
+                </p:cond>
+              </p:prevCondLst>
+              <p:nextCondLst>
+                <p:cond evt="onNext" delay="0">
+                  <p:tgtEl>
+                    <p:sldTgt/>
+                  </p:tgtEl>
+                </p:cond>
+              </p:nextCondLst>
+            </p:seq>
+          </p:childTnLst>
+        </p:cTn>
+      </p:par>
+    </p:tnLst>
+  </p:timing>
 </p:sld>
 </file>
 
@@ -9210,8 +11409,8 @@
           </a:p>
         </p:txBody>
       </p:sp>
-      <mc:AlternateContent xmlns:mc="http://schemas.openxmlformats.org/markup-compatibility/2006" xmlns:a14="http://schemas.microsoft.com/office/drawing/2010/main">
-        <mc:Choice Requires="a14">
+      <mc:AlternateContent xmlns:mc="http://schemas.openxmlformats.org/markup-compatibility/2006">
+        <mc:Choice xmlns:a14="http://schemas.microsoft.com/office/drawing/2010/main" Requires="a14">
           <p:sp>
             <p:nvSpPr>
               <p:cNvPr id="3" name="Content Placeholder 2"/>
@@ -9860,7 +12059,7 @@
             </p:txBody>
           </p:sp>
         </mc:Choice>
-        <mc:Fallback xmlns="">
+        <mc:Fallback>
           <p:sp>
             <p:nvSpPr>
               <p:cNvPr id="3" name="Content Placeholder 2"/>
@@ -9899,6 +12098,165 @@
   <p:clrMapOvr>
     <a:masterClrMapping/>
   </p:clrMapOvr>
+  <p:timing>
+    <p:tnLst>
+      <p:par>
+        <p:cTn id="1" dur="indefinite" restart="never" nodeType="tmRoot">
+          <p:childTnLst>
+            <p:seq concurrent="1" nextAc="seek">
+              <p:cTn id="2" dur="indefinite" nodeType="mainSeq">
+                <p:childTnLst>
+                  <p:par>
+                    <p:cTn id="3" fill="hold">
+                      <p:stCondLst>
+                        <p:cond delay="indefinite"/>
+                      </p:stCondLst>
+                      <p:childTnLst>
+                        <p:par>
+                          <p:cTn id="4" fill="hold">
+                            <p:stCondLst>
+                              <p:cond delay="0"/>
+                            </p:stCondLst>
+                            <p:childTnLst>
+                              <p:par>
+                                <p:cTn id="5" presetID="1" presetClass="entr" presetSubtype="0" fill="hold" nodeType="clickEffect">
+                                  <p:stCondLst>
+                                    <p:cond delay="0"/>
+                                  </p:stCondLst>
+                                  <p:childTnLst>
+                                    <p:set>
+                                      <p:cBhvr>
+                                        <p:cTn id="6" dur="1" fill="hold">
+                                          <p:stCondLst>
+                                            <p:cond delay="0"/>
+                                          </p:stCondLst>
+                                        </p:cTn>
+                                        <p:tgtEl>
+                                          <p:spTgt spid="3">
+                                            <p:txEl>
+                                              <p:pRg st="2" end="2"/>
+                                            </p:txEl>
+                                          </p:spTgt>
+                                        </p:tgtEl>
+                                        <p:attrNameLst>
+                                          <p:attrName>style.visibility</p:attrName>
+                                        </p:attrNameLst>
+                                      </p:cBhvr>
+                                      <p:to>
+                                        <p:strVal val="visible"/>
+                                      </p:to>
+                                    </p:set>
+                                  </p:childTnLst>
+                                </p:cTn>
+                              </p:par>
+                              <p:par>
+                                <p:cTn id="7" presetID="1" presetClass="entr" presetSubtype="0" fill="hold" nodeType="withEffect">
+                                  <p:stCondLst>
+                                    <p:cond delay="0"/>
+                                  </p:stCondLst>
+                                  <p:childTnLst>
+                                    <p:set>
+                                      <p:cBhvr>
+                                        <p:cTn id="8" dur="1" fill="hold">
+                                          <p:stCondLst>
+                                            <p:cond delay="0"/>
+                                          </p:stCondLst>
+                                        </p:cTn>
+                                        <p:tgtEl>
+                                          <p:spTgt spid="3">
+                                            <p:txEl>
+                                              <p:pRg st="3" end="3"/>
+                                            </p:txEl>
+                                          </p:spTgt>
+                                        </p:tgtEl>
+                                        <p:attrNameLst>
+                                          <p:attrName>style.visibility</p:attrName>
+                                        </p:attrNameLst>
+                                      </p:cBhvr>
+                                      <p:to>
+                                        <p:strVal val="visible"/>
+                                      </p:to>
+                                    </p:set>
+                                  </p:childTnLst>
+                                </p:cTn>
+                              </p:par>
+                            </p:childTnLst>
+                          </p:cTn>
+                        </p:par>
+                      </p:childTnLst>
+                    </p:cTn>
+                  </p:par>
+                  <p:par>
+                    <p:cTn id="9" fill="hold">
+                      <p:stCondLst>
+                        <p:cond delay="indefinite"/>
+                      </p:stCondLst>
+                      <p:childTnLst>
+                        <p:par>
+                          <p:cTn id="10" fill="hold">
+                            <p:stCondLst>
+                              <p:cond delay="0"/>
+                            </p:stCondLst>
+                            <p:childTnLst>
+                              <p:par>
+                                <p:cTn id="11" presetID="1" presetClass="entr" presetSubtype="0" fill="hold" nodeType="clickEffect">
+                                  <p:stCondLst>
+                                    <p:cond delay="0"/>
+                                  </p:stCondLst>
+                                  <p:childTnLst>
+                                    <p:set>
+                                      <p:cBhvr>
+                                        <p:cTn id="12" dur="1" fill="hold">
+                                          <p:stCondLst>
+                                            <p:cond delay="0"/>
+                                          </p:stCondLst>
+                                        </p:cTn>
+                                        <p:tgtEl>
+                                          <p:spTgt spid="3">
+                                            <p:txEl>
+                                              <p:pRg st="4" end="4"/>
+                                            </p:txEl>
+                                          </p:spTgt>
+                                        </p:tgtEl>
+                                        <p:attrNameLst>
+                                          <p:attrName>style.visibility</p:attrName>
+                                        </p:attrNameLst>
+                                      </p:cBhvr>
+                                      <p:to>
+                                        <p:strVal val="visible"/>
+                                      </p:to>
+                                    </p:set>
+                                  </p:childTnLst>
+                                </p:cTn>
+                              </p:par>
+                            </p:childTnLst>
+                          </p:cTn>
+                        </p:par>
+                      </p:childTnLst>
+                    </p:cTn>
+                  </p:par>
+                </p:childTnLst>
+              </p:cTn>
+              <p:prevCondLst>
+                <p:cond evt="onPrev" delay="0">
+                  <p:tgtEl>
+                    <p:sldTgt/>
+                  </p:tgtEl>
+                </p:cond>
+              </p:prevCondLst>
+              <p:nextCondLst>
+                <p:cond evt="onNext" delay="0">
+                  <p:tgtEl>
+                    <p:sldTgt/>
+                  </p:tgtEl>
+                </p:cond>
+              </p:nextCondLst>
+            </p:seq>
+          </p:childTnLst>
+        </p:cTn>
+      </p:par>
+    </p:tnLst>
+  </p:timing>
 </p:sld>
 </file>
 
@@ -10510,6 +12868,480 @@
   <p:clrMapOvr>
     <a:masterClrMapping/>
   </p:clrMapOvr>
+  <p:timing>
+    <p:tnLst>
+      <p:par>
+        <p:cTn id="1" dur="indefinite" restart="never" nodeType="tmRoot">
+          <p:childTnLst>
+            <p:seq concurrent="1" nextAc="seek">
+              <p:cTn id="2" dur="indefinite" nodeType="mainSeq">
+                <p:childTnLst>
+                  <p:par>
+                    <p:cTn id="3" fill="hold">
+                      <p:stCondLst>
+                        <p:cond delay="indefinite"/>
+                      </p:stCondLst>
+                      <p:childTnLst>
+                        <p:par>
+                          <p:cTn id="4" fill="hold">
+                            <p:stCondLst>
+                              <p:cond delay="0"/>
+                            </p:stCondLst>
+                            <p:childTnLst>
+                              <p:par>
+                                <p:cTn id="5" presetID="1" presetClass="entr" presetSubtype="0" fill="hold" nodeType="clickEffect">
+                                  <p:stCondLst>
+                                    <p:cond delay="0"/>
+                                  </p:stCondLst>
+                                  <p:childTnLst>
+                                    <p:set>
+                                      <p:cBhvr>
+                                        <p:cTn id="6" dur="1" fill="hold">
+                                          <p:stCondLst>
+                                            <p:cond delay="0"/>
+                                          </p:stCondLst>
+                                        </p:cTn>
+                                        <p:tgtEl>
+                                          <p:spTgt spid="3">
+                                            <p:txEl>
+                                              <p:pRg st="1" end="1"/>
+                                            </p:txEl>
+                                          </p:spTgt>
+                                        </p:tgtEl>
+                                        <p:attrNameLst>
+                                          <p:attrName>style.visibility</p:attrName>
+                                        </p:attrNameLst>
+                                      </p:cBhvr>
+                                      <p:to>
+                                        <p:strVal val="visible"/>
+                                      </p:to>
+                                    </p:set>
+                                  </p:childTnLst>
+                                </p:cTn>
+                              </p:par>
+                              <p:par>
+                                <p:cTn id="7" presetID="1" presetClass="entr" presetSubtype="0" fill="hold" nodeType="withEffect">
+                                  <p:stCondLst>
+                                    <p:cond delay="0"/>
+                                  </p:stCondLst>
+                                  <p:childTnLst>
+                                    <p:set>
+                                      <p:cBhvr>
+                                        <p:cTn id="8" dur="1" fill="hold">
+                                          <p:stCondLst>
+                                            <p:cond delay="0"/>
+                                          </p:stCondLst>
+                                        </p:cTn>
+                                        <p:tgtEl>
+                                          <p:spTgt spid="3">
+                                            <p:txEl>
+                                              <p:pRg st="2" end="2"/>
+                                            </p:txEl>
+                                          </p:spTgt>
+                                        </p:tgtEl>
+                                        <p:attrNameLst>
+                                          <p:attrName>style.visibility</p:attrName>
+                                        </p:attrNameLst>
+                                      </p:cBhvr>
+                                      <p:to>
+                                        <p:strVal val="visible"/>
+                                      </p:to>
+                                    </p:set>
+                                  </p:childTnLst>
+                                </p:cTn>
+                              </p:par>
+                              <p:par>
+                                <p:cTn id="9" presetID="1" presetClass="entr" presetSubtype="0" fill="hold" nodeType="withEffect">
+                                  <p:stCondLst>
+                                    <p:cond delay="0"/>
+                                  </p:stCondLst>
+                                  <p:childTnLst>
+                                    <p:set>
+                                      <p:cBhvr>
+                                        <p:cTn id="10" dur="1" fill="hold">
+                                          <p:stCondLst>
+                                            <p:cond delay="0"/>
+                                          </p:stCondLst>
+                                        </p:cTn>
+                                        <p:tgtEl>
+                                          <p:spTgt spid="3">
+                                            <p:txEl>
+                                              <p:pRg st="3" end="3"/>
+                                            </p:txEl>
+                                          </p:spTgt>
+                                        </p:tgtEl>
+                                        <p:attrNameLst>
+                                          <p:attrName>style.visibility</p:attrName>
+                                        </p:attrNameLst>
+                                      </p:cBhvr>
+                                      <p:to>
+                                        <p:strVal val="visible"/>
+                                      </p:to>
+                                    </p:set>
+                                  </p:childTnLst>
+                                </p:cTn>
+                              </p:par>
+                            </p:childTnLst>
+                          </p:cTn>
+                        </p:par>
+                      </p:childTnLst>
+                    </p:cTn>
+                  </p:par>
+                  <p:par>
+                    <p:cTn id="11" fill="hold">
+                      <p:stCondLst>
+                        <p:cond delay="indefinite"/>
+                      </p:stCondLst>
+                      <p:childTnLst>
+                        <p:par>
+                          <p:cTn id="12" fill="hold">
+                            <p:stCondLst>
+                              <p:cond delay="0"/>
+                            </p:stCondLst>
+                            <p:childTnLst>
+                              <p:par>
+                                <p:cTn id="13" presetID="1" presetClass="entr" presetSubtype="0" fill="hold" nodeType="clickEffect">
+                                  <p:stCondLst>
+                                    <p:cond delay="0"/>
+                                  </p:stCondLst>
+                                  <p:childTnLst>
+                                    <p:set>
+                                      <p:cBhvr>
+                                        <p:cTn id="14" dur="1" fill="hold">
+                                          <p:stCondLst>
+                                            <p:cond delay="0"/>
+                                          </p:stCondLst>
+                                        </p:cTn>
+                                        <p:tgtEl>
+                                          <p:spTgt spid="3">
+                                            <p:txEl>
+                                              <p:pRg st="4" end="4"/>
+                                            </p:txEl>
+                                          </p:spTgt>
+                                        </p:tgtEl>
+                                        <p:attrNameLst>
+                                          <p:attrName>style.visibility</p:attrName>
+                                        </p:attrNameLst>
+                                      </p:cBhvr>
+                                      <p:to>
+                                        <p:strVal val="visible"/>
+                                      </p:to>
+                                    </p:set>
+                                  </p:childTnLst>
+                                </p:cTn>
+                              </p:par>
+                              <p:par>
+                                <p:cTn id="15" presetID="1" presetClass="entr" presetSubtype="0" fill="hold" nodeType="withEffect">
+                                  <p:stCondLst>
+                                    <p:cond delay="0"/>
+                                  </p:stCondLst>
+                                  <p:childTnLst>
+                                    <p:set>
+                                      <p:cBhvr>
+                                        <p:cTn id="16" dur="1" fill="hold">
+                                          <p:stCondLst>
+                                            <p:cond delay="0"/>
+                                          </p:stCondLst>
+                                        </p:cTn>
+                                        <p:tgtEl>
+                                          <p:spTgt spid="3">
+                                            <p:txEl>
+                                              <p:pRg st="5" end="5"/>
+                                            </p:txEl>
+                                          </p:spTgt>
+                                        </p:tgtEl>
+                                        <p:attrNameLst>
+                                          <p:attrName>style.visibility</p:attrName>
+                                        </p:attrNameLst>
+                                      </p:cBhvr>
+                                      <p:to>
+                                        <p:strVal val="visible"/>
+                                      </p:to>
+                                    </p:set>
+                                  </p:childTnLst>
+                                </p:cTn>
+                              </p:par>
+                              <p:par>
+                                <p:cTn id="17" presetID="1" presetClass="entr" presetSubtype="0" fill="hold" nodeType="withEffect">
+                                  <p:stCondLst>
+                                    <p:cond delay="0"/>
+                                  </p:stCondLst>
+                                  <p:childTnLst>
+                                    <p:set>
+                                      <p:cBhvr>
+                                        <p:cTn id="18" dur="1" fill="hold">
+                                          <p:stCondLst>
+                                            <p:cond delay="0"/>
+                                          </p:stCondLst>
+                                        </p:cTn>
+                                        <p:tgtEl>
+                                          <p:spTgt spid="3">
+                                            <p:txEl>
+                                              <p:pRg st="6" end="6"/>
+                                            </p:txEl>
+                                          </p:spTgt>
+                                        </p:tgtEl>
+                                        <p:attrNameLst>
+                                          <p:attrName>style.visibility</p:attrName>
+                                        </p:attrNameLst>
+                                      </p:cBhvr>
+                                      <p:to>
+                                        <p:strVal val="visible"/>
+                                      </p:to>
+                                    </p:set>
+                                  </p:childTnLst>
+                                </p:cTn>
+                              </p:par>
+                            </p:childTnLst>
+                          </p:cTn>
+                        </p:par>
+                      </p:childTnLst>
+                    </p:cTn>
+                  </p:par>
+                  <p:par>
+                    <p:cTn id="19" fill="hold">
+                      <p:stCondLst>
+                        <p:cond delay="indefinite"/>
+                      </p:stCondLst>
+                      <p:childTnLst>
+                        <p:par>
+                          <p:cTn id="20" fill="hold">
+                            <p:stCondLst>
+                              <p:cond delay="0"/>
+                            </p:stCondLst>
+                            <p:childTnLst>
+                              <p:par>
+                                <p:cTn id="21" presetID="1" presetClass="entr" presetSubtype="0" fill="hold" nodeType="clickEffect">
+                                  <p:stCondLst>
+                                    <p:cond delay="0"/>
+                                  </p:stCondLst>
+                                  <p:childTnLst>
+                                    <p:set>
+                                      <p:cBhvr>
+                                        <p:cTn id="22" dur="1" fill="hold">
+                                          <p:stCondLst>
+                                            <p:cond delay="0"/>
+                                          </p:stCondLst>
+                                        </p:cTn>
+                                        <p:tgtEl>
+                                          <p:spTgt spid="3">
+                                            <p:txEl>
+                                              <p:pRg st="7" end="7"/>
+                                            </p:txEl>
+                                          </p:spTgt>
+                                        </p:tgtEl>
+                                        <p:attrNameLst>
+                                          <p:attrName>style.visibility</p:attrName>
+                                        </p:attrNameLst>
+                                      </p:cBhvr>
+                                      <p:to>
+                                        <p:strVal val="visible"/>
+                                      </p:to>
+                                    </p:set>
+                                  </p:childTnLst>
+                                </p:cTn>
+                              </p:par>
+                              <p:par>
+                                <p:cTn id="23" presetID="1" presetClass="entr" presetSubtype="0" fill="hold" nodeType="withEffect">
+                                  <p:stCondLst>
+                                    <p:cond delay="0"/>
+                                  </p:stCondLst>
+                                  <p:childTnLst>
+                                    <p:set>
+                                      <p:cBhvr>
+                                        <p:cTn id="24" dur="1" fill="hold">
+                                          <p:stCondLst>
+                                            <p:cond delay="0"/>
+                                          </p:stCondLst>
+                                        </p:cTn>
+                                        <p:tgtEl>
+                                          <p:spTgt spid="3">
+                                            <p:txEl>
+                                              <p:pRg st="8" end="8"/>
+                                            </p:txEl>
+                                          </p:spTgt>
+                                        </p:tgtEl>
+                                        <p:attrNameLst>
+                                          <p:attrName>style.visibility</p:attrName>
+                                        </p:attrNameLst>
+                                      </p:cBhvr>
+                                      <p:to>
+                                        <p:strVal val="visible"/>
+                                      </p:to>
+                                    </p:set>
+                                  </p:childTnLst>
+                                </p:cTn>
+                              </p:par>
+                              <p:par>
+                                <p:cTn id="25" presetID="1" presetClass="entr" presetSubtype="0" fill="hold" nodeType="withEffect">
+                                  <p:stCondLst>
+                                    <p:cond delay="0"/>
+                                  </p:stCondLst>
+                                  <p:childTnLst>
+                                    <p:set>
+                                      <p:cBhvr>
+                                        <p:cTn id="26" dur="1" fill="hold">
+                                          <p:stCondLst>
+                                            <p:cond delay="0"/>
+                                          </p:stCondLst>
+                                        </p:cTn>
+                                        <p:tgtEl>
+                                          <p:spTgt spid="3">
+                                            <p:txEl>
+                                              <p:pRg st="9" end="9"/>
+                                            </p:txEl>
+                                          </p:spTgt>
+                                        </p:tgtEl>
+                                        <p:attrNameLst>
+                                          <p:attrName>style.visibility</p:attrName>
+                                        </p:attrNameLst>
+                                      </p:cBhvr>
+                                      <p:to>
+                                        <p:strVal val="visible"/>
+                                      </p:to>
+                                    </p:set>
+                                  </p:childTnLst>
+                                </p:cTn>
+                              </p:par>
+                            </p:childTnLst>
+                          </p:cTn>
+                        </p:par>
+                      </p:childTnLst>
+                    </p:cTn>
+                  </p:par>
+                  <p:par>
+                    <p:cTn id="27" fill="hold">
+                      <p:stCondLst>
+                        <p:cond delay="indefinite"/>
+                      </p:stCondLst>
+                      <p:childTnLst>
+                        <p:par>
+                          <p:cTn id="28" fill="hold">
+                            <p:stCondLst>
+                              <p:cond delay="0"/>
+                            </p:stCondLst>
+                            <p:childTnLst>
+                              <p:par>
+                                <p:cTn id="29" presetID="1" presetClass="entr" presetSubtype="0" fill="hold" nodeType="clickEffect">
+                                  <p:stCondLst>
+                                    <p:cond delay="0"/>
+                                  </p:stCondLst>
+                                  <p:childTnLst>
+                                    <p:set>
+                                      <p:cBhvr>
+                                        <p:cTn id="30" dur="1" fill="hold">
+                                          <p:stCondLst>
+                                            <p:cond delay="0"/>
+                                          </p:stCondLst>
+                                        </p:cTn>
+                                        <p:tgtEl>
+                                          <p:spTgt spid="3">
+                                            <p:txEl>
+                                              <p:pRg st="10" end="10"/>
+                                            </p:txEl>
+                                          </p:spTgt>
+                                        </p:tgtEl>
+                                        <p:attrNameLst>
+                                          <p:attrName>style.visibility</p:attrName>
+                                        </p:attrNameLst>
+                                      </p:cBhvr>
+                                      <p:to>
+                                        <p:strVal val="visible"/>
+                                      </p:to>
+                                    </p:set>
+                                  </p:childTnLst>
+                                </p:cTn>
+                              </p:par>
+                              <p:par>
+                                <p:cTn id="31" presetID="1" presetClass="entr" presetSubtype="0" fill="hold" nodeType="withEffect">
+                                  <p:stCondLst>
+                                    <p:cond delay="0"/>
+                                  </p:stCondLst>
+                                  <p:childTnLst>
+                                    <p:set>
+                                      <p:cBhvr>
+                                        <p:cTn id="32" dur="1" fill="hold">
+                                          <p:stCondLst>
+                                            <p:cond delay="0"/>
+                                          </p:stCondLst>
+                                        </p:cTn>
+                                        <p:tgtEl>
+                                          <p:spTgt spid="3">
+                                            <p:txEl>
+                                              <p:pRg st="11" end="11"/>
+                                            </p:txEl>
+                                          </p:spTgt>
+                                        </p:tgtEl>
+                                        <p:attrNameLst>
+                                          <p:attrName>style.visibility</p:attrName>
+                                        </p:attrNameLst>
+                                      </p:cBhvr>
+                                      <p:to>
+                                        <p:strVal val="visible"/>
+                                      </p:to>
+                                    </p:set>
+                                  </p:childTnLst>
+                                </p:cTn>
+                              </p:par>
+                              <p:par>
+                                <p:cTn id="33" presetID="1" presetClass="entr" presetSubtype="0" fill="hold" nodeType="withEffect">
+                                  <p:stCondLst>
+                                    <p:cond delay="0"/>
+                                  </p:stCondLst>
+                                  <p:childTnLst>
+                                    <p:set>
+                                      <p:cBhvr>
+                                        <p:cTn id="34" dur="1" fill="hold">
+                                          <p:stCondLst>
+                                            <p:cond delay="0"/>
+                                          </p:stCondLst>
+                                        </p:cTn>
+                                        <p:tgtEl>
+                                          <p:spTgt spid="3">
+                                            <p:txEl>
+                                              <p:pRg st="12" end="12"/>
+                                            </p:txEl>
+                                          </p:spTgt>
+                                        </p:tgtEl>
+                                        <p:attrNameLst>
+                                          <p:attrName>style.visibility</p:attrName>
+                                        </p:attrNameLst>
+                                      </p:cBhvr>
+                                      <p:to>
+                                        <p:strVal val="visible"/>
+                                      </p:to>
+                                    </p:set>
+                                  </p:childTnLst>
+                                </p:cTn>
+                              </p:par>
+                            </p:childTnLst>
+                          </p:cTn>
+                        </p:par>
+                      </p:childTnLst>
+                    </p:cTn>
+                  </p:par>
+                </p:childTnLst>
+              </p:cTn>
+              <p:prevCondLst>
+                <p:cond evt="onPrev" delay="0">
+                  <p:tgtEl>
+                    <p:sldTgt/>
+                  </p:tgtEl>
+                </p:cond>
+              </p:prevCondLst>
+              <p:nextCondLst>
+                <p:cond evt="onNext" delay="0">
+                  <p:tgtEl>
+                    <p:sldTgt/>
+                  </p:tgtEl>
+                </p:cond>
+              </p:nextCondLst>
+            </p:seq>
+          </p:childTnLst>
+        </p:cTn>
+      </p:par>
+    </p:tnLst>
+  </p:timing>
 </p:sld>
 </file>
 
@@ -10554,8 +13386,8 @@
           </a:p>
         </p:txBody>
       </p:sp>
-      <mc:AlternateContent xmlns:mc="http://schemas.openxmlformats.org/markup-compatibility/2006">
-        <mc:Choice xmlns:a14="http://schemas.microsoft.com/office/drawing/2010/main" Requires="a14">
+      <mc:AlternateContent xmlns:mc="http://schemas.openxmlformats.org/markup-compatibility/2006" xmlns:a14="http://schemas.microsoft.com/office/drawing/2010/main">
+        <mc:Choice Requires="a14">
           <p:sp>
             <p:nvSpPr>
               <p:cNvPr id="3" name="Content Placeholder 2"/>
@@ -11469,7 +14301,7 @@
             </p:txBody>
           </p:sp>
         </mc:Choice>
-        <mc:Fallback>
+        <mc:Fallback xmlns="">
           <p:sp>
             <p:nvSpPr>
               <p:cNvPr id="3" name="Content Placeholder 2"/>
@@ -11512,6 +14344,343 @@
   <p:clrMapOvr>
     <a:masterClrMapping/>
   </p:clrMapOvr>
+  <p:timing>
+    <p:tnLst>
+      <p:par>
+        <p:cTn id="1" dur="indefinite" restart="never" nodeType="tmRoot">
+          <p:childTnLst>
+            <p:seq concurrent="1" nextAc="seek">
+              <p:cTn id="2" dur="indefinite" nodeType="mainSeq">
+                <p:childTnLst>
+                  <p:par>
+                    <p:cTn id="3" fill="hold">
+                      <p:stCondLst>
+                        <p:cond delay="indefinite"/>
+                      </p:stCondLst>
+                      <p:childTnLst>
+                        <p:par>
+                          <p:cTn id="4" fill="hold">
+                            <p:stCondLst>
+                              <p:cond delay="0"/>
+                            </p:stCondLst>
+                            <p:childTnLst>
+                              <p:par>
+                                <p:cTn id="5" presetID="1" presetClass="entr" presetSubtype="0" fill="hold" nodeType="clickEffect">
+                                  <p:stCondLst>
+                                    <p:cond delay="0"/>
+                                  </p:stCondLst>
+                                  <p:childTnLst>
+                                    <p:set>
+                                      <p:cBhvr>
+                                        <p:cTn id="6" dur="1" fill="hold">
+                                          <p:stCondLst>
+                                            <p:cond delay="0"/>
+                                          </p:stCondLst>
+                                        </p:cTn>
+                                        <p:tgtEl>
+                                          <p:spTgt spid="3">
+                                            <p:txEl>
+                                              <p:pRg st="1" end="1"/>
+                                            </p:txEl>
+                                          </p:spTgt>
+                                        </p:tgtEl>
+                                        <p:attrNameLst>
+                                          <p:attrName>style.visibility</p:attrName>
+                                        </p:attrNameLst>
+                                      </p:cBhvr>
+                                      <p:to>
+                                        <p:strVal val="visible"/>
+                                      </p:to>
+                                    </p:set>
+                                  </p:childTnLst>
+                                </p:cTn>
+                              </p:par>
+                            </p:childTnLst>
+                          </p:cTn>
+                        </p:par>
+                      </p:childTnLst>
+                    </p:cTn>
+                  </p:par>
+                  <p:par>
+                    <p:cTn id="7" fill="hold">
+                      <p:stCondLst>
+                        <p:cond delay="indefinite"/>
+                      </p:stCondLst>
+                      <p:childTnLst>
+                        <p:par>
+                          <p:cTn id="8" fill="hold">
+                            <p:stCondLst>
+                              <p:cond delay="0"/>
+                            </p:stCondLst>
+                            <p:childTnLst>
+                              <p:par>
+                                <p:cTn id="9" presetID="1" presetClass="entr" presetSubtype="0" fill="hold" nodeType="clickEffect">
+                                  <p:stCondLst>
+                                    <p:cond delay="0"/>
+                                  </p:stCondLst>
+                                  <p:childTnLst>
+                                    <p:set>
+                                      <p:cBhvr>
+                                        <p:cTn id="10" dur="1" fill="hold">
+                                          <p:stCondLst>
+                                            <p:cond delay="0"/>
+                                          </p:stCondLst>
+                                        </p:cTn>
+                                        <p:tgtEl>
+                                          <p:spTgt spid="3">
+                                            <p:txEl>
+                                              <p:pRg st="2" end="2"/>
+                                            </p:txEl>
+                                          </p:spTgt>
+                                        </p:tgtEl>
+                                        <p:attrNameLst>
+                                          <p:attrName>style.visibility</p:attrName>
+                                        </p:attrNameLst>
+                                      </p:cBhvr>
+                                      <p:to>
+                                        <p:strVal val="visible"/>
+                                      </p:to>
+                                    </p:set>
+                                  </p:childTnLst>
+                                </p:cTn>
+                              </p:par>
+                            </p:childTnLst>
+                          </p:cTn>
+                        </p:par>
+                      </p:childTnLst>
+                    </p:cTn>
+                  </p:par>
+                  <p:par>
+                    <p:cTn id="11" fill="hold">
+                      <p:stCondLst>
+                        <p:cond delay="indefinite"/>
+                      </p:stCondLst>
+                      <p:childTnLst>
+                        <p:par>
+                          <p:cTn id="12" fill="hold">
+                            <p:stCondLst>
+                              <p:cond delay="0"/>
+                            </p:stCondLst>
+                            <p:childTnLst>
+                              <p:par>
+                                <p:cTn id="13" presetID="1" presetClass="entr" presetSubtype="0" fill="hold" nodeType="clickEffect">
+                                  <p:stCondLst>
+                                    <p:cond delay="0"/>
+                                  </p:stCondLst>
+                                  <p:childTnLst>
+                                    <p:set>
+                                      <p:cBhvr>
+                                        <p:cTn id="14" dur="1" fill="hold">
+                                          <p:stCondLst>
+                                            <p:cond delay="0"/>
+                                          </p:stCondLst>
+                                        </p:cTn>
+                                        <p:tgtEl>
+                                          <p:spTgt spid="3">
+                                            <p:txEl>
+                                              <p:pRg st="3" end="3"/>
+                                            </p:txEl>
+                                          </p:spTgt>
+                                        </p:tgtEl>
+                                        <p:attrNameLst>
+                                          <p:attrName>style.visibility</p:attrName>
+                                        </p:attrNameLst>
+                                      </p:cBhvr>
+                                      <p:to>
+                                        <p:strVal val="visible"/>
+                                      </p:to>
+                                    </p:set>
+                                  </p:childTnLst>
+                                </p:cTn>
+                              </p:par>
+                              <p:par>
+                                <p:cTn id="15" presetID="1" presetClass="entr" presetSubtype="0" fill="hold" nodeType="withEffect">
+                                  <p:stCondLst>
+                                    <p:cond delay="0"/>
+                                  </p:stCondLst>
+                                  <p:childTnLst>
+                                    <p:set>
+                                      <p:cBhvr>
+                                        <p:cTn id="16" dur="1" fill="hold">
+                                          <p:stCondLst>
+                                            <p:cond delay="0"/>
+                                          </p:stCondLst>
+                                        </p:cTn>
+                                        <p:tgtEl>
+                                          <p:spTgt spid="3">
+                                            <p:txEl>
+                                              <p:pRg st="4" end="4"/>
+                                            </p:txEl>
+                                          </p:spTgt>
+                                        </p:tgtEl>
+                                        <p:attrNameLst>
+                                          <p:attrName>style.visibility</p:attrName>
+                                        </p:attrNameLst>
+                                      </p:cBhvr>
+                                      <p:to>
+                                        <p:strVal val="visible"/>
+                                      </p:to>
+                                    </p:set>
+                                  </p:childTnLst>
+                                </p:cTn>
+                              </p:par>
+                            </p:childTnLst>
+                          </p:cTn>
+                        </p:par>
+                      </p:childTnLst>
+                    </p:cTn>
+                  </p:par>
+                  <p:par>
+                    <p:cTn id="17" fill="hold">
+                      <p:stCondLst>
+                        <p:cond delay="indefinite"/>
+                      </p:stCondLst>
+                      <p:childTnLst>
+                        <p:par>
+                          <p:cTn id="18" fill="hold">
+                            <p:stCondLst>
+                              <p:cond delay="0"/>
+                            </p:stCondLst>
+                            <p:childTnLst>
+                              <p:par>
+                                <p:cTn id="19" presetID="1" presetClass="entr" presetSubtype="0" fill="hold" nodeType="clickEffect">
+                                  <p:stCondLst>
+                                    <p:cond delay="0"/>
+                                  </p:stCondLst>
+                                  <p:childTnLst>
+                                    <p:set>
+                                      <p:cBhvr>
+                                        <p:cTn id="20" dur="1" fill="hold">
+                                          <p:stCondLst>
+                                            <p:cond delay="0"/>
+                                          </p:stCondLst>
+                                        </p:cTn>
+                                        <p:tgtEl>
+                                          <p:spTgt spid="3">
+                                            <p:txEl>
+                                              <p:pRg st="5" end="5"/>
+                                            </p:txEl>
+                                          </p:spTgt>
+                                        </p:tgtEl>
+                                        <p:attrNameLst>
+                                          <p:attrName>style.visibility</p:attrName>
+                                        </p:attrNameLst>
+                                      </p:cBhvr>
+                                      <p:to>
+                                        <p:strVal val="visible"/>
+                                      </p:to>
+                                    </p:set>
+                                  </p:childTnLst>
+                                </p:cTn>
+                              </p:par>
+                              <p:par>
+                                <p:cTn id="21" presetID="1" presetClass="entr" presetSubtype="0" fill="hold" nodeType="withEffect">
+                                  <p:stCondLst>
+                                    <p:cond delay="0"/>
+                                  </p:stCondLst>
+                                  <p:childTnLst>
+                                    <p:set>
+                                      <p:cBhvr>
+                                        <p:cTn id="22" dur="1" fill="hold">
+                                          <p:stCondLst>
+                                            <p:cond delay="0"/>
+                                          </p:stCondLst>
+                                        </p:cTn>
+                                        <p:tgtEl>
+                                          <p:spTgt spid="3">
+                                            <p:txEl>
+                                              <p:pRg st="6" end="6"/>
+                                            </p:txEl>
+                                          </p:spTgt>
+                                        </p:tgtEl>
+                                        <p:attrNameLst>
+                                          <p:attrName>style.visibility</p:attrName>
+                                        </p:attrNameLst>
+                                      </p:cBhvr>
+                                      <p:to>
+                                        <p:strVal val="visible"/>
+                                      </p:to>
+                                    </p:set>
+                                  </p:childTnLst>
+                                </p:cTn>
+                              </p:par>
+                            </p:childTnLst>
+                          </p:cTn>
+                        </p:par>
+                      </p:childTnLst>
+                    </p:cTn>
+                  </p:par>
+                  <p:par>
+                    <p:cTn id="23" fill="hold">
+                      <p:stCondLst>
+                        <p:cond delay="indefinite"/>
+                      </p:stCondLst>
+                      <p:childTnLst>
+                        <p:par>
+                          <p:cTn id="24" fill="hold">
+                            <p:stCondLst>
+                              <p:cond delay="0"/>
+                            </p:stCondLst>
+                            <p:childTnLst>
+                              <p:par>
+                                <p:cTn id="25" presetID="1" presetClass="entr" presetSubtype="0" fill="hold" nodeType="clickEffect">
+                                  <p:stCondLst>
+                                    <p:cond delay="0"/>
+                                  </p:stCondLst>
+                                  <p:childTnLst>
+                                    <p:set>
+                                      <p:cBhvr>
+                                        <p:cTn id="26" dur="1" fill="hold">
+                                          <p:stCondLst>
+                                            <p:cond delay="0"/>
+                                          </p:stCondLst>
+                                        </p:cTn>
+                                        <p:tgtEl>
+                                          <p:spTgt spid="3">
+                                            <p:txEl>
+                                              <p:pRg st="7" end="7"/>
+                                            </p:txEl>
+                                          </p:spTgt>
+                                        </p:tgtEl>
+                                        <p:attrNameLst>
+                                          <p:attrName>style.visibility</p:attrName>
+                                        </p:attrNameLst>
+                                      </p:cBhvr>
+                                      <p:to>
+                                        <p:strVal val="visible"/>
+                                      </p:to>
+                                    </p:set>
+                                  </p:childTnLst>
+                                </p:cTn>
+                              </p:par>
+                            </p:childTnLst>
+                          </p:cTn>
+                        </p:par>
+                      </p:childTnLst>
+                    </p:cTn>
+                  </p:par>
+                </p:childTnLst>
+              </p:cTn>
+              <p:prevCondLst>
+                <p:cond evt="onPrev" delay="0">
+                  <p:tgtEl>
+                    <p:sldTgt/>
+                  </p:tgtEl>
+                </p:cond>
+              </p:prevCondLst>
+              <p:nextCondLst>
+                <p:cond evt="onNext" delay="0">
+                  <p:tgtEl>
+                    <p:sldTgt/>
+                  </p:tgtEl>
+                </p:cond>
+              </p:nextCondLst>
+            </p:seq>
+          </p:childTnLst>
+        </p:cTn>
+      </p:par>
+    </p:tnLst>
+  </p:timing>
 </p:sld>
 </file>
 
@@ -12298,6 +15467,374 @@
   <p:clrMapOvr>
     <a:masterClrMapping/>
   </p:clrMapOvr>
+  <p:timing>
+    <p:tnLst>
+      <p:par>
+        <p:cTn id="1" dur="indefinite" restart="never" nodeType="tmRoot">
+          <p:childTnLst>
+            <p:seq concurrent="1" nextAc="seek">
+              <p:cTn id="2" dur="indefinite" nodeType="mainSeq">
+                <p:childTnLst>
+                  <p:par>
+                    <p:cTn id="3" fill="hold">
+                      <p:stCondLst>
+                        <p:cond delay="indefinite"/>
+                      </p:stCondLst>
+                      <p:childTnLst>
+                        <p:par>
+                          <p:cTn id="4" fill="hold">
+                            <p:stCondLst>
+                              <p:cond delay="0"/>
+                            </p:stCondLst>
+                            <p:childTnLst>
+                              <p:par>
+                                <p:cTn id="5" presetID="1" presetClass="entr" presetSubtype="0" fill="hold" nodeType="clickEffect">
+                                  <p:stCondLst>
+                                    <p:cond delay="0"/>
+                                  </p:stCondLst>
+                                  <p:childTnLst>
+                                    <p:set>
+                                      <p:cBhvr>
+                                        <p:cTn id="6" dur="1" fill="hold">
+                                          <p:stCondLst>
+                                            <p:cond delay="0"/>
+                                          </p:stCondLst>
+                                        </p:cTn>
+                                        <p:tgtEl>
+                                          <p:spTgt spid="3">
+                                            <p:txEl>
+                                              <p:pRg st="1" end="1"/>
+                                            </p:txEl>
+                                          </p:spTgt>
+                                        </p:tgtEl>
+                                        <p:attrNameLst>
+                                          <p:attrName>style.visibility</p:attrName>
+                                        </p:attrNameLst>
+                                      </p:cBhvr>
+                                      <p:to>
+                                        <p:strVal val="visible"/>
+                                      </p:to>
+                                    </p:set>
+                                  </p:childTnLst>
+                                </p:cTn>
+                              </p:par>
+                            </p:childTnLst>
+                          </p:cTn>
+                        </p:par>
+                      </p:childTnLst>
+                    </p:cTn>
+                  </p:par>
+                  <p:par>
+                    <p:cTn id="7" fill="hold">
+                      <p:stCondLst>
+                        <p:cond delay="indefinite"/>
+                      </p:stCondLst>
+                      <p:childTnLst>
+                        <p:par>
+                          <p:cTn id="8" fill="hold">
+                            <p:stCondLst>
+                              <p:cond delay="0"/>
+                            </p:stCondLst>
+                            <p:childTnLst>
+                              <p:par>
+                                <p:cTn id="9" presetID="1" presetClass="entr" presetSubtype="0" fill="hold" nodeType="clickEffect">
+                                  <p:stCondLst>
+                                    <p:cond delay="0"/>
+                                  </p:stCondLst>
+                                  <p:childTnLst>
+                                    <p:set>
+                                      <p:cBhvr>
+                                        <p:cTn id="10" dur="1" fill="hold">
+                                          <p:stCondLst>
+                                            <p:cond delay="0"/>
+                                          </p:stCondLst>
+                                        </p:cTn>
+                                        <p:tgtEl>
+                                          <p:spTgt spid="3">
+                                            <p:txEl>
+                                              <p:pRg st="2" end="2"/>
+                                            </p:txEl>
+                                          </p:spTgt>
+                                        </p:tgtEl>
+                                        <p:attrNameLst>
+                                          <p:attrName>style.visibility</p:attrName>
+                                        </p:attrNameLst>
+                                      </p:cBhvr>
+                                      <p:to>
+                                        <p:strVal val="visible"/>
+                                      </p:to>
+                                    </p:set>
+                                  </p:childTnLst>
+                                </p:cTn>
+                              </p:par>
+                              <p:par>
+                                <p:cTn id="11" presetID="1" presetClass="entr" presetSubtype="0" fill="hold" nodeType="withEffect">
+                                  <p:stCondLst>
+                                    <p:cond delay="0"/>
+                                  </p:stCondLst>
+                                  <p:childTnLst>
+                                    <p:set>
+                                      <p:cBhvr>
+                                        <p:cTn id="12" dur="1" fill="hold">
+                                          <p:stCondLst>
+                                            <p:cond delay="0"/>
+                                          </p:stCondLst>
+                                        </p:cTn>
+                                        <p:tgtEl>
+                                          <p:spTgt spid="3">
+                                            <p:txEl>
+                                              <p:pRg st="3" end="3"/>
+                                            </p:txEl>
+                                          </p:spTgt>
+                                        </p:tgtEl>
+                                        <p:attrNameLst>
+                                          <p:attrName>style.visibility</p:attrName>
+                                        </p:attrNameLst>
+                                      </p:cBhvr>
+                                      <p:to>
+                                        <p:strVal val="visible"/>
+                                      </p:to>
+                                    </p:set>
+                                  </p:childTnLst>
+                                </p:cTn>
+                              </p:par>
+                            </p:childTnLst>
+                          </p:cTn>
+                        </p:par>
+                      </p:childTnLst>
+                    </p:cTn>
+                  </p:par>
+                  <p:par>
+                    <p:cTn id="13" fill="hold">
+                      <p:stCondLst>
+                        <p:cond delay="indefinite"/>
+                      </p:stCondLst>
+                      <p:childTnLst>
+                        <p:par>
+                          <p:cTn id="14" fill="hold">
+                            <p:stCondLst>
+                              <p:cond delay="0"/>
+                            </p:stCondLst>
+                            <p:childTnLst>
+                              <p:par>
+                                <p:cTn id="15" presetID="1" presetClass="entr" presetSubtype="0" fill="hold" nodeType="clickEffect">
+                                  <p:stCondLst>
+                                    <p:cond delay="0"/>
+                                  </p:stCondLst>
+                                  <p:childTnLst>
+                                    <p:set>
+                                      <p:cBhvr>
+                                        <p:cTn id="16" dur="1" fill="hold">
+                                          <p:stCondLst>
+                                            <p:cond delay="0"/>
+                                          </p:stCondLst>
+                                        </p:cTn>
+                                        <p:tgtEl>
+                                          <p:spTgt spid="3">
+                                            <p:txEl>
+                                              <p:pRg st="4" end="4"/>
+                                            </p:txEl>
+                                          </p:spTgt>
+                                        </p:tgtEl>
+                                        <p:attrNameLst>
+                                          <p:attrName>style.visibility</p:attrName>
+                                        </p:attrNameLst>
+                                      </p:cBhvr>
+                                      <p:to>
+                                        <p:strVal val="visible"/>
+                                      </p:to>
+                                    </p:set>
+                                  </p:childTnLst>
+                                </p:cTn>
+                              </p:par>
+                              <p:par>
+                                <p:cTn id="17" presetID="1" presetClass="entr" presetSubtype="0" fill="hold" nodeType="withEffect">
+                                  <p:stCondLst>
+                                    <p:cond delay="0"/>
+                                  </p:stCondLst>
+                                  <p:childTnLst>
+                                    <p:set>
+                                      <p:cBhvr>
+                                        <p:cTn id="18" dur="1" fill="hold">
+                                          <p:stCondLst>
+                                            <p:cond delay="0"/>
+                                          </p:stCondLst>
+                                        </p:cTn>
+                                        <p:tgtEl>
+                                          <p:spTgt spid="3">
+                                            <p:txEl>
+                                              <p:pRg st="5" end="5"/>
+                                            </p:txEl>
+                                          </p:spTgt>
+                                        </p:tgtEl>
+                                        <p:attrNameLst>
+                                          <p:attrName>style.visibility</p:attrName>
+                                        </p:attrNameLst>
+                                      </p:cBhvr>
+                                      <p:to>
+                                        <p:strVal val="visible"/>
+                                      </p:to>
+                                    </p:set>
+                                  </p:childTnLst>
+                                </p:cTn>
+                              </p:par>
+                            </p:childTnLst>
+                          </p:cTn>
+                        </p:par>
+                      </p:childTnLst>
+                    </p:cTn>
+                  </p:par>
+                  <p:par>
+                    <p:cTn id="19" fill="hold">
+                      <p:stCondLst>
+                        <p:cond delay="indefinite"/>
+                      </p:stCondLst>
+                      <p:childTnLst>
+                        <p:par>
+                          <p:cTn id="20" fill="hold">
+                            <p:stCondLst>
+                              <p:cond delay="0"/>
+                            </p:stCondLst>
+                            <p:childTnLst>
+                              <p:par>
+                                <p:cTn id="21" presetID="1" presetClass="entr" presetSubtype="0" fill="hold" nodeType="clickEffect">
+                                  <p:stCondLst>
+                                    <p:cond delay="0"/>
+                                  </p:stCondLst>
+                                  <p:childTnLst>
+                                    <p:set>
+                                      <p:cBhvr>
+                                        <p:cTn id="22" dur="1" fill="hold">
+                                          <p:stCondLst>
+                                            <p:cond delay="0"/>
+                                          </p:stCondLst>
+                                        </p:cTn>
+                                        <p:tgtEl>
+                                          <p:spTgt spid="3">
+                                            <p:txEl>
+                                              <p:pRg st="6" end="6"/>
+                                            </p:txEl>
+                                          </p:spTgt>
+                                        </p:tgtEl>
+                                        <p:attrNameLst>
+                                          <p:attrName>style.visibility</p:attrName>
+                                        </p:attrNameLst>
+                                      </p:cBhvr>
+                                      <p:to>
+                                        <p:strVal val="visible"/>
+                                      </p:to>
+                                    </p:set>
+                                  </p:childTnLst>
+                                </p:cTn>
+                              </p:par>
+                            </p:childTnLst>
+                          </p:cTn>
+                        </p:par>
+                      </p:childTnLst>
+                    </p:cTn>
+                  </p:par>
+                  <p:par>
+                    <p:cTn id="23" fill="hold">
+                      <p:stCondLst>
+                        <p:cond delay="indefinite"/>
+                      </p:stCondLst>
+                      <p:childTnLst>
+                        <p:par>
+                          <p:cTn id="24" fill="hold">
+                            <p:stCondLst>
+                              <p:cond delay="0"/>
+                            </p:stCondLst>
+                            <p:childTnLst>
+                              <p:par>
+                                <p:cTn id="25" presetID="1" presetClass="entr" presetSubtype="0" fill="hold" nodeType="clickEffect">
+                                  <p:stCondLst>
+                                    <p:cond delay="0"/>
+                                  </p:stCondLst>
+                                  <p:childTnLst>
+                                    <p:set>
+                                      <p:cBhvr>
+                                        <p:cTn id="26" dur="1" fill="hold">
+                                          <p:stCondLst>
+                                            <p:cond delay="0"/>
+                                          </p:stCondLst>
+                                        </p:cTn>
+                                        <p:tgtEl>
+                                          <p:spTgt spid="3">
+                                            <p:txEl>
+                                              <p:pRg st="7" end="7"/>
+                                            </p:txEl>
+                                          </p:spTgt>
+                                        </p:tgtEl>
+                                        <p:attrNameLst>
+                                          <p:attrName>style.visibility</p:attrName>
+                                        </p:attrNameLst>
+                                      </p:cBhvr>
+                                      <p:to>
+                                        <p:strVal val="visible"/>
+                                      </p:to>
+                                    </p:set>
+                                  </p:childTnLst>
+                                </p:cTn>
+                              </p:par>
+                              <p:par>
+                                <p:cTn id="27" presetID="1" presetClass="entr" presetSubtype="0" fill="hold" nodeType="withEffect">
+                                  <p:stCondLst>
+                                    <p:cond delay="0"/>
+                                  </p:stCondLst>
+                                  <p:childTnLst>
+                                    <p:set>
+                                      <p:cBhvr>
+                                        <p:cTn id="28" dur="1" fill="hold">
+                                          <p:stCondLst>
+                                            <p:cond delay="0"/>
+                                          </p:stCondLst>
+                                        </p:cTn>
+                                        <p:tgtEl>
+                                          <p:spTgt spid="3">
+                                            <p:txEl>
+                                              <p:pRg st="8" end="8"/>
+                                            </p:txEl>
+                                          </p:spTgt>
+                                        </p:tgtEl>
+                                        <p:attrNameLst>
+                                          <p:attrName>style.visibility</p:attrName>
+                                        </p:attrNameLst>
+                                      </p:cBhvr>
+                                      <p:to>
+                                        <p:strVal val="visible"/>
+                                      </p:to>
+                                    </p:set>
+                                  </p:childTnLst>
+                                </p:cTn>
+                              </p:par>
+                            </p:childTnLst>
+                          </p:cTn>
+                        </p:par>
+                      </p:childTnLst>
+                    </p:cTn>
+                  </p:par>
+                </p:childTnLst>
+              </p:cTn>
+              <p:prevCondLst>
+                <p:cond evt="onPrev" delay="0">
+                  <p:tgtEl>
+                    <p:sldTgt/>
+                  </p:tgtEl>
+                </p:cond>
+              </p:prevCondLst>
+              <p:nextCondLst>
+                <p:cond evt="onNext" delay="0">
+                  <p:tgtEl>
+                    <p:sldTgt/>
+                  </p:tgtEl>
+                </p:cond>
+              </p:nextCondLst>
+            </p:seq>
+          </p:childTnLst>
+        </p:cTn>
+      </p:par>
+    </p:tnLst>
+  </p:timing>
 </p:sld>
 </file>
 
@@ -13035,19 +16572,11 @@
                 </a:r>
                 <a:r>
                   <a:rPr lang="en-US" b="1" dirty="0"/>
-                  <a:t>update our </a:t>
-                </a:r>
-                <a:r>
-                  <a:rPr lang="en-US" b="1"/>
-                  <a:t>belief </a:t>
-                </a:r>
-                <a:r>
-                  <a:rPr lang="en-US"/>
-                  <a:t>for </a:t>
+                  <a:t>update our belief </a:t>
                 </a:r>
                 <a:r>
                   <a:rPr lang="en-US" dirty="0"/>
-                  <a:t>the woman carrying the disease</a:t>
+                  <a:t>for the woman carrying the disease</a:t>
                 </a:r>
               </a:p>
               <a:p>
@@ -13394,6 +16923,165 @@
   <p:clrMapOvr>
     <a:masterClrMapping/>
   </p:clrMapOvr>
+  <p:timing>
+    <p:tnLst>
+      <p:par>
+        <p:cTn id="1" dur="indefinite" restart="never" nodeType="tmRoot">
+          <p:childTnLst>
+            <p:seq concurrent="1" nextAc="seek">
+              <p:cTn id="2" dur="indefinite" nodeType="mainSeq">
+                <p:childTnLst>
+                  <p:par>
+                    <p:cTn id="3" fill="hold">
+                      <p:stCondLst>
+                        <p:cond delay="indefinite"/>
+                      </p:stCondLst>
+                      <p:childTnLst>
+                        <p:par>
+                          <p:cTn id="4" fill="hold">
+                            <p:stCondLst>
+                              <p:cond delay="0"/>
+                            </p:stCondLst>
+                            <p:childTnLst>
+                              <p:par>
+                                <p:cTn id="5" presetID="1" presetClass="entr" presetSubtype="0" fill="hold" nodeType="clickEffect">
+                                  <p:stCondLst>
+                                    <p:cond delay="0"/>
+                                  </p:stCondLst>
+                                  <p:childTnLst>
+                                    <p:set>
+                                      <p:cBhvr>
+                                        <p:cTn id="6" dur="1" fill="hold">
+                                          <p:stCondLst>
+                                            <p:cond delay="0"/>
+                                          </p:stCondLst>
+                                        </p:cTn>
+                                        <p:tgtEl>
+                                          <p:spTgt spid="3">
+                                            <p:txEl>
+                                              <p:pRg st="3" end="3"/>
+                                            </p:txEl>
+                                          </p:spTgt>
+                                        </p:tgtEl>
+                                        <p:attrNameLst>
+                                          <p:attrName>style.visibility</p:attrName>
+                                        </p:attrNameLst>
+                                      </p:cBhvr>
+                                      <p:to>
+                                        <p:strVal val="visible"/>
+                                      </p:to>
+                                    </p:set>
+                                  </p:childTnLst>
+                                </p:cTn>
+                              </p:par>
+                            </p:childTnLst>
+                          </p:cTn>
+                        </p:par>
+                      </p:childTnLst>
+                    </p:cTn>
+                  </p:par>
+                  <p:par>
+                    <p:cTn id="7" fill="hold">
+                      <p:stCondLst>
+                        <p:cond delay="indefinite"/>
+                      </p:stCondLst>
+                      <p:childTnLst>
+                        <p:par>
+                          <p:cTn id="8" fill="hold">
+                            <p:stCondLst>
+                              <p:cond delay="0"/>
+                            </p:stCondLst>
+                            <p:childTnLst>
+                              <p:par>
+                                <p:cTn id="9" presetID="1" presetClass="entr" presetSubtype="0" fill="hold" nodeType="clickEffect">
+                                  <p:stCondLst>
+                                    <p:cond delay="0"/>
+                                  </p:stCondLst>
+                                  <p:childTnLst>
+                                    <p:set>
+                                      <p:cBhvr>
+                                        <p:cTn id="10" dur="1" fill="hold">
+                                          <p:stCondLst>
+                                            <p:cond delay="0"/>
+                                          </p:stCondLst>
+                                        </p:cTn>
+                                        <p:tgtEl>
+                                          <p:spTgt spid="3">
+                                            <p:txEl>
+                                              <p:pRg st="4" end="4"/>
+                                            </p:txEl>
+                                          </p:spTgt>
+                                        </p:tgtEl>
+                                        <p:attrNameLst>
+                                          <p:attrName>style.visibility</p:attrName>
+                                        </p:attrNameLst>
+                                      </p:cBhvr>
+                                      <p:to>
+                                        <p:strVal val="visible"/>
+                                      </p:to>
+                                    </p:set>
+                                  </p:childTnLst>
+                                </p:cTn>
+                              </p:par>
+                              <p:par>
+                                <p:cTn id="11" presetID="1" presetClass="entr" presetSubtype="0" fill="hold" nodeType="withEffect">
+                                  <p:stCondLst>
+                                    <p:cond delay="0"/>
+                                  </p:stCondLst>
+                                  <p:childTnLst>
+                                    <p:set>
+                                      <p:cBhvr>
+                                        <p:cTn id="12" dur="1" fill="hold">
+                                          <p:stCondLst>
+                                            <p:cond delay="0"/>
+                                          </p:stCondLst>
+                                        </p:cTn>
+                                        <p:tgtEl>
+                                          <p:spTgt spid="3">
+                                            <p:txEl>
+                                              <p:pRg st="5" end="5"/>
+                                            </p:txEl>
+                                          </p:spTgt>
+                                        </p:tgtEl>
+                                        <p:attrNameLst>
+                                          <p:attrName>style.visibility</p:attrName>
+                                        </p:attrNameLst>
+                                      </p:cBhvr>
+                                      <p:to>
+                                        <p:strVal val="visible"/>
+                                      </p:to>
+                                    </p:set>
+                                  </p:childTnLst>
+                                </p:cTn>
+                              </p:par>
+                            </p:childTnLst>
+                          </p:cTn>
+                        </p:par>
+                      </p:childTnLst>
+                    </p:cTn>
+                  </p:par>
+                </p:childTnLst>
+              </p:cTn>
+              <p:prevCondLst>
+                <p:cond evt="onPrev" delay="0">
+                  <p:tgtEl>
+                    <p:sldTgt/>
+                  </p:tgtEl>
+                </p:cond>
+              </p:prevCondLst>
+              <p:nextCondLst>
+                <p:cond evt="onNext" delay="0">
+                  <p:tgtEl>
+                    <p:sldTgt/>
+                  </p:tgtEl>
+                </p:cond>
+              </p:nextCondLst>
+            </p:seq>
+          </p:childTnLst>
+        </p:cTn>
+      </p:par>
+    </p:tnLst>
+  </p:timing>
 </p:sld>
 </file>
 
@@ -13618,8 +17306,8 @@
           </a:p>
         </p:txBody>
       </p:sp>
-      <mc:AlternateContent xmlns:mc="http://schemas.openxmlformats.org/markup-compatibility/2006" xmlns:a14="http://schemas.microsoft.com/office/drawing/2010/main">
-        <mc:Choice Requires="a14">
+      <mc:AlternateContent xmlns:mc="http://schemas.openxmlformats.org/markup-compatibility/2006">
+        <mc:Choice xmlns:a14="http://schemas.microsoft.com/office/drawing/2010/main" Requires="a14">
           <p:sp>
             <p:nvSpPr>
               <p:cNvPr id="3" name="Content Placeholder 2"/>
@@ -14255,248 +17943,255 @@
                 </a:r>
               </a:p>
               <a:p>
-                <a:pPr lvl="0"/>
+                <a:pPr marL="0" lvl="0" indent="0">
+                  <a:buNone/>
+                </a:pPr>
                 <a14:m>
-                  <m:oMath xmlns:m="http://schemas.openxmlformats.org/officeDocument/2006/math">
-                    <m:r>
-                      <a:rPr sz="2000">
-                        <a:latin typeface="Cambria Math" panose="02040503050406030204" pitchFamily="18" charset="0"/>
-                      </a:rPr>
-                      <m:t>𝑝</m:t>
-                    </m:r>
-                    <m:d>
-                      <m:dPr>
-                        <m:ctrlPr>
-                          <a:rPr sz="2000" i="1">
-                            <a:latin typeface="Cambria Math" panose="02040503050406030204" pitchFamily="18" charset="0"/>
-                          </a:rPr>
-                        </m:ctrlPr>
-                      </m:dPr>
-                      <m:e>
-                        <m:sSub>
-                          <m:sSubPr>
-                            <m:ctrlPr>
-                              <a:rPr sz="2000" i="1">
-                                <a:latin typeface="Cambria Math" panose="02040503050406030204" pitchFamily="18" charset="0"/>
-                              </a:rPr>
-                            </m:ctrlPr>
-                          </m:sSubPr>
-                          <m:e>
-                            <m:r>
-                              <a:rPr sz="2000">
-                                <a:latin typeface="Cambria Math" panose="02040503050406030204" pitchFamily="18" charset="0"/>
-                              </a:rPr>
-                              <m:t>𝜃</m:t>
-                            </m:r>
-                          </m:e>
-                          <m:sub>
-                            <m:r>
-                              <a:rPr sz="2000">
-                                <a:latin typeface="Cambria Math" panose="02040503050406030204" pitchFamily="18" charset="0"/>
-                              </a:rPr>
-                              <m:t>1</m:t>
-                            </m:r>
-                          </m:sub>
-                        </m:sSub>
-                      </m:e>
-                    </m:d>
-                    <m:r>
-                      <a:rPr sz="2000">
-                        <a:latin typeface="Cambria Math" panose="02040503050406030204" pitchFamily="18" charset="0"/>
-                      </a:rPr>
-                      <m:t>=</m:t>
-                    </m:r>
-                    <m:nary>
-                      <m:naryPr>
-                        <m:chr m:val="∑"/>
-                        <m:limLoc m:val="undOvr"/>
-                        <m:ctrlPr>
-                          <a:rPr sz="2000" i="1">
-                            <a:latin typeface="Cambria Math" panose="02040503050406030204" pitchFamily="18" charset="0"/>
-                          </a:rPr>
-                        </m:ctrlPr>
-                      </m:naryPr>
-                      <m:sub>
-                        <m:sSub>
-                          <m:sSubPr>
-                            <m:ctrlPr>
-                              <a:rPr sz="2000" i="1">
-                                <a:latin typeface="Cambria Math" panose="02040503050406030204" pitchFamily="18" charset="0"/>
-                              </a:rPr>
-                            </m:ctrlPr>
-                          </m:sSubPr>
-                          <m:e>
-                            <m:r>
-                              <a:rPr sz="2000">
-                                <a:latin typeface="Cambria Math" panose="02040503050406030204" pitchFamily="18" charset="0"/>
-                              </a:rPr>
-                              <m:t>𝜃</m:t>
-                            </m:r>
-                          </m:e>
-                          <m:sub>
-                            <m:r>
-                              <a:rPr sz="2000">
-                                <a:latin typeface="Cambria Math" panose="02040503050406030204" pitchFamily="18" charset="0"/>
-                              </a:rPr>
-                              <m:t>2</m:t>
-                            </m:r>
-                          </m:sub>
-                        </m:sSub>
-                        <m:r>
-                          <a:rPr sz="2000">
-                            <a:latin typeface="Cambria Math" panose="02040503050406030204" pitchFamily="18" charset="0"/>
-                          </a:rPr>
-                          <m:t>,…,</m:t>
-                        </m:r>
-                        <m:sSub>
-                          <m:sSubPr>
-                            <m:ctrlPr>
-                              <a:rPr sz="2000" i="1">
-                                <a:latin typeface="Cambria Math" panose="02040503050406030204" pitchFamily="18" charset="0"/>
-                              </a:rPr>
-                            </m:ctrlPr>
-                          </m:sSubPr>
-                          <m:e>
-                            <m:r>
-                              <a:rPr sz="2000">
-                                <a:latin typeface="Cambria Math" panose="02040503050406030204" pitchFamily="18" charset="0"/>
-                              </a:rPr>
-                              <m:t>𝜃</m:t>
-                            </m:r>
-                          </m:e>
-                          <m:sub>
-                            <m:r>
-                              <a:rPr sz="2000">
-                                <a:latin typeface="Cambria Math" panose="02040503050406030204" pitchFamily="18" charset="0"/>
-                              </a:rPr>
-                              <m:t>𝑛</m:t>
-                            </m:r>
-                          </m:sub>
-                        </m:sSub>
-                      </m:sub>
-                      <m:sup>
-                        <m:r>
-                          <a:rPr sz="2000">
-                            <a:latin typeface="Cambria Math" panose="02040503050406030204" pitchFamily="18" charset="0"/>
-                          </a:rPr>
-                          <m:t>​</m:t>
-                        </m:r>
-                      </m:sup>
-                      <m:e>
-                        <m:r>
-                          <a:rPr sz="2000">
-                            <a:latin typeface="Cambria Math" panose="02040503050406030204" pitchFamily="18" charset="0"/>
-                          </a:rPr>
-                          <m:t>𝑝</m:t>
-                        </m:r>
-                      </m:e>
-                    </m:nary>
-                    <m:d>
-                      <m:dPr>
-                        <m:ctrlPr>
-                          <a:rPr sz="2000" i="1">
-                            <a:latin typeface="Cambria Math" panose="02040503050406030204" pitchFamily="18" charset="0"/>
-                          </a:rPr>
-                        </m:ctrlPr>
-                      </m:dPr>
-                      <m:e>
-                        <m:sSub>
-                          <m:sSubPr>
-                            <m:ctrlPr>
-                              <a:rPr sz="2000" i="1">
-                                <a:latin typeface="Cambria Math" panose="02040503050406030204" pitchFamily="18" charset="0"/>
-                              </a:rPr>
-                            </m:ctrlPr>
-                          </m:sSubPr>
-                          <m:e>
-                            <m:r>
-                              <a:rPr sz="2000">
-                                <a:latin typeface="Cambria Math" panose="02040503050406030204" pitchFamily="18" charset="0"/>
-                              </a:rPr>
-                              <m:t>𝜃</m:t>
-                            </m:r>
-                          </m:e>
-                          <m:sub>
-                            <m:r>
-                              <a:rPr sz="2000">
-                                <a:latin typeface="Cambria Math" panose="02040503050406030204" pitchFamily="18" charset="0"/>
-                              </a:rPr>
-                              <m:t>1</m:t>
-                            </m:r>
-                          </m:sub>
-                        </m:sSub>
-                        <m:r>
-                          <a:rPr sz="2000">
-                            <a:latin typeface="Cambria Math" panose="02040503050406030204" pitchFamily="18" charset="0"/>
-                          </a:rPr>
-                          <m:t>,</m:t>
-                        </m:r>
-                        <m:sSub>
-                          <m:sSubPr>
-                            <m:ctrlPr>
-                              <a:rPr sz="2000" i="1">
-                                <a:latin typeface="Cambria Math" panose="02040503050406030204" pitchFamily="18" charset="0"/>
-                              </a:rPr>
-                            </m:ctrlPr>
-                          </m:sSubPr>
-                          <m:e>
-                            <m:r>
-                              <a:rPr sz="2000">
-                                <a:latin typeface="Cambria Math" panose="02040503050406030204" pitchFamily="18" charset="0"/>
-                              </a:rPr>
-                              <m:t>𝜃</m:t>
-                            </m:r>
-                          </m:e>
-                          <m:sub>
-                            <m:r>
-                              <a:rPr sz="2000">
-                                <a:latin typeface="Cambria Math" panose="02040503050406030204" pitchFamily="18" charset="0"/>
-                              </a:rPr>
-                              <m:t>2</m:t>
-                            </m:r>
-                          </m:sub>
-                        </m:sSub>
-                        <m:r>
-                          <a:rPr sz="2000">
-                            <a:latin typeface="Cambria Math" panose="02040503050406030204" pitchFamily="18" charset="0"/>
-                          </a:rPr>
-                          <m:t>,…,</m:t>
-                        </m:r>
-                        <m:sSub>
-                          <m:sSubPr>
-                            <m:ctrlPr>
-                              <a:rPr sz="2000" i="1">
-                                <a:latin typeface="Cambria Math" panose="02040503050406030204" pitchFamily="18" charset="0"/>
-                              </a:rPr>
-                            </m:ctrlPr>
-                          </m:sSubPr>
-                          <m:e>
-                            <m:r>
-                              <a:rPr sz="2000">
-                                <a:latin typeface="Cambria Math" panose="02040503050406030204" pitchFamily="18" charset="0"/>
-                              </a:rPr>
-                              <m:t>𝜃</m:t>
-                            </m:r>
-                          </m:e>
-                          <m:sub>
-                            <m:r>
-                              <a:rPr sz="2000">
-                                <a:latin typeface="Cambria Math" panose="02040503050406030204" pitchFamily="18" charset="0"/>
-                              </a:rPr>
-                              <m:t>𝑛</m:t>
-                            </m:r>
-                          </m:sub>
-                        </m:sSub>
-                      </m:e>
-                    </m:d>
-                  </m:oMath>
+                  <m:oMathPara xmlns:m="http://schemas.openxmlformats.org/officeDocument/2006/math">
+                    <m:oMathParaPr>
+                      <m:jc m:val="centerGroup"/>
+                    </m:oMathParaPr>
+                    <m:oMath xmlns:m="http://schemas.openxmlformats.org/officeDocument/2006/math">
+                      <m:r>
+                        <a:rPr sz="2000">
+                          <a:latin typeface="Cambria Math" panose="02040503050406030204" pitchFamily="18" charset="0"/>
+                        </a:rPr>
+                        <m:t>𝑝</m:t>
+                      </m:r>
+                      <m:d>
+                        <m:dPr>
+                          <m:ctrlPr>
+                            <a:rPr sz="2000" i="1">
+                              <a:latin typeface="Cambria Math" panose="02040503050406030204" pitchFamily="18" charset="0"/>
+                            </a:rPr>
+                          </m:ctrlPr>
+                        </m:dPr>
+                        <m:e>
+                          <m:sSub>
+                            <m:sSubPr>
+                              <m:ctrlPr>
+                                <a:rPr sz="2000" i="1">
+                                  <a:latin typeface="Cambria Math" panose="02040503050406030204" pitchFamily="18" charset="0"/>
+                                </a:rPr>
+                              </m:ctrlPr>
+                            </m:sSubPr>
+                            <m:e>
+                              <m:r>
+                                <a:rPr sz="2000">
+                                  <a:latin typeface="Cambria Math" panose="02040503050406030204" pitchFamily="18" charset="0"/>
+                                </a:rPr>
+                                <m:t>𝜃</m:t>
+                              </m:r>
+                            </m:e>
+                            <m:sub>
+                              <m:r>
+                                <a:rPr sz="2000">
+                                  <a:latin typeface="Cambria Math" panose="02040503050406030204" pitchFamily="18" charset="0"/>
+                                </a:rPr>
+                                <m:t>1</m:t>
+                              </m:r>
+                            </m:sub>
+                          </m:sSub>
+                        </m:e>
+                      </m:d>
+                      <m:r>
+                        <a:rPr sz="2000">
+                          <a:latin typeface="Cambria Math" panose="02040503050406030204" pitchFamily="18" charset="0"/>
+                        </a:rPr>
+                        <m:t>=</m:t>
+                      </m:r>
+                      <m:nary>
+                        <m:naryPr>
+                          <m:chr m:val="∑"/>
+                          <m:limLoc m:val="undOvr"/>
+                          <m:ctrlPr>
+                            <a:rPr sz="2000" i="1">
+                              <a:latin typeface="Cambria Math" panose="02040503050406030204" pitchFamily="18" charset="0"/>
+                            </a:rPr>
+                          </m:ctrlPr>
+                        </m:naryPr>
+                        <m:sub>
+                          <m:sSub>
+                            <m:sSubPr>
+                              <m:ctrlPr>
+                                <a:rPr sz="2000" i="1">
+                                  <a:latin typeface="Cambria Math" panose="02040503050406030204" pitchFamily="18" charset="0"/>
+                                </a:rPr>
+                              </m:ctrlPr>
+                            </m:sSubPr>
+                            <m:e>
+                              <m:r>
+                                <a:rPr sz="2000">
+                                  <a:latin typeface="Cambria Math" panose="02040503050406030204" pitchFamily="18" charset="0"/>
+                                </a:rPr>
+                                <m:t>𝜃</m:t>
+                              </m:r>
+                            </m:e>
+                            <m:sub>
+                              <m:r>
+                                <a:rPr sz="2000">
+                                  <a:latin typeface="Cambria Math" panose="02040503050406030204" pitchFamily="18" charset="0"/>
+                                </a:rPr>
+                                <m:t>2</m:t>
+                              </m:r>
+                            </m:sub>
+                          </m:sSub>
+                          <m:r>
+                            <a:rPr sz="2000">
+                              <a:latin typeface="Cambria Math" panose="02040503050406030204" pitchFamily="18" charset="0"/>
+                            </a:rPr>
+                            <m:t>,…,</m:t>
+                          </m:r>
+                          <m:sSub>
+                            <m:sSubPr>
+                              <m:ctrlPr>
+                                <a:rPr sz="2000" i="1">
+                                  <a:latin typeface="Cambria Math" panose="02040503050406030204" pitchFamily="18" charset="0"/>
+                                </a:rPr>
+                              </m:ctrlPr>
+                            </m:sSubPr>
+                            <m:e>
+                              <m:r>
+                                <a:rPr sz="2000">
+                                  <a:latin typeface="Cambria Math" panose="02040503050406030204" pitchFamily="18" charset="0"/>
+                                </a:rPr>
+                                <m:t>𝜃</m:t>
+                              </m:r>
+                            </m:e>
+                            <m:sub>
+                              <m:r>
+                                <a:rPr sz="2000">
+                                  <a:latin typeface="Cambria Math" panose="02040503050406030204" pitchFamily="18" charset="0"/>
+                                </a:rPr>
+                                <m:t>𝑛</m:t>
+                              </m:r>
+                            </m:sub>
+                          </m:sSub>
+                        </m:sub>
+                        <m:sup>
+                          <m:r>
+                            <a:rPr sz="2000">
+                              <a:latin typeface="Cambria Math" panose="02040503050406030204" pitchFamily="18" charset="0"/>
+                            </a:rPr>
+                            <m:t>​</m:t>
+                          </m:r>
+                        </m:sup>
+                        <m:e>
+                          <m:r>
+                            <a:rPr sz="2000">
+                              <a:latin typeface="Cambria Math" panose="02040503050406030204" pitchFamily="18" charset="0"/>
+                            </a:rPr>
+                            <m:t>𝑝</m:t>
+                          </m:r>
+                        </m:e>
+                      </m:nary>
+                      <m:d>
+                        <m:dPr>
+                          <m:ctrlPr>
+                            <a:rPr sz="2000" i="1">
+                              <a:latin typeface="Cambria Math" panose="02040503050406030204" pitchFamily="18" charset="0"/>
+                            </a:rPr>
+                          </m:ctrlPr>
+                        </m:dPr>
+                        <m:e>
+                          <m:sSub>
+                            <m:sSubPr>
+                              <m:ctrlPr>
+                                <a:rPr sz="2000" i="1">
+                                  <a:latin typeface="Cambria Math" panose="02040503050406030204" pitchFamily="18" charset="0"/>
+                                </a:rPr>
+                              </m:ctrlPr>
+                            </m:sSubPr>
+                            <m:e>
+                              <m:r>
+                                <a:rPr sz="2000">
+                                  <a:latin typeface="Cambria Math" panose="02040503050406030204" pitchFamily="18" charset="0"/>
+                                </a:rPr>
+                                <m:t>𝜃</m:t>
+                              </m:r>
+                            </m:e>
+                            <m:sub>
+                              <m:r>
+                                <a:rPr sz="2000">
+                                  <a:latin typeface="Cambria Math" panose="02040503050406030204" pitchFamily="18" charset="0"/>
+                                </a:rPr>
+                                <m:t>1</m:t>
+                              </m:r>
+                            </m:sub>
+                          </m:sSub>
+                          <m:r>
+                            <a:rPr sz="2000">
+                              <a:latin typeface="Cambria Math" panose="02040503050406030204" pitchFamily="18" charset="0"/>
+                            </a:rPr>
+                            <m:t>,</m:t>
+                          </m:r>
+                          <m:sSub>
+                            <m:sSubPr>
+                              <m:ctrlPr>
+                                <a:rPr sz="2000" i="1">
+                                  <a:latin typeface="Cambria Math" panose="02040503050406030204" pitchFamily="18" charset="0"/>
+                                </a:rPr>
+                              </m:ctrlPr>
+                            </m:sSubPr>
+                            <m:e>
+                              <m:r>
+                                <a:rPr sz="2000">
+                                  <a:latin typeface="Cambria Math" panose="02040503050406030204" pitchFamily="18" charset="0"/>
+                                </a:rPr>
+                                <m:t>𝜃</m:t>
+                              </m:r>
+                            </m:e>
+                            <m:sub>
+                              <m:r>
+                                <a:rPr sz="2000">
+                                  <a:latin typeface="Cambria Math" panose="02040503050406030204" pitchFamily="18" charset="0"/>
+                                </a:rPr>
+                                <m:t>2</m:t>
+                              </m:r>
+                            </m:sub>
+                          </m:sSub>
+                          <m:r>
+                            <a:rPr sz="2000">
+                              <a:latin typeface="Cambria Math" panose="02040503050406030204" pitchFamily="18" charset="0"/>
+                            </a:rPr>
+                            <m:t>,…,</m:t>
+                          </m:r>
+                          <m:sSub>
+                            <m:sSubPr>
+                              <m:ctrlPr>
+                                <a:rPr sz="2000" i="1">
+                                  <a:latin typeface="Cambria Math" panose="02040503050406030204" pitchFamily="18" charset="0"/>
+                                </a:rPr>
+                              </m:ctrlPr>
+                            </m:sSubPr>
+                            <m:e>
+                              <m:r>
+                                <a:rPr sz="2000">
+                                  <a:latin typeface="Cambria Math" panose="02040503050406030204" pitchFamily="18" charset="0"/>
+                                </a:rPr>
+                                <m:t>𝜃</m:t>
+                              </m:r>
+                            </m:e>
+                            <m:sub>
+                              <m:r>
+                                <a:rPr sz="2000">
+                                  <a:latin typeface="Cambria Math" panose="02040503050406030204" pitchFamily="18" charset="0"/>
+                                </a:rPr>
+                                <m:t>𝑛</m:t>
+                              </m:r>
+                            </m:sub>
+                          </m:sSub>
+                        </m:e>
+                      </m:d>
+                    </m:oMath>
+                  </m:oMathPara>
                 </a14:m>
                 <a:endParaRPr sz="2000" dirty="0"/>
               </a:p>
             </p:txBody>
           </p:sp>
         </mc:Choice>
-        <mc:Fallback xmlns="">
+        <mc:Fallback>
           <p:sp>
             <p:nvSpPr>
               <p:cNvPr id="3" name="Content Placeholder 2"/>
@@ -14515,7 +18210,7 @@
               <a:blipFill>
                 <a:blip r:embed="rId2"/>
                 <a:stretch>
-                  <a:fillRect l="-741" t="-792" r="-1259" b="-18384"/>
+                  <a:fillRect l="-741" t="-792" r="-1259" b="-8399"/>
                 </a:stretch>
               </a:blipFill>
             </p:spPr>
@@ -14544,6 +18239,258 @@
   <p:clrMapOvr>
     <a:masterClrMapping/>
   </p:clrMapOvr>
+  <p:timing>
+    <p:tnLst>
+      <p:par>
+        <p:cTn id="1" dur="indefinite" restart="never" nodeType="tmRoot">
+          <p:childTnLst>
+            <p:seq concurrent="1" nextAc="seek">
+              <p:cTn id="2" dur="indefinite" nodeType="mainSeq">
+                <p:childTnLst>
+                  <p:par>
+                    <p:cTn id="3" fill="hold">
+                      <p:stCondLst>
+                        <p:cond delay="indefinite"/>
+                      </p:stCondLst>
+                      <p:childTnLst>
+                        <p:par>
+                          <p:cTn id="4" fill="hold">
+                            <p:stCondLst>
+                              <p:cond delay="0"/>
+                            </p:stCondLst>
+                            <p:childTnLst>
+                              <p:par>
+                                <p:cTn id="5" presetID="1" presetClass="entr" presetSubtype="0" fill="hold" nodeType="clickEffect">
+                                  <p:stCondLst>
+                                    <p:cond delay="0"/>
+                                  </p:stCondLst>
+                                  <p:childTnLst>
+                                    <p:set>
+                                      <p:cBhvr>
+                                        <p:cTn id="6" dur="1" fill="hold">
+                                          <p:stCondLst>
+                                            <p:cond delay="0"/>
+                                          </p:stCondLst>
+                                        </p:cTn>
+                                        <p:tgtEl>
+                                          <p:spTgt spid="3">
+                                            <p:txEl>
+                                              <p:pRg st="1" end="1"/>
+                                            </p:txEl>
+                                          </p:spTgt>
+                                        </p:tgtEl>
+                                        <p:attrNameLst>
+                                          <p:attrName>style.visibility</p:attrName>
+                                        </p:attrNameLst>
+                                      </p:cBhvr>
+                                      <p:to>
+                                        <p:strVal val="visible"/>
+                                      </p:to>
+                                    </p:set>
+                                  </p:childTnLst>
+                                </p:cTn>
+                              </p:par>
+                              <p:par>
+                                <p:cTn id="7" presetID="1" presetClass="entr" presetSubtype="0" fill="hold" nodeType="withEffect">
+                                  <p:stCondLst>
+                                    <p:cond delay="0"/>
+                                  </p:stCondLst>
+                                  <p:childTnLst>
+                                    <p:set>
+                                      <p:cBhvr>
+                                        <p:cTn id="8" dur="1" fill="hold">
+                                          <p:stCondLst>
+                                            <p:cond delay="0"/>
+                                          </p:stCondLst>
+                                        </p:cTn>
+                                        <p:tgtEl>
+                                          <p:spTgt spid="3">
+                                            <p:txEl>
+                                              <p:pRg st="2" end="2"/>
+                                            </p:txEl>
+                                          </p:spTgt>
+                                        </p:tgtEl>
+                                        <p:attrNameLst>
+                                          <p:attrName>style.visibility</p:attrName>
+                                        </p:attrNameLst>
+                                      </p:cBhvr>
+                                      <p:to>
+                                        <p:strVal val="visible"/>
+                                      </p:to>
+                                    </p:set>
+                                  </p:childTnLst>
+                                </p:cTn>
+                              </p:par>
+                              <p:par>
+                                <p:cTn id="9" presetID="1" presetClass="entr" presetSubtype="0" fill="hold" nodeType="withEffect">
+                                  <p:stCondLst>
+                                    <p:cond delay="0"/>
+                                  </p:stCondLst>
+                                  <p:childTnLst>
+                                    <p:set>
+                                      <p:cBhvr>
+                                        <p:cTn id="10" dur="1" fill="hold">
+                                          <p:stCondLst>
+                                            <p:cond delay="0"/>
+                                          </p:stCondLst>
+                                        </p:cTn>
+                                        <p:tgtEl>
+                                          <p:spTgt spid="3">
+                                            <p:txEl>
+                                              <p:pRg st="3" end="3"/>
+                                            </p:txEl>
+                                          </p:spTgt>
+                                        </p:tgtEl>
+                                        <p:attrNameLst>
+                                          <p:attrName>style.visibility</p:attrName>
+                                        </p:attrNameLst>
+                                      </p:cBhvr>
+                                      <p:to>
+                                        <p:strVal val="visible"/>
+                                      </p:to>
+                                    </p:set>
+                                  </p:childTnLst>
+                                </p:cTn>
+                              </p:par>
+                              <p:par>
+                                <p:cTn id="11" presetID="1" presetClass="entr" presetSubtype="0" fill="hold" nodeType="withEffect">
+                                  <p:stCondLst>
+                                    <p:cond delay="0"/>
+                                  </p:stCondLst>
+                                  <p:childTnLst>
+                                    <p:set>
+                                      <p:cBhvr>
+                                        <p:cTn id="12" dur="1" fill="hold">
+                                          <p:stCondLst>
+                                            <p:cond delay="0"/>
+                                          </p:stCondLst>
+                                        </p:cTn>
+                                        <p:tgtEl>
+                                          <p:spTgt spid="3">
+                                            <p:txEl>
+                                              <p:pRg st="4" end="4"/>
+                                            </p:txEl>
+                                          </p:spTgt>
+                                        </p:tgtEl>
+                                        <p:attrNameLst>
+                                          <p:attrName>style.visibility</p:attrName>
+                                        </p:attrNameLst>
+                                      </p:cBhvr>
+                                      <p:to>
+                                        <p:strVal val="visible"/>
+                                      </p:to>
+                                    </p:set>
+                                  </p:childTnLst>
+                                </p:cTn>
+                              </p:par>
+                            </p:childTnLst>
+                          </p:cTn>
+                        </p:par>
+                      </p:childTnLst>
+                    </p:cTn>
+                  </p:par>
+                  <p:par>
+                    <p:cTn id="13" fill="hold">
+                      <p:stCondLst>
+                        <p:cond delay="indefinite"/>
+                      </p:stCondLst>
+                      <p:childTnLst>
+                        <p:par>
+                          <p:cTn id="14" fill="hold">
+                            <p:stCondLst>
+                              <p:cond delay="0"/>
+                            </p:stCondLst>
+                            <p:childTnLst>
+                              <p:par>
+                                <p:cTn id="15" presetID="1" presetClass="entr" presetSubtype="0" fill="hold" nodeType="clickEffect">
+                                  <p:stCondLst>
+                                    <p:cond delay="0"/>
+                                  </p:stCondLst>
+                                  <p:childTnLst>
+                                    <p:set>
+                                      <p:cBhvr>
+                                        <p:cTn id="16" dur="1" fill="hold">
+                                          <p:stCondLst>
+                                            <p:cond delay="0"/>
+                                          </p:stCondLst>
+                                        </p:cTn>
+                                        <p:tgtEl>
+                                          <p:spTgt spid="3">
+                                            <p:txEl>
+                                              <p:pRg st="5" end="5"/>
+                                            </p:txEl>
+                                          </p:spTgt>
+                                        </p:tgtEl>
+                                        <p:attrNameLst>
+                                          <p:attrName>style.visibility</p:attrName>
+                                        </p:attrNameLst>
+                                      </p:cBhvr>
+                                      <p:to>
+                                        <p:strVal val="visible"/>
+                                      </p:to>
+                                    </p:set>
+                                  </p:childTnLst>
+                                </p:cTn>
+                              </p:par>
+                              <p:par>
+                                <p:cTn id="17" presetID="1" presetClass="entr" presetSubtype="0" fill="hold" nodeType="withEffect">
+                                  <p:stCondLst>
+                                    <p:cond delay="0"/>
+                                  </p:stCondLst>
+                                  <p:childTnLst>
+                                    <p:set>
+                                      <p:cBhvr>
+                                        <p:cTn id="18" dur="1" fill="hold">
+                                          <p:stCondLst>
+                                            <p:cond delay="0"/>
+                                          </p:stCondLst>
+                                        </p:cTn>
+                                        <p:tgtEl>
+                                          <p:spTgt spid="3">
+                                            <p:txEl>
+                                              <p:pRg st="6" end="6"/>
+                                            </p:txEl>
+                                          </p:spTgt>
+                                        </p:tgtEl>
+                                        <p:attrNameLst>
+                                          <p:attrName>style.visibility</p:attrName>
+                                        </p:attrNameLst>
+                                      </p:cBhvr>
+                                      <p:to>
+                                        <p:strVal val="visible"/>
+                                      </p:to>
+                                    </p:set>
+                                  </p:childTnLst>
+                                </p:cTn>
+                              </p:par>
+                            </p:childTnLst>
+                          </p:cTn>
+                        </p:par>
+                      </p:childTnLst>
+                    </p:cTn>
+                  </p:par>
+                </p:childTnLst>
+              </p:cTn>
+              <p:prevCondLst>
+                <p:cond evt="onPrev" delay="0">
+                  <p:tgtEl>
+                    <p:sldTgt/>
+                  </p:tgtEl>
+                </p:cond>
+              </p:prevCondLst>
+              <p:nextCondLst>
+                <p:cond evt="onNext" delay="0">
+                  <p:tgtEl>
+                    <p:sldTgt/>
+                  </p:tgtEl>
+                </p:cond>
+              </p:nextCondLst>
+            </p:seq>
+          </p:childTnLst>
+        </p:cTn>
+      </p:par>
+    </p:tnLst>
+  </p:timing>
 </p:sld>
 </file>
 
@@ -16222,6 +20169,258 @@
   <p:clrMapOvr>
     <a:masterClrMapping/>
   </p:clrMapOvr>
+  <p:timing>
+    <p:tnLst>
+      <p:par>
+        <p:cTn id="1" dur="indefinite" restart="never" nodeType="tmRoot">
+          <p:childTnLst>
+            <p:seq concurrent="1" nextAc="seek">
+              <p:cTn id="2" dur="indefinite" nodeType="mainSeq">
+                <p:childTnLst>
+                  <p:par>
+                    <p:cTn id="3" fill="hold">
+                      <p:stCondLst>
+                        <p:cond delay="indefinite"/>
+                      </p:stCondLst>
+                      <p:childTnLst>
+                        <p:par>
+                          <p:cTn id="4" fill="hold">
+                            <p:stCondLst>
+                              <p:cond delay="0"/>
+                            </p:stCondLst>
+                            <p:childTnLst>
+                              <p:par>
+                                <p:cTn id="5" presetID="1" presetClass="entr" presetSubtype="0" fill="hold" nodeType="clickEffect">
+                                  <p:stCondLst>
+                                    <p:cond delay="0"/>
+                                  </p:stCondLst>
+                                  <p:childTnLst>
+                                    <p:set>
+                                      <p:cBhvr>
+                                        <p:cTn id="6" dur="1" fill="hold">
+                                          <p:stCondLst>
+                                            <p:cond delay="0"/>
+                                          </p:stCondLst>
+                                        </p:cTn>
+                                        <p:tgtEl>
+                                          <p:spTgt spid="6">
+                                            <p:txEl>
+                                              <p:pRg st="2" end="2"/>
+                                            </p:txEl>
+                                          </p:spTgt>
+                                        </p:tgtEl>
+                                        <p:attrNameLst>
+                                          <p:attrName>style.visibility</p:attrName>
+                                        </p:attrNameLst>
+                                      </p:cBhvr>
+                                      <p:to>
+                                        <p:strVal val="visible"/>
+                                      </p:to>
+                                    </p:set>
+                                  </p:childTnLst>
+                                </p:cTn>
+                              </p:par>
+                            </p:childTnLst>
+                          </p:cTn>
+                        </p:par>
+                      </p:childTnLst>
+                    </p:cTn>
+                  </p:par>
+                  <p:par>
+                    <p:cTn id="7" fill="hold">
+                      <p:stCondLst>
+                        <p:cond delay="indefinite"/>
+                      </p:stCondLst>
+                      <p:childTnLst>
+                        <p:par>
+                          <p:cTn id="8" fill="hold">
+                            <p:stCondLst>
+                              <p:cond delay="0"/>
+                            </p:stCondLst>
+                            <p:childTnLst>
+                              <p:par>
+                                <p:cTn id="9" presetID="1" presetClass="entr" presetSubtype="0" fill="hold" nodeType="clickEffect">
+                                  <p:stCondLst>
+                                    <p:cond delay="0"/>
+                                  </p:stCondLst>
+                                  <p:childTnLst>
+                                    <p:set>
+                                      <p:cBhvr>
+                                        <p:cTn id="10" dur="1" fill="hold">
+                                          <p:stCondLst>
+                                            <p:cond delay="0"/>
+                                          </p:stCondLst>
+                                        </p:cTn>
+                                        <p:tgtEl>
+                                          <p:spTgt spid="6">
+                                            <p:txEl>
+                                              <p:pRg st="3" end="3"/>
+                                            </p:txEl>
+                                          </p:spTgt>
+                                        </p:tgtEl>
+                                        <p:attrNameLst>
+                                          <p:attrName>style.visibility</p:attrName>
+                                        </p:attrNameLst>
+                                      </p:cBhvr>
+                                      <p:to>
+                                        <p:strVal val="visible"/>
+                                      </p:to>
+                                    </p:set>
+                                  </p:childTnLst>
+                                </p:cTn>
+                              </p:par>
+                              <p:par>
+                                <p:cTn id="11" presetID="1" presetClass="entr" presetSubtype="0" fill="hold" nodeType="withEffect">
+                                  <p:stCondLst>
+                                    <p:cond delay="0"/>
+                                  </p:stCondLst>
+                                  <p:childTnLst>
+                                    <p:set>
+                                      <p:cBhvr>
+                                        <p:cTn id="12" dur="1" fill="hold">
+                                          <p:stCondLst>
+                                            <p:cond delay="0"/>
+                                          </p:stCondLst>
+                                        </p:cTn>
+                                        <p:tgtEl>
+                                          <p:spTgt spid="6">
+                                            <p:txEl>
+                                              <p:pRg st="4" end="4"/>
+                                            </p:txEl>
+                                          </p:spTgt>
+                                        </p:tgtEl>
+                                        <p:attrNameLst>
+                                          <p:attrName>style.visibility</p:attrName>
+                                        </p:attrNameLst>
+                                      </p:cBhvr>
+                                      <p:to>
+                                        <p:strVal val="visible"/>
+                                      </p:to>
+                                    </p:set>
+                                  </p:childTnLst>
+                                </p:cTn>
+                              </p:par>
+                              <p:par>
+                                <p:cTn id="13" presetID="1" presetClass="entr" presetSubtype="0" fill="hold" nodeType="withEffect">
+                                  <p:stCondLst>
+                                    <p:cond delay="0"/>
+                                  </p:stCondLst>
+                                  <p:childTnLst>
+                                    <p:set>
+                                      <p:cBhvr>
+                                        <p:cTn id="14" dur="1" fill="hold">
+                                          <p:stCondLst>
+                                            <p:cond delay="0"/>
+                                          </p:stCondLst>
+                                        </p:cTn>
+                                        <p:tgtEl>
+                                          <p:spTgt spid="6">
+                                            <p:txEl>
+                                              <p:pRg st="5" end="5"/>
+                                            </p:txEl>
+                                          </p:spTgt>
+                                        </p:tgtEl>
+                                        <p:attrNameLst>
+                                          <p:attrName>style.visibility</p:attrName>
+                                        </p:attrNameLst>
+                                      </p:cBhvr>
+                                      <p:to>
+                                        <p:strVal val="visible"/>
+                                      </p:to>
+                                    </p:set>
+                                  </p:childTnLst>
+                                </p:cTn>
+                              </p:par>
+                              <p:par>
+                                <p:cTn id="15" presetID="1" presetClass="entr" presetSubtype="0" fill="hold" nodeType="withEffect">
+                                  <p:stCondLst>
+                                    <p:cond delay="0"/>
+                                  </p:stCondLst>
+                                  <p:childTnLst>
+                                    <p:set>
+                                      <p:cBhvr>
+                                        <p:cTn id="16" dur="1" fill="hold">
+                                          <p:stCondLst>
+                                            <p:cond delay="0"/>
+                                          </p:stCondLst>
+                                        </p:cTn>
+                                        <p:tgtEl>
+                                          <p:spTgt spid="6">
+                                            <p:txEl>
+                                              <p:pRg st="6" end="6"/>
+                                            </p:txEl>
+                                          </p:spTgt>
+                                        </p:tgtEl>
+                                        <p:attrNameLst>
+                                          <p:attrName>style.visibility</p:attrName>
+                                        </p:attrNameLst>
+                                      </p:cBhvr>
+                                      <p:to>
+                                        <p:strVal val="visible"/>
+                                      </p:to>
+                                    </p:set>
+                                  </p:childTnLst>
+                                </p:cTn>
+                              </p:par>
+                              <p:par>
+                                <p:cTn id="17" presetID="1" presetClass="entr" presetSubtype="0" fill="hold" nodeType="withEffect">
+                                  <p:stCondLst>
+                                    <p:cond delay="0"/>
+                                  </p:stCondLst>
+                                  <p:childTnLst>
+                                    <p:set>
+                                      <p:cBhvr>
+                                        <p:cTn id="18" dur="1" fill="hold">
+                                          <p:stCondLst>
+                                            <p:cond delay="0"/>
+                                          </p:stCondLst>
+                                        </p:cTn>
+                                        <p:tgtEl>
+                                          <p:spTgt spid="6">
+                                            <p:txEl>
+                                              <p:pRg st="7" end="7"/>
+                                            </p:txEl>
+                                          </p:spTgt>
+                                        </p:tgtEl>
+                                        <p:attrNameLst>
+                                          <p:attrName>style.visibility</p:attrName>
+                                        </p:attrNameLst>
+                                      </p:cBhvr>
+                                      <p:to>
+                                        <p:strVal val="visible"/>
+                                      </p:to>
+                                    </p:set>
+                                  </p:childTnLst>
+                                </p:cTn>
+                              </p:par>
+                            </p:childTnLst>
+                          </p:cTn>
+                        </p:par>
+                      </p:childTnLst>
+                    </p:cTn>
+                  </p:par>
+                </p:childTnLst>
+              </p:cTn>
+              <p:prevCondLst>
+                <p:cond evt="onPrev" delay="0">
+                  <p:tgtEl>
+                    <p:sldTgt/>
+                  </p:tgtEl>
+                </p:cond>
+              </p:prevCondLst>
+              <p:nextCondLst>
+                <p:cond evt="onNext" delay="0">
+                  <p:tgtEl>
+                    <p:sldTgt/>
+                  </p:tgtEl>
+                </p:cond>
+              </p:nextCondLst>
+            </p:seq>
+          </p:childTnLst>
+        </p:cTn>
+      </p:par>
+    </p:tnLst>
+  </p:timing>
 </p:sld>
 </file>
 
@@ -16269,8 +20468,8 @@
           </a:p>
         </p:txBody>
       </p:sp>
-      <mc:AlternateContent xmlns:mc="http://schemas.openxmlformats.org/markup-compatibility/2006" xmlns:a14="http://schemas.microsoft.com/office/drawing/2010/main">
-        <mc:Choice Requires="a14">
+      <mc:AlternateContent xmlns:mc="http://schemas.openxmlformats.org/markup-compatibility/2006">
+        <mc:Choice xmlns:a14="http://schemas.microsoft.com/office/drawing/2010/main" Requires="a14">
           <p:sp>
             <p:nvSpPr>
               <p:cNvPr id="3" name="Content Placeholder 2"/>
@@ -16314,143 +20513,151 @@
                 </a:r>
               </a:p>
               <a:p>
+                <a:pPr marL="0" indent="0">
+                  <a:buNone/>
+                </a:pPr>
                 <a14:m>
-                  <m:oMath xmlns:m="http://schemas.openxmlformats.org/officeDocument/2006/math">
-                    <m:r>
-                      <a:rPr>
-                        <a:latin typeface="Cambria Math" panose="02040503050406030204" pitchFamily="18" charset="0"/>
-                      </a:rPr>
-                      <m:t>𝑃</m:t>
-                    </m:r>
-                    <m:d>
-                      <m:dPr>
-                        <m:ctrlPr>
-                          <a:rPr i="1">
-                            <a:latin typeface="Cambria Math" panose="02040503050406030204" pitchFamily="18" charset="0"/>
-                          </a:rPr>
-                        </m:ctrlPr>
-                      </m:dPr>
-                      <m:e>
-                        <m:r>
-                          <a:rPr>
-                            <a:latin typeface="Cambria Math" panose="02040503050406030204" pitchFamily="18" charset="0"/>
-                          </a:rPr>
-                          <m:t>𝐴</m:t>
-                        </m:r>
-                        <m:r>
-                          <a:rPr>
-                            <a:latin typeface="Cambria Math" panose="02040503050406030204" pitchFamily="18" charset="0"/>
-                          </a:rPr>
-                          <m:t>|</m:t>
-                        </m:r>
-                        <m:r>
-                          <a:rPr>
-                            <a:latin typeface="Cambria Math" panose="02040503050406030204" pitchFamily="18" charset="0"/>
-                          </a:rPr>
-                          <m:t>𝐵</m:t>
-                        </m:r>
-                      </m:e>
-                    </m:d>
-                    <m:r>
-                      <a:rPr>
-                        <a:latin typeface="Cambria Math" panose="02040503050406030204" pitchFamily="18" charset="0"/>
-                      </a:rPr>
-                      <m:t>=</m:t>
-                    </m:r>
-                    <m:r>
-                      <a:rPr>
-                        <a:latin typeface="Cambria Math" panose="02040503050406030204" pitchFamily="18" charset="0"/>
-                      </a:rPr>
-                      <m:t>𝑃</m:t>
-                    </m:r>
-                    <m:d>
-                      <m:dPr>
-                        <m:ctrlPr>
-                          <a:rPr i="1">
-                            <a:latin typeface="Cambria Math" panose="02040503050406030204" pitchFamily="18" charset="0"/>
-                          </a:rPr>
-                        </m:ctrlPr>
-                      </m:dPr>
-                      <m:e>
-                        <m:r>
-                          <a:rPr>
-                            <a:latin typeface="Cambria Math" panose="02040503050406030204" pitchFamily="18" charset="0"/>
-                          </a:rPr>
-                          <m:t>𝐴</m:t>
-                        </m:r>
-                      </m:e>
-                    </m:d>
-                    <m:r>
-                      <a:rPr>
-                        <a:latin typeface="Cambria Math" panose="02040503050406030204" pitchFamily="18" charset="0"/>
-                      </a:rPr>
-                      <m:t>⇎</m:t>
-                    </m:r>
-                    <m:r>
-                      <a:rPr>
-                        <a:latin typeface="Cambria Math" panose="02040503050406030204" pitchFamily="18" charset="0"/>
-                      </a:rPr>
-                      <m:t>𝑃</m:t>
-                    </m:r>
-                    <m:d>
-                      <m:dPr>
-                        <m:ctrlPr>
-                          <a:rPr i="1">
-                            <a:latin typeface="Cambria Math" panose="02040503050406030204" pitchFamily="18" charset="0"/>
-                          </a:rPr>
-                        </m:ctrlPr>
-                      </m:dPr>
-                      <m:e>
-                        <m:r>
-                          <a:rPr>
-                            <a:latin typeface="Cambria Math" panose="02040503050406030204" pitchFamily="18" charset="0"/>
-                          </a:rPr>
-                          <m:t>𝐵</m:t>
-                        </m:r>
-                        <m:r>
-                          <a:rPr>
-                            <a:latin typeface="Cambria Math" panose="02040503050406030204" pitchFamily="18" charset="0"/>
-                          </a:rPr>
-                          <m:t>|</m:t>
-                        </m:r>
-                        <m:r>
-                          <a:rPr>
-                            <a:latin typeface="Cambria Math" panose="02040503050406030204" pitchFamily="18" charset="0"/>
-                          </a:rPr>
-                          <m:t>𝐴</m:t>
-                        </m:r>
-                      </m:e>
-                    </m:d>
-                    <m:r>
-                      <a:rPr>
-                        <a:latin typeface="Cambria Math" panose="02040503050406030204" pitchFamily="18" charset="0"/>
-                      </a:rPr>
-                      <m:t>=</m:t>
-                    </m:r>
-                    <m:r>
-                      <a:rPr>
-                        <a:latin typeface="Cambria Math" panose="02040503050406030204" pitchFamily="18" charset="0"/>
-                      </a:rPr>
-                      <m:t>𝑃</m:t>
-                    </m:r>
-                    <m:d>
-                      <m:dPr>
-                        <m:ctrlPr>
-                          <a:rPr i="1">
-                            <a:latin typeface="Cambria Math" panose="02040503050406030204" pitchFamily="18" charset="0"/>
-                          </a:rPr>
-                        </m:ctrlPr>
-                      </m:dPr>
-                      <m:e>
-                        <m:r>
-                          <a:rPr>
-                            <a:latin typeface="Cambria Math" panose="02040503050406030204" pitchFamily="18" charset="0"/>
-                          </a:rPr>
-                          <m:t>𝐵</m:t>
-                        </m:r>
-                      </m:e>
-                    </m:d>
-                  </m:oMath>
+                  <m:oMathPara xmlns:m="http://schemas.openxmlformats.org/officeDocument/2006/math">
+                    <m:oMathParaPr>
+                      <m:jc m:val="centerGroup"/>
+                    </m:oMathParaPr>
+                    <m:oMath xmlns:m="http://schemas.openxmlformats.org/officeDocument/2006/math">
+                      <m:r>
+                        <a:rPr>
+                          <a:latin typeface="Cambria Math" panose="02040503050406030204" pitchFamily="18" charset="0"/>
+                        </a:rPr>
+                        <m:t>𝑃</m:t>
+                      </m:r>
+                      <m:d>
+                        <m:dPr>
+                          <m:ctrlPr>
+                            <a:rPr i="1">
+                              <a:latin typeface="Cambria Math" panose="02040503050406030204" pitchFamily="18" charset="0"/>
+                            </a:rPr>
+                          </m:ctrlPr>
+                        </m:dPr>
+                        <m:e>
+                          <m:r>
+                            <a:rPr>
+                              <a:latin typeface="Cambria Math" panose="02040503050406030204" pitchFamily="18" charset="0"/>
+                            </a:rPr>
+                            <m:t>𝐴</m:t>
+                          </m:r>
+                          <m:r>
+                            <a:rPr>
+                              <a:latin typeface="Cambria Math" panose="02040503050406030204" pitchFamily="18" charset="0"/>
+                            </a:rPr>
+                            <m:t>|</m:t>
+                          </m:r>
+                          <m:r>
+                            <a:rPr>
+                              <a:latin typeface="Cambria Math" panose="02040503050406030204" pitchFamily="18" charset="0"/>
+                            </a:rPr>
+                            <m:t>𝐵</m:t>
+                          </m:r>
+                        </m:e>
+                      </m:d>
+                      <m:r>
+                        <a:rPr>
+                          <a:latin typeface="Cambria Math" panose="02040503050406030204" pitchFamily="18" charset="0"/>
+                        </a:rPr>
+                        <m:t>=</m:t>
+                      </m:r>
+                      <m:r>
+                        <a:rPr>
+                          <a:latin typeface="Cambria Math" panose="02040503050406030204" pitchFamily="18" charset="0"/>
+                        </a:rPr>
+                        <m:t>𝑃</m:t>
+                      </m:r>
+                      <m:d>
+                        <m:dPr>
+                          <m:ctrlPr>
+                            <a:rPr i="1">
+                              <a:latin typeface="Cambria Math" panose="02040503050406030204" pitchFamily="18" charset="0"/>
+                            </a:rPr>
+                          </m:ctrlPr>
+                        </m:dPr>
+                        <m:e>
+                          <m:r>
+                            <a:rPr>
+                              <a:latin typeface="Cambria Math" panose="02040503050406030204" pitchFamily="18" charset="0"/>
+                            </a:rPr>
+                            <m:t>𝐴</m:t>
+                          </m:r>
+                        </m:e>
+                      </m:d>
+                      <m:r>
+                        <a:rPr>
+                          <a:latin typeface="Cambria Math" panose="02040503050406030204" pitchFamily="18" charset="0"/>
+                        </a:rPr>
+                        <m:t>⇎</m:t>
+                      </m:r>
+                      <m:r>
+                        <a:rPr>
+                          <a:latin typeface="Cambria Math" panose="02040503050406030204" pitchFamily="18" charset="0"/>
+                        </a:rPr>
+                        <m:t>𝑃</m:t>
+                      </m:r>
+                      <m:d>
+                        <m:dPr>
+                          <m:ctrlPr>
+                            <a:rPr i="1">
+                              <a:latin typeface="Cambria Math" panose="02040503050406030204" pitchFamily="18" charset="0"/>
+                            </a:rPr>
+                          </m:ctrlPr>
+                        </m:dPr>
+                        <m:e>
+                          <m:r>
+                            <a:rPr>
+                              <a:latin typeface="Cambria Math" panose="02040503050406030204" pitchFamily="18" charset="0"/>
+                            </a:rPr>
+                            <m:t>𝐵</m:t>
+                          </m:r>
+                          <m:r>
+                            <a:rPr>
+                              <a:latin typeface="Cambria Math" panose="02040503050406030204" pitchFamily="18" charset="0"/>
+                            </a:rPr>
+                            <m:t>|</m:t>
+                          </m:r>
+                          <m:r>
+                            <a:rPr>
+                              <a:latin typeface="Cambria Math" panose="02040503050406030204" pitchFamily="18" charset="0"/>
+                            </a:rPr>
+                            <m:t>𝐴</m:t>
+                          </m:r>
+                        </m:e>
+                      </m:d>
+                      <m:r>
+                        <a:rPr>
+                          <a:latin typeface="Cambria Math" panose="02040503050406030204" pitchFamily="18" charset="0"/>
+                        </a:rPr>
+                        <m:t>=</m:t>
+                      </m:r>
+                      <m:r>
+                        <a:rPr>
+                          <a:latin typeface="Cambria Math" panose="02040503050406030204" pitchFamily="18" charset="0"/>
+                        </a:rPr>
+                        <m:t>𝑃</m:t>
+                      </m:r>
+                      <m:d>
+                        <m:dPr>
+                          <m:ctrlPr>
+                            <a:rPr i="1">
+                              <a:latin typeface="Cambria Math" panose="02040503050406030204" pitchFamily="18" charset="0"/>
+                            </a:rPr>
+                          </m:ctrlPr>
+                        </m:dPr>
+                        <m:e>
+                          <m:r>
+                            <a:rPr>
+                              <a:latin typeface="Cambria Math" panose="02040503050406030204" pitchFamily="18" charset="0"/>
+                            </a:rPr>
+                            <m:t>𝐵</m:t>
+                          </m:r>
+                        </m:e>
+                      </m:d>
+                    </m:oMath>
+                  </m:oMathPara>
                 </a14:m>
                 <a:endParaRPr dirty="0"/>
               </a:p>
@@ -16815,7 +21022,7 @@
             </p:txBody>
           </p:sp>
         </mc:Choice>
-        <mc:Fallback xmlns="">
+        <mc:Fallback>
           <p:sp>
             <p:nvSpPr>
               <p:cNvPr id="3" name="Content Placeholder 2"/>
@@ -16858,6 +21065,405 @@
   <p:clrMapOvr>
     <a:masterClrMapping/>
   </p:clrMapOvr>
+  <p:timing>
+    <p:tnLst>
+      <p:par>
+        <p:cTn id="1" dur="indefinite" restart="never" nodeType="tmRoot">
+          <p:childTnLst>
+            <p:seq concurrent="1" nextAc="seek">
+              <p:cTn id="2" dur="indefinite" nodeType="mainSeq">
+                <p:childTnLst>
+                  <p:par>
+                    <p:cTn id="3" fill="hold">
+                      <p:stCondLst>
+                        <p:cond delay="indefinite"/>
+                      </p:stCondLst>
+                      <p:childTnLst>
+                        <p:par>
+                          <p:cTn id="4" fill="hold">
+                            <p:stCondLst>
+                              <p:cond delay="0"/>
+                            </p:stCondLst>
+                            <p:childTnLst>
+                              <p:par>
+                                <p:cTn id="5" presetID="1" presetClass="entr" presetSubtype="0" fill="hold" nodeType="clickEffect">
+                                  <p:stCondLst>
+                                    <p:cond delay="0"/>
+                                  </p:stCondLst>
+                                  <p:childTnLst>
+                                    <p:set>
+                                      <p:cBhvr>
+                                        <p:cTn id="6" dur="1" fill="hold">
+                                          <p:stCondLst>
+                                            <p:cond delay="0"/>
+                                          </p:stCondLst>
+                                        </p:cTn>
+                                        <p:tgtEl>
+                                          <p:spTgt spid="3">
+                                            <p:txEl>
+                                              <p:pRg st="1" end="1"/>
+                                            </p:txEl>
+                                          </p:spTgt>
+                                        </p:tgtEl>
+                                        <p:attrNameLst>
+                                          <p:attrName>style.visibility</p:attrName>
+                                        </p:attrNameLst>
+                                      </p:cBhvr>
+                                      <p:to>
+                                        <p:strVal val="visible"/>
+                                      </p:to>
+                                    </p:set>
+                                  </p:childTnLst>
+                                </p:cTn>
+                              </p:par>
+                            </p:childTnLst>
+                          </p:cTn>
+                        </p:par>
+                      </p:childTnLst>
+                    </p:cTn>
+                  </p:par>
+                  <p:par>
+                    <p:cTn id="7" fill="hold">
+                      <p:stCondLst>
+                        <p:cond delay="indefinite"/>
+                      </p:stCondLst>
+                      <p:childTnLst>
+                        <p:par>
+                          <p:cTn id="8" fill="hold">
+                            <p:stCondLst>
+                              <p:cond delay="0"/>
+                            </p:stCondLst>
+                            <p:childTnLst>
+                              <p:par>
+                                <p:cTn id="9" presetID="1" presetClass="entr" presetSubtype="0" fill="hold" nodeType="clickEffect">
+                                  <p:stCondLst>
+                                    <p:cond delay="0"/>
+                                  </p:stCondLst>
+                                  <p:childTnLst>
+                                    <p:set>
+                                      <p:cBhvr>
+                                        <p:cTn id="10" dur="1" fill="hold">
+                                          <p:stCondLst>
+                                            <p:cond delay="0"/>
+                                          </p:stCondLst>
+                                        </p:cTn>
+                                        <p:tgtEl>
+                                          <p:spTgt spid="3">
+                                            <p:txEl>
+                                              <p:pRg st="2" end="2"/>
+                                            </p:txEl>
+                                          </p:spTgt>
+                                        </p:tgtEl>
+                                        <p:attrNameLst>
+                                          <p:attrName>style.visibility</p:attrName>
+                                        </p:attrNameLst>
+                                      </p:cBhvr>
+                                      <p:to>
+                                        <p:strVal val="visible"/>
+                                      </p:to>
+                                    </p:set>
+                                  </p:childTnLst>
+                                </p:cTn>
+                              </p:par>
+                              <p:par>
+                                <p:cTn id="11" presetID="1" presetClass="entr" presetSubtype="0" fill="hold" nodeType="withEffect">
+                                  <p:stCondLst>
+                                    <p:cond delay="0"/>
+                                  </p:stCondLst>
+                                  <p:childTnLst>
+                                    <p:set>
+                                      <p:cBhvr>
+                                        <p:cTn id="12" dur="1" fill="hold">
+                                          <p:stCondLst>
+                                            <p:cond delay="0"/>
+                                          </p:stCondLst>
+                                        </p:cTn>
+                                        <p:tgtEl>
+                                          <p:spTgt spid="3">
+                                            <p:txEl>
+                                              <p:pRg st="3" end="3"/>
+                                            </p:txEl>
+                                          </p:spTgt>
+                                        </p:tgtEl>
+                                        <p:attrNameLst>
+                                          <p:attrName>style.visibility</p:attrName>
+                                        </p:attrNameLst>
+                                      </p:cBhvr>
+                                      <p:to>
+                                        <p:strVal val="visible"/>
+                                      </p:to>
+                                    </p:set>
+                                  </p:childTnLst>
+                                </p:cTn>
+                              </p:par>
+                            </p:childTnLst>
+                          </p:cTn>
+                        </p:par>
+                      </p:childTnLst>
+                    </p:cTn>
+                  </p:par>
+                  <p:par>
+                    <p:cTn id="13" fill="hold">
+                      <p:stCondLst>
+                        <p:cond delay="indefinite"/>
+                      </p:stCondLst>
+                      <p:childTnLst>
+                        <p:par>
+                          <p:cTn id="14" fill="hold">
+                            <p:stCondLst>
+                              <p:cond delay="0"/>
+                            </p:stCondLst>
+                            <p:childTnLst>
+                              <p:par>
+                                <p:cTn id="15" presetID="1" presetClass="entr" presetSubtype="0" fill="hold" nodeType="clickEffect">
+                                  <p:stCondLst>
+                                    <p:cond delay="0"/>
+                                  </p:stCondLst>
+                                  <p:childTnLst>
+                                    <p:set>
+                                      <p:cBhvr>
+                                        <p:cTn id="16" dur="1" fill="hold">
+                                          <p:stCondLst>
+                                            <p:cond delay="0"/>
+                                          </p:stCondLst>
+                                        </p:cTn>
+                                        <p:tgtEl>
+                                          <p:spTgt spid="3">
+                                            <p:txEl>
+                                              <p:pRg st="4" end="4"/>
+                                            </p:txEl>
+                                          </p:spTgt>
+                                        </p:tgtEl>
+                                        <p:attrNameLst>
+                                          <p:attrName>style.visibility</p:attrName>
+                                        </p:attrNameLst>
+                                      </p:cBhvr>
+                                      <p:to>
+                                        <p:strVal val="visible"/>
+                                      </p:to>
+                                    </p:set>
+                                  </p:childTnLst>
+                                </p:cTn>
+                              </p:par>
+                              <p:par>
+                                <p:cTn id="17" presetID="1" presetClass="entr" presetSubtype="0" fill="hold" nodeType="withEffect">
+                                  <p:stCondLst>
+                                    <p:cond delay="0"/>
+                                  </p:stCondLst>
+                                  <p:childTnLst>
+                                    <p:set>
+                                      <p:cBhvr>
+                                        <p:cTn id="18" dur="1" fill="hold">
+                                          <p:stCondLst>
+                                            <p:cond delay="0"/>
+                                          </p:stCondLst>
+                                        </p:cTn>
+                                        <p:tgtEl>
+                                          <p:spTgt spid="3">
+                                            <p:txEl>
+                                              <p:pRg st="5" end="5"/>
+                                            </p:txEl>
+                                          </p:spTgt>
+                                        </p:tgtEl>
+                                        <p:attrNameLst>
+                                          <p:attrName>style.visibility</p:attrName>
+                                        </p:attrNameLst>
+                                      </p:cBhvr>
+                                      <p:to>
+                                        <p:strVal val="visible"/>
+                                      </p:to>
+                                    </p:set>
+                                  </p:childTnLst>
+                                </p:cTn>
+                              </p:par>
+                            </p:childTnLst>
+                          </p:cTn>
+                        </p:par>
+                      </p:childTnLst>
+                    </p:cTn>
+                  </p:par>
+                  <p:par>
+                    <p:cTn id="19" fill="hold">
+                      <p:stCondLst>
+                        <p:cond delay="indefinite"/>
+                      </p:stCondLst>
+                      <p:childTnLst>
+                        <p:par>
+                          <p:cTn id="20" fill="hold">
+                            <p:stCondLst>
+                              <p:cond delay="0"/>
+                            </p:stCondLst>
+                            <p:childTnLst>
+                              <p:par>
+                                <p:cTn id="21" presetID="1" presetClass="entr" presetSubtype="0" fill="hold" nodeType="clickEffect">
+                                  <p:stCondLst>
+                                    <p:cond delay="0"/>
+                                  </p:stCondLst>
+                                  <p:childTnLst>
+                                    <p:set>
+                                      <p:cBhvr>
+                                        <p:cTn id="22" dur="1" fill="hold">
+                                          <p:stCondLst>
+                                            <p:cond delay="0"/>
+                                          </p:stCondLst>
+                                        </p:cTn>
+                                        <p:tgtEl>
+                                          <p:spTgt spid="3">
+                                            <p:txEl>
+                                              <p:pRg st="6" end="6"/>
+                                            </p:txEl>
+                                          </p:spTgt>
+                                        </p:tgtEl>
+                                        <p:attrNameLst>
+                                          <p:attrName>style.visibility</p:attrName>
+                                        </p:attrNameLst>
+                                      </p:cBhvr>
+                                      <p:to>
+                                        <p:strVal val="visible"/>
+                                      </p:to>
+                                    </p:set>
+                                  </p:childTnLst>
+                                </p:cTn>
+                              </p:par>
+                              <p:par>
+                                <p:cTn id="23" presetID="1" presetClass="entr" presetSubtype="0" fill="hold" nodeType="withEffect">
+                                  <p:stCondLst>
+                                    <p:cond delay="0"/>
+                                  </p:stCondLst>
+                                  <p:childTnLst>
+                                    <p:set>
+                                      <p:cBhvr>
+                                        <p:cTn id="24" dur="1" fill="hold">
+                                          <p:stCondLst>
+                                            <p:cond delay="0"/>
+                                          </p:stCondLst>
+                                        </p:cTn>
+                                        <p:tgtEl>
+                                          <p:spTgt spid="3">
+                                            <p:txEl>
+                                              <p:pRg st="7" end="7"/>
+                                            </p:txEl>
+                                          </p:spTgt>
+                                        </p:tgtEl>
+                                        <p:attrNameLst>
+                                          <p:attrName>style.visibility</p:attrName>
+                                        </p:attrNameLst>
+                                      </p:cBhvr>
+                                      <p:to>
+                                        <p:strVal val="visible"/>
+                                      </p:to>
+                                    </p:set>
+                                  </p:childTnLst>
+                                </p:cTn>
+                              </p:par>
+                            </p:childTnLst>
+                          </p:cTn>
+                        </p:par>
+                      </p:childTnLst>
+                    </p:cTn>
+                  </p:par>
+                  <p:par>
+                    <p:cTn id="25" fill="hold">
+                      <p:stCondLst>
+                        <p:cond delay="indefinite"/>
+                      </p:stCondLst>
+                      <p:childTnLst>
+                        <p:par>
+                          <p:cTn id="26" fill="hold">
+                            <p:stCondLst>
+                              <p:cond delay="0"/>
+                            </p:stCondLst>
+                            <p:childTnLst>
+                              <p:par>
+                                <p:cTn id="27" presetID="1" presetClass="entr" presetSubtype="0" fill="hold" nodeType="clickEffect">
+                                  <p:stCondLst>
+                                    <p:cond delay="0"/>
+                                  </p:stCondLst>
+                                  <p:childTnLst>
+                                    <p:set>
+                                      <p:cBhvr>
+                                        <p:cTn id="28" dur="1" fill="hold">
+                                          <p:stCondLst>
+                                            <p:cond delay="0"/>
+                                          </p:stCondLst>
+                                        </p:cTn>
+                                        <p:tgtEl>
+                                          <p:spTgt spid="3">
+                                            <p:txEl>
+                                              <p:pRg st="8" end="8"/>
+                                            </p:txEl>
+                                          </p:spTgt>
+                                        </p:tgtEl>
+                                        <p:attrNameLst>
+                                          <p:attrName>style.visibility</p:attrName>
+                                        </p:attrNameLst>
+                                      </p:cBhvr>
+                                      <p:to>
+                                        <p:strVal val="visible"/>
+                                      </p:to>
+                                    </p:set>
+                                  </p:childTnLst>
+                                </p:cTn>
+                              </p:par>
+                              <p:par>
+                                <p:cTn id="29" presetID="1" presetClass="entr" presetSubtype="0" fill="hold" nodeType="withEffect">
+                                  <p:stCondLst>
+                                    <p:cond delay="0"/>
+                                  </p:stCondLst>
+                                  <p:childTnLst>
+                                    <p:set>
+                                      <p:cBhvr>
+                                        <p:cTn id="30" dur="1" fill="hold">
+                                          <p:stCondLst>
+                                            <p:cond delay="0"/>
+                                          </p:stCondLst>
+                                        </p:cTn>
+                                        <p:tgtEl>
+                                          <p:spTgt spid="3">
+                                            <p:txEl>
+                                              <p:pRg st="9" end="9"/>
+                                            </p:txEl>
+                                          </p:spTgt>
+                                        </p:tgtEl>
+                                        <p:attrNameLst>
+                                          <p:attrName>style.visibility</p:attrName>
+                                        </p:attrNameLst>
+                                      </p:cBhvr>
+                                      <p:to>
+                                        <p:strVal val="visible"/>
+                                      </p:to>
+                                    </p:set>
+                                  </p:childTnLst>
+                                </p:cTn>
+                              </p:par>
+                            </p:childTnLst>
+                          </p:cTn>
+                        </p:par>
+                      </p:childTnLst>
+                    </p:cTn>
+                  </p:par>
+                </p:childTnLst>
+              </p:cTn>
+              <p:prevCondLst>
+                <p:cond evt="onPrev" delay="0">
+                  <p:tgtEl>
+                    <p:sldTgt/>
+                  </p:tgtEl>
+                </p:cond>
+              </p:prevCondLst>
+              <p:nextCondLst>
+                <p:cond evt="onNext" delay="0">
+                  <p:tgtEl>
+                    <p:sldTgt/>
+                  </p:tgtEl>
+                </p:cond>
+              </p:nextCondLst>
+            </p:seq>
+          </p:childTnLst>
+        </p:cTn>
+      </p:par>
+    </p:tnLst>
+  </p:timing>
 </p:sld>
 </file>
 
@@ -18006,6 +22612,227 @@
   <p:clrMapOvr>
     <a:masterClrMapping/>
   </p:clrMapOvr>
+  <p:timing>
+    <p:tnLst>
+      <p:par>
+        <p:cTn id="1" dur="indefinite" restart="never" nodeType="tmRoot">
+          <p:childTnLst>
+            <p:seq concurrent="1" nextAc="seek">
+              <p:cTn id="2" dur="indefinite" nodeType="mainSeq">
+                <p:childTnLst>
+                  <p:par>
+                    <p:cTn id="3" fill="hold">
+                      <p:stCondLst>
+                        <p:cond delay="indefinite"/>
+                      </p:stCondLst>
+                      <p:childTnLst>
+                        <p:par>
+                          <p:cTn id="4" fill="hold">
+                            <p:stCondLst>
+                              <p:cond delay="0"/>
+                            </p:stCondLst>
+                            <p:childTnLst>
+                              <p:par>
+                                <p:cTn id="5" presetID="1" presetClass="entr" presetSubtype="0" fill="hold" nodeType="clickEffect">
+                                  <p:stCondLst>
+                                    <p:cond delay="0"/>
+                                  </p:stCondLst>
+                                  <p:childTnLst>
+                                    <p:set>
+                                      <p:cBhvr>
+                                        <p:cTn id="6" dur="1" fill="hold">
+                                          <p:stCondLst>
+                                            <p:cond delay="0"/>
+                                          </p:stCondLst>
+                                        </p:cTn>
+                                        <p:tgtEl>
+                                          <p:spTgt spid="6">
+                                            <p:txEl>
+                                              <p:pRg st="2" end="2"/>
+                                            </p:txEl>
+                                          </p:spTgt>
+                                        </p:tgtEl>
+                                        <p:attrNameLst>
+                                          <p:attrName>style.visibility</p:attrName>
+                                        </p:attrNameLst>
+                                      </p:cBhvr>
+                                      <p:to>
+                                        <p:strVal val="visible"/>
+                                      </p:to>
+                                    </p:set>
+                                  </p:childTnLst>
+                                </p:cTn>
+                              </p:par>
+                              <p:par>
+                                <p:cTn id="7" presetID="1" presetClass="entr" presetSubtype="0" fill="hold" nodeType="withEffect">
+                                  <p:stCondLst>
+                                    <p:cond delay="0"/>
+                                  </p:stCondLst>
+                                  <p:childTnLst>
+                                    <p:set>
+                                      <p:cBhvr>
+                                        <p:cTn id="8" dur="1" fill="hold">
+                                          <p:stCondLst>
+                                            <p:cond delay="0"/>
+                                          </p:stCondLst>
+                                        </p:cTn>
+                                        <p:tgtEl>
+                                          <p:spTgt spid="6">
+                                            <p:txEl>
+                                              <p:pRg st="3" end="3"/>
+                                            </p:txEl>
+                                          </p:spTgt>
+                                        </p:tgtEl>
+                                        <p:attrNameLst>
+                                          <p:attrName>style.visibility</p:attrName>
+                                        </p:attrNameLst>
+                                      </p:cBhvr>
+                                      <p:to>
+                                        <p:strVal val="visible"/>
+                                      </p:to>
+                                    </p:set>
+                                  </p:childTnLst>
+                                </p:cTn>
+                              </p:par>
+                              <p:par>
+                                <p:cTn id="9" presetID="1" presetClass="entr" presetSubtype="0" fill="hold" nodeType="withEffect">
+                                  <p:stCondLst>
+                                    <p:cond delay="0"/>
+                                  </p:stCondLst>
+                                  <p:childTnLst>
+                                    <p:set>
+                                      <p:cBhvr>
+                                        <p:cTn id="10" dur="1" fill="hold">
+                                          <p:stCondLst>
+                                            <p:cond delay="0"/>
+                                          </p:stCondLst>
+                                        </p:cTn>
+                                        <p:tgtEl>
+                                          <p:spTgt spid="6">
+                                            <p:txEl>
+                                              <p:pRg st="4" end="4"/>
+                                            </p:txEl>
+                                          </p:spTgt>
+                                        </p:tgtEl>
+                                        <p:attrNameLst>
+                                          <p:attrName>style.visibility</p:attrName>
+                                        </p:attrNameLst>
+                                      </p:cBhvr>
+                                      <p:to>
+                                        <p:strVal val="visible"/>
+                                      </p:to>
+                                    </p:set>
+                                  </p:childTnLst>
+                                </p:cTn>
+                              </p:par>
+                            </p:childTnLst>
+                          </p:cTn>
+                        </p:par>
+                      </p:childTnLst>
+                    </p:cTn>
+                  </p:par>
+                  <p:par>
+                    <p:cTn id="11" fill="hold">
+                      <p:stCondLst>
+                        <p:cond delay="indefinite"/>
+                      </p:stCondLst>
+                      <p:childTnLst>
+                        <p:par>
+                          <p:cTn id="12" fill="hold">
+                            <p:stCondLst>
+                              <p:cond delay="0"/>
+                            </p:stCondLst>
+                            <p:childTnLst>
+                              <p:par>
+                                <p:cTn id="13" presetID="1" presetClass="entr" presetSubtype="0" fill="hold" nodeType="clickEffect">
+                                  <p:stCondLst>
+                                    <p:cond delay="0"/>
+                                  </p:stCondLst>
+                                  <p:childTnLst>
+                                    <p:set>
+                                      <p:cBhvr>
+                                        <p:cTn id="14" dur="1" fill="hold">
+                                          <p:stCondLst>
+                                            <p:cond delay="0"/>
+                                          </p:stCondLst>
+                                        </p:cTn>
+                                        <p:tgtEl>
+                                          <p:spTgt spid="6">
+                                            <p:txEl>
+                                              <p:pRg st="5" end="5"/>
+                                            </p:txEl>
+                                          </p:spTgt>
+                                        </p:tgtEl>
+                                        <p:attrNameLst>
+                                          <p:attrName>style.visibility</p:attrName>
+                                        </p:attrNameLst>
+                                      </p:cBhvr>
+                                      <p:to>
+                                        <p:strVal val="visible"/>
+                                      </p:to>
+                                    </p:set>
+                                  </p:childTnLst>
+                                </p:cTn>
+                              </p:par>
+                              <p:par>
+                                <p:cTn id="15" presetID="1" presetClass="entr" presetSubtype="0" fill="hold" nodeType="withEffect">
+                                  <p:stCondLst>
+                                    <p:cond delay="0"/>
+                                  </p:stCondLst>
+                                  <p:childTnLst>
+                                    <p:set>
+                                      <p:cBhvr>
+                                        <p:cTn id="16" dur="1" fill="hold">
+                                          <p:stCondLst>
+                                            <p:cond delay="0"/>
+                                          </p:stCondLst>
+                                        </p:cTn>
+                                        <p:tgtEl>
+                                          <p:spTgt spid="6">
+                                            <p:txEl>
+                                              <p:pRg st="6" end="6"/>
+                                            </p:txEl>
+                                          </p:spTgt>
+                                        </p:tgtEl>
+                                        <p:attrNameLst>
+                                          <p:attrName>style.visibility</p:attrName>
+                                        </p:attrNameLst>
+                                      </p:cBhvr>
+                                      <p:to>
+                                        <p:strVal val="visible"/>
+                                      </p:to>
+                                    </p:set>
+                                  </p:childTnLst>
+                                </p:cTn>
+                              </p:par>
+                            </p:childTnLst>
+                          </p:cTn>
+                        </p:par>
+                      </p:childTnLst>
+                    </p:cTn>
+                  </p:par>
+                </p:childTnLst>
+              </p:cTn>
+              <p:prevCondLst>
+                <p:cond evt="onPrev" delay="0">
+                  <p:tgtEl>
+                    <p:sldTgt/>
+                  </p:tgtEl>
+                </p:cond>
+              </p:prevCondLst>
+              <p:nextCondLst>
+                <p:cond evt="onNext" delay="0">
+                  <p:tgtEl>
+                    <p:sldTgt/>
+                  </p:tgtEl>
+                </p:cond>
+              </p:nextCondLst>
+            </p:seq>
+          </p:childTnLst>
+        </p:cTn>
+      </p:par>
+    </p:tnLst>
+  </p:timing>
 </p:sld>
 </file>
 
@@ -18058,8 +22885,8 @@
           </a:p>
         </p:txBody>
       </p:sp>
-      <mc:AlternateContent xmlns:mc="http://schemas.openxmlformats.org/markup-compatibility/2006">
-        <mc:Choice xmlns:a14="http://schemas.microsoft.com/office/drawing/2010/main" Requires="a14">
+      <mc:AlternateContent xmlns:mc="http://schemas.openxmlformats.org/markup-compatibility/2006" xmlns:a14="http://schemas.microsoft.com/office/drawing/2010/main">
+        <mc:Choice Requires="a14">
           <p:sp>
             <p:nvSpPr>
               <p:cNvPr id="3" name="Content Placeholder 2"/>
@@ -18577,7 +23404,7 @@
             </p:txBody>
           </p:sp>
         </mc:Choice>
-        <mc:Fallback>
+        <mc:Fallback xmlns="">
           <p:sp>
             <p:nvSpPr>
               <p:cNvPr id="3" name="Content Placeholder 2"/>
@@ -18616,6 +23443,245 @@
   <p:clrMapOvr>
     <a:masterClrMapping/>
   </p:clrMapOvr>
+  <p:timing>
+    <p:tnLst>
+      <p:par>
+        <p:cTn id="1" dur="indefinite" restart="never" nodeType="tmRoot">
+          <p:childTnLst>
+            <p:seq concurrent="1" nextAc="seek">
+              <p:cTn id="2" dur="indefinite" nodeType="mainSeq">
+                <p:childTnLst>
+                  <p:par>
+                    <p:cTn id="3" fill="hold">
+                      <p:stCondLst>
+                        <p:cond delay="indefinite"/>
+                      </p:stCondLst>
+                      <p:childTnLst>
+                        <p:par>
+                          <p:cTn id="4" fill="hold">
+                            <p:stCondLst>
+                              <p:cond delay="0"/>
+                            </p:stCondLst>
+                            <p:childTnLst>
+                              <p:par>
+                                <p:cTn id="5" presetID="1" presetClass="entr" presetSubtype="0" fill="hold" nodeType="clickEffect">
+                                  <p:stCondLst>
+                                    <p:cond delay="0"/>
+                                  </p:stCondLst>
+                                  <p:childTnLst>
+                                    <p:set>
+                                      <p:cBhvr>
+                                        <p:cTn id="6" dur="1" fill="hold">
+                                          <p:stCondLst>
+                                            <p:cond delay="0"/>
+                                          </p:stCondLst>
+                                        </p:cTn>
+                                        <p:tgtEl>
+                                          <p:spTgt spid="3">
+                                            <p:txEl>
+                                              <p:pRg st="2" end="2"/>
+                                            </p:txEl>
+                                          </p:spTgt>
+                                        </p:tgtEl>
+                                        <p:attrNameLst>
+                                          <p:attrName>style.visibility</p:attrName>
+                                        </p:attrNameLst>
+                                      </p:cBhvr>
+                                      <p:to>
+                                        <p:strVal val="visible"/>
+                                      </p:to>
+                                    </p:set>
+                                  </p:childTnLst>
+                                </p:cTn>
+                              </p:par>
+                              <p:par>
+                                <p:cTn id="7" presetID="1" presetClass="entr" presetSubtype="0" fill="hold" nodeType="withEffect">
+                                  <p:stCondLst>
+                                    <p:cond delay="0"/>
+                                  </p:stCondLst>
+                                  <p:childTnLst>
+                                    <p:set>
+                                      <p:cBhvr>
+                                        <p:cTn id="8" dur="1" fill="hold">
+                                          <p:stCondLst>
+                                            <p:cond delay="0"/>
+                                          </p:stCondLst>
+                                        </p:cTn>
+                                        <p:tgtEl>
+                                          <p:spTgt spid="3">
+                                            <p:txEl>
+                                              <p:pRg st="3" end="3"/>
+                                            </p:txEl>
+                                          </p:spTgt>
+                                        </p:tgtEl>
+                                        <p:attrNameLst>
+                                          <p:attrName>style.visibility</p:attrName>
+                                        </p:attrNameLst>
+                                      </p:cBhvr>
+                                      <p:to>
+                                        <p:strVal val="visible"/>
+                                      </p:to>
+                                    </p:set>
+                                  </p:childTnLst>
+                                </p:cTn>
+                              </p:par>
+                            </p:childTnLst>
+                          </p:cTn>
+                        </p:par>
+                      </p:childTnLst>
+                    </p:cTn>
+                  </p:par>
+                  <p:par>
+                    <p:cTn id="9" fill="hold">
+                      <p:stCondLst>
+                        <p:cond delay="indefinite"/>
+                      </p:stCondLst>
+                      <p:childTnLst>
+                        <p:par>
+                          <p:cTn id="10" fill="hold">
+                            <p:stCondLst>
+                              <p:cond delay="0"/>
+                            </p:stCondLst>
+                            <p:childTnLst>
+                              <p:par>
+                                <p:cTn id="11" presetID="1" presetClass="entr" presetSubtype="0" fill="hold" nodeType="clickEffect">
+                                  <p:stCondLst>
+                                    <p:cond delay="0"/>
+                                  </p:stCondLst>
+                                  <p:childTnLst>
+                                    <p:set>
+                                      <p:cBhvr>
+                                        <p:cTn id="12" dur="1" fill="hold">
+                                          <p:stCondLst>
+                                            <p:cond delay="0"/>
+                                          </p:stCondLst>
+                                        </p:cTn>
+                                        <p:tgtEl>
+                                          <p:spTgt spid="3">
+                                            <p:txEl>
+                                              <p:pRg st="4" end="4"/>
+                                            </p:txEl>
+                                          </p:spTgt>
+                                        </p:tgtEl>
+                                        <p:attrNameLst>
+                                          <p:attrName>style.visibility</p:attrName>
+                                        </p:attrNameLst>
+                                      </p:cBhvr>
+                                      <p:to>
+                                        <p:strVal val="visible"/>
+                                      </p:to>
+                                    </p:set>
+                                  </p:childTnLst>
+                                </p:cTn>
+                              </p:par>
+                              <p:par>
+                                <p:cTn id="13" presetID="1" presetClass="entr" presetSubtype="0" fill="hold" nodeType="withEffect">
+                                  <p:stCondLst>
+                                    <p:cond delay="0"/>
+                                  </p:stCondLst>
+                                  <p:childTnLst>
+                                    <p:set>
+                                      <p:cBhvr>
+                                        <p:cTn id="14" dur="1" fill="hold">
+                                          <p:stCondLst>
+                                            <p:cond delay="0"/>
+                                          </p:stCondLst>
+                                        </p:cTn>
+                                        <p:tgtEl>
+                                          <p:spTgt spid="3">
+                                            <p:txEl>
+                                              <p:pRg st="5" end="5"/>
+                                            </p:txEl>
+                                          </p:spTgt>
+                                        </p:tgtEl>
+                                        <p:attrNameLst>
+                                          <p:attrName>style.visibility</p:attrName>
+                                        </p:attrNameLst>
+                                      </p:cBhvr>
+                                      <p:to>
+                                        <p:strVal val="visible"/>
+                                      </p:to>
+                                    </p:set>
+                                  </p:childTnLst>
+                                </p:cTn>
+                              </p:par>
+                            </p:childTnLst>
+                          </p:cTn>
+                        </p:par>
+                      </p:childTnLst>
+                    </p:cTn>
+                  </p:par>
+                  <p:par>
+                    <p:cTn id="15" fill="hold">
+                      <p:stCondLst>
+                        <p:cond delay="indefinite"/>
+                      </p:stCondLst>
+                      <p:childTnLst>
+                        <p:par>
+                          <p:cTn id="16" fill="hold">
+                            <p:stCondLst>
+                              <p:cond delay="0"/>
+                            </p:stCondLst>
+                            <p:childTnLst>
+                              <p:par>
+                                <p:cTn id="17" presetID="1" presetClass="entr" presetSubtype="0" fill="hold" nodeType="clickEffect">
+                                  <p:stCondLst>
+                                    <p:cond delay="0"/>
+                                  </p:stCondLst>
+                                  <p:childTnLst>
+                                    <p:set>
+                                      <p:cBhvr>
+                                        <p:cTn id="18" dur="1" fill="hold">
+                                          <p:stCondLst>
+                                            <p:cond delay="0"/>
+                                          </p:stCondLst>
+                                        </p:cTn>
+                                        <p:tgtEl>
+                                          <p:spTgt spid="3">
+                                            <p:txEl>
+                                              <p:pRg st="6" end="6"/>
+                                            </p:txEl>
+                                          </p:spTgt>
+                                        </p:tgtEl>
+                                        <p:attrNameLst>
+                                          <p:attrName>style.visibility</p:attrName>
+                                        </p:attrNameLst>
+                                      </p:cBhvr>
+                                      <p:to>
+                                        <p:strVal val="visible"/>
+                                      </p:to>
+                                    </p:set>
+                                  </p:childTnLst>
+                                </p:cTn>
+                              </p:par>
+                            </p:childTnLst>
+                          </p:cTn>
+                        </p:par>
+                      </p:childTnLst>
+                    </p:cTn>
+                  </p:par>
+                </p:childTnLst>
+              </p:cTn>
+              <p:prevCondLst>
+                <p:cond evt="onPrev" delay="0">
+                  <p:tgtEl>
+                    <p:sldTgt/>
+                  </p:tgtEl>
+                </p:cond>
+              </p:prevCondLst>
+              <p:nextCondLst>
+                <p:cond evt="onNext" delay="0">
+                  <p:tgtEl>
+                    <p:sldTgt/>
+                  </p:tgtEl>
+                </p:cond>
+              </p:nextCondLst>
+            </p:seq>
+          </p:childTnLst>
+        </p:cTn>
+      </p:par>
+    </p:tnLst>
+  </p:timing>
 </p:sld>
 </file>
 
@@ -19260,6 +24326,276 @@
   <p:clrMapOvr>
     <a:masterClrMapping/>
   </p:clrMapOvr>
+  <p:timing>
+    <p:tnLst>
+      <p:par>
+        <p:cTn id="1" dur="indefinite" restart="never" nodeType="tmRoot">
+          <p:childTnLst>
+            <p:seq concurrent="1" nextAc="seek">
+              <p:cTn id="2" dur="indefinite" nodeType="mainSeq">
+                <p:childTnLst>
+                  <p:par>
+                    <p:cTn id="3" fill="hold">
+                      <p:stCondLst>
+                        <p:cond delay="indefinite"/>
+                      </p:stCondLst>
+                      <p:childTnLst>
+                        <p:par>
+                          <p:cTn id="4" fill="hold">
+                            <p:stCondLst>
+                              <p:cond delay="0"/>
+                            </p:stCondLst>
+                            <p:childTnLst>
+                              <p:par>
+                                <p:cTn id="5" presetID="1" presetClass="entr" presetSubtype="0" fill="hold" nodeType="clickEffect">
+                                  <p:stCondLst>
+                                    <p:cond delay="0"/>
+                                  </p:stCondLst>
+                                  <p:childTnLst>
+                                    <p:set>
+                                      <p:cBhvr>
+                                        <p:cTn id="6" dur="1" fill="hold">
+                                          <p:stCondLst>
+                                            <p:cond delay="0"/>
+                                          </p:stCondLst>
+                                        </p:cTn>
+                                        <p:tgtEl>
+                                          <p:spTgt spid="3">
+                                            <p:txEl>
+                                              <p:pRg st="1" end="1"/>
+                                            </p:txEl>
+                                          </p:spTgt>
+                                        </p:tgtEl>
+                                        <p:attrNameLst>
+                                          <p:attrName>style.visibility</p:attrName>
+                                        </p:attrNameLst>
+                                      </p:cBhvr>
+                                      <p:to>
+                                        <p:strVal val="visible"/>
+                                      </p:to>
+                                    </p:set>
+                                  </p:childTnLst>
+                                </p:cTn>
+                              </p:par>
+                              <p:par>
+                                <p:cTn id="7" presetID="1" presetClass="entr" presetSubtype="0" fill="hold" nodeType="withEffect">
+                                  <p:stCondLst>
+                                    <p:cond delay="0"/>
+                                  </p:stCondLst>
+                                  <p:childTnLst>
+                                    <p:set>
+                                      <p:cBhvr>
+                                        <p:cTn id="8" dur="1" fill="hold">
+                                          <p:stCondLst>
+                                            <p:cond delay="0"/>
+                                          </p:stCondLst>
+                                        </p:cTn>
+                                        <p:tgtEl>
+                                          <p:spTgt spid="3">
+                                            <p:txEl>
+                                              <p:pRg st="2" end="2"/>
+                                            </p:txEl>
+                                          </p:spTgt>
+                                        </p:tgtEl>
+                                        <p:attrNameLst>
+                                          <p:attrName>style.visibility</p:attrName>
+                                        </p:attrNameLst>
+                                      </p:cBhvr>
+                                      <p:to>
+                                        <p:strVal val="visible"/>
+                                      </p:to>
+                                    </p:set>
+                                  </p:childTnLst>
+                                </p:cTn>
+                              </p:par>
+                            </p:childTnLst>
+                          </p:cTn>
+                        </p:par>
+                      </p:childTnLst>
+                    </p:cTn>
+                  </p:par>
+                  <p:par>
+                    <p:cTn id="9" fill="hold">
+                      <p:stCondLst>
+                        <p:cond delay="indefinite"/>
+                      </p:stCondLst>
+                      <p:childTnLst>
+                        <p:par>
+                          <p:cTn id="10" fill="hold">
+                            <p:stCondLst>
+                              <p:cond delay="0"/>
+                            </p:stCondLst>
+                            <p:childTnLst>
+                              <p:par>
+                                <p:cTn id="11" presetID="1" presetClass="entr" presetSubtype="0" fill="hold" nodeType="clickEffect">
+                                  <p:stCondLst>
+                                    <p:cond delay="0"/>
+                                  </p:stCondLst>
+                                  <p:childTnLst>
+                                    <p:set>
+                                      <p:cBhvr>
+                                        <p:cTn id="12" dur="1" fill="hold">
+                                          <p:stCondLst>
+                                            <p:cond delay="0"/>
+                                          </p:stCondLst>
+                                        </p:cTn>
+                                        <p:tgtEl>
+                                          <p:spTgt spid="3">
+                                            <p:txEl>
+                                              <p:pRg st="3" end="3"/>
+                                            </p:txEl>
+                                          </p:spTgt>
+                                        </p:tgtEl>
+                                        <p:attrNameLst>
+                                          <p:attrName>style.visibility</p:attrName>
+                                        </p:attrNameLst>
+                                      </p:cBhvr>
+                                      <p:to>
+                                        <p:strVal val="visible"/>
+                                      </p:to>
+                                    </p:set>
+                                  </p:childTnLst>
+                                </p:cTn>
+                              </p:par>
+                              <p:par>
+                                <p:cTn id="13" presetID="1" presetClass="entr" presetSubtype="0" fill="hold" nodeType="withEffect">
+                                  <p:stCondLst>
+                                    <p:cond delay="0"/>
+                                  </p:stCondLst>
+                                  <p:childTnLst>
+                                    <p:set>
+                                      <p:cBhvr>
+                                        <p:cTn id="14" dur="1" fill="hold">
+                                          <p:stCondLst>
+                                            <p:cond delay="0"/>
+                                          </p:stCondLst>
+                                        </p:cTn>
+                                        <p:tgtEl>
+                                          <p:spTgt spid="3">
+                                            <p:txEl>
+                                              <p:pRg st="4" end="4"/>
+                                            </p:txEl>
+                                          </p:spTgt>
+                                        </p:tgtEl>
+                                        <p:attrNameLst>
+                                          <p:attrName>style.visibility</p:attrName>
+                                        </p:attrNameLst>
+                                      </p:cBhvr>
+                                      <p:to>
+                                        <p:strVal val="visible"/>
+                                      </p:to>
+                                    </p:set>
+                                  </p:childTnLst>
+                                </p:cTn>
+                              </p:par>
+                            </p:childTnLst>
+                          </p:cTn>
+                        </p:par>
+                      </p:childTnLst>
+                    </p:cTn>
+                  </p:par>
+                  <p:par>
+                    <p:cTn id="15" fill="hold">
+                      <p:stCondLst>
+                        <p:cond delay="indefinite"/>
+                      </p:stCondLst>
+                      <p:childTnLst>
+                        <p:par>
+                          <p:cTn id="16" fill="hold">
+                            <p:stCondLst>
+                              <p:cond delay="0"/>
+                            </p:stCondLst>
+                            <p:childTnLst>
+                              <p:par>
+                                <p:cTn id="17" presetID="1" presetClass="entr" presetSubtype="0" fill="hold" nodeType="clickEffect">
+                                  <p:stCondLst>
+                                    <p:cond delay="0"/>
+                                  </p:stCondLst>
+                                  <p:childTnLst>
+                                    <p:set>
+                                      <p:cBhvr>
+                                        <p:cTn id="18" dur="1" fill="hold">
+                                          <p:stCondLst>
+                                            <p:cond delay="0"/>
+                                          </p:stCondLst>
+                                        </p:cTn>
+                                        <p:tgtEl>
+                                          <p:spTgt spid="3">
+                                            <p:txEl>
+                                              <p:pRg st="5" end="5"/>
+                                            </p:txEl>
+                                          </p:spTgt>
+                                        </p:tgtEl>
+                                        <p:attrNameLst>
+                                          <p:attrName>style.visibility</p:attrName>
+                                        </p:attrNameLst>
+                                      </p:cBhvr>
+                                      <p:to>
+                                        <p:strVal val="visible"/>
+                                      </p:to>
+                                    </p:set>
+                                  </p:childTnLst>
+                                </p:cTn>
+                              </p:par>
+                              <p:par>
+                                <p:cTn id="19" presetID="1" presetClass="entr" presetSubtype="0" fill="hold" nodeType="withEffect">
+                                  <p:stCondLst>
+                                    <p:cond delay="0"/>
+                                  </p:stCondLst>
+                                  <p:childTnLst>
+                                    <p:set>
+                                      <p:cBhvr>
+                                        <p:cTn id="20" dur="1" fill="hold">
+                                          <p:stCondLst>
+                                            <p:cond delay="0"/>
+                                          </p:stCondLst>
+                                        </p:cTn>
+                                        <p:tgtEl>
+                                          <p:spTgt spid="3">
+                                            <p:txEl>
+                                              <p:pRg st="6" end="6"/>
+                                            </p:txEl>
+                                          </p:spTgt>
+                                        </p:tgtEl>
+                                        <p:attrNameLst>
+                                          <p:attrName>style.visibility</p:attrName>
+                                        </p:attrNameLst>
+                                      </p:cBhvr>
+                                      <p:to>
+                                        <p:strVal val="visible"/>
+                                      </p:to>
+                                    </p:set>
+                                  </p:childTnLst>
+                                </p:cTn>
+                              </p:par>
+                            </p:childTnLst>
+                          </p:cTn>
+                        </p:par>
+                      </p:childTnLst>
+                    </p:cTn>
+                  </p:par>
+                </p:childTnLst>
+              </p:cTn>
+              <p:prevCondLst>
+                <p:cond evt="onPrev" delay="0">
+                  <p:tgtEl>
+                    <p:sldTgt/>
+                  </p:tgtEl>
+                </p:cond>
+              </p:prevCondLst>
+              <p:nextCondLst>
+                <p:cond evt="onNext" delay="0">
+                  <p:tgtEl>
+                    <p:sldTgt/>
+                  </p:tgtEl>
+                </p:cond>
+              </p:nextCondLst>
+            </p:seq>
+          </p:childTnLst>
+        </p:cTn>
+      </p:par>
+    </p:tnLst>
+  </p:timing>
 </p:sld>
 </file>
 
@@ -19307,8 +24643,8 @@
           </a:p>
         </p:txBody>
       </p:sp>
-      <mc:AlternateContent xmlns:mc="http://schemas.openxmlformats.org/markup-compatibility/2006" xmlns:a14="http://schemas.microsoft.com/office/drawing/2010/main">
-        <mc:Choice Requires="a14">
+      <mc:AlternateContent xmlns:mc="http://schemas.openxmlformats.org/markup-compatibility/2006">
+        <mc:Choice xmlns:a14="http://schemas.microsoft.com/office/drawing/2010/main" Requires="a14">
           <p:sp>
             <p:nvSpPr>
               <p:cNvPr id="3" name="Content Placeholder 2"/>
@@ -20067,7 +25403,7 @@
             </p:txBody>
           </p:sp>
         </mc:Choice>
-        <mc:Fallback xmlns="">
+        <mc:Fallback>
           <p:sp>
             <p:nvSpPr>
               <p:cNvPr id="3" name="Content Placeholder 2"/>
@@ -20111,6 +25447,147 @@
   <p:clrMapOvr>
     <a:masterClrMapping/>
   </p:clrMapOvr>
+  <p:timing>
+    <p:tnLst>
+      <p:par>
+        <p:cTn id="1" dur="indefinite" restart="never" nodeType="tmRoot">
+          <p:childTnLst>
+            <p:seq concurrent="1" nextAc="seek">
+              <p:cTn id="2" dur="indefinite" nodeType="mainSeq">
+                <p:childTnLst>
+                  <p:par>
+                    <p:cTn id="3" fill="hold">
+                      <p:stCondLst>
+                        <p:cond delay="indefinite"/>
+                      </p:stCondLst>
+                      <p:childTnLst>
+                        <p:par>
+                          <p:cTn id="4" fill="hold">
+                            <p:stCondLst>
+                              <p:cond delay="0"/>
+                            </p:stCondLst>
+                            <p:childTnLst>
+                              <p:par>
+                                <p:cTn id="5" presetID="1" presetClass="entr" presetSubtype="0" fill="hold" nodeType="clickEffect">
+                                  <p:stCondLst>
+                                    <p:cond delay="0"/>
+                                  </p:stCondLst>
+                                  <p:childTnLst>
+                                    <p:set>
+                                      <p:cBhvr>
+                                        <p:cTn id="6" dur="1" fill="hold">
+                                          <p:stCondLst>
+                                            <p:cond delay="0"/>
+                                          </p:stCondLst>
+                                        </p:cTn>
+                                        <p:tgtEl>
+                                          <p:spTgt spid="3">
+                                            <p:txEl>
+                                              <p:pRg st="4" end="4"/>
+                                            </p:txEl>
+                                          </p:spTgt>
+                                        </p:tgtEl>
+                                        <p:attrNameLst>
+                                          <p:attrName>style.visibility</p:attrName>
+                                        </p:attrNameLst>
+                                      </p:cBhvr>
+                                      <p:to>
+                                        <p:strVal val="visible"/>
+                                      </p:to>
+                                    </p:set>
+                                  </p:childTnLst>
+                                </p:cTn>
+                              </p:par>
+                              <p:par>
+                                <p:cTn id="7" presetID="1" presetClass="entr" presetSubtype="0" fill="hold" nodeType="withEffect">
+                                  <p:stCondLst>
+                                    <p:cond delay="0"/>
+                                  </p:stCondLst>
+                                  <p:childTnLst>
+                                    <p:set>
+                                      <p:cBhvr>
+                                        <p:cTn id="8" dur="1" fill="hold">
+                                          <p:stCondLst>
+                                            <p:cond delay="0"/>
+                                          </p:stCondLst>
+                                        </p:cTn>
+                                        <p:tgtEl>
+                                          <p:spTgt spid="3">
+                                            <p:txEl>
+                                              <p:pRg st="5" end="5"/>
+                                            </p:txEl>
+                                          </p:spTgt>
+                                        </p:tgtEl>
+                                        <p:attrNameLst>
+                                          <p:attrName>style.visibility</p:attrName>
+                                        </p:attrNameLst>
+                                      </p:cBhvr>
+                                      <p:to>
+                                        <p:strVal val="visible"/>
+                                      </p:to>
+                                    </p:set>
+                                  </p:childTnLst>
+                                </p:cTn>
+                              </p:par>
+                              <p:par>
+                                <p:cTn id="9" presetID="1" presetClass="entr" presetSubtype="0" fill="hold" nodeType="withEffect">
+                                  <p:stCondLst>
+                                    <p:cond delay="0"/>
+                                  </p:stCondLst>
+                                  <p:childTnLst>
+                                    <p:set>
+                                      <p:cBhvr>
+                                        <p:cTn id="10" dur="1" fill="hold">
+                                          <p:stCondLst>
+                                            <p:cond delay="0"/>
+                                          </p:stCondLst>
+                                        </p:cTn>
+                                        <p:tgtEl>
+                                          <p:spTgt spid="3">
+                                            <p:txEl>
+                                              <p:pRg st="6" end="6"/>
+                                            </p:txEl>
+                                          </p:spTgt>
+                                        </p:tgtEl>
+                                        <p:attrNameLst>
+                                          <p:attrName>style.visibility</p:attrName>
+                                        </p:attrNameLst>
+                                      </p:cBhvr>
+                                      <p:to>
+                                        <p:strVal val="visible"/>
+                                      </p:to>
+                                    </p:set>
+                                  </p:childTnLst>
+                                </p:cTn>
+                              </p:par>
+                            </p:childTnLst>
+                          </p:cTn>
+                        </p:par>
+                      </p:childTnLst>
+                    </p:cTn>
+                  </p:par>
+                </p:childTnLst>
+              </p:cTn>
+              <p:prevCondLst>
+                <p:cond evt="onPrev" delay="0">
+                  <p:tgtEl>
+                    <p:sldTgt/>
+                  </p:tgtEl>
+                </p:cond>
+              </p:prevCondLst>
+              <p:nextCondLst>
+                <p:cond evt="onNext" delay="0">
+                  <p:tgtEl>
+                    <p:sldTgt/>
+                  </p:tgtEl>
+                </p:cond>
+              </p:nextCondLst>
+            </p:seq>
+          </p:childTnLst>
+        </p:cTn>
+      </p:par>
+    </p:tnLst>
+  </p:timing>
 </p:sld>
 </file>
 
@@ -20158,8 +25635,8 @@
           </a:p>
         </p:txBody>
       </p:sp>
-      <mc:AlternateContent xmlns:mc="http://schemas.openxmlformats.org/markup-compatibility/2006">
-        <mc:Choice xmlns:a14="http://schemas.microsoft.com/office/drawing/2010/main" Requires="a14">
+      <mc:AlternateContent xmlns:mc="http://schemas.openxmlformats.org/markup-compatibility/2006" xmlns:a14="http://schemas.microsoft.com/office/drawing/2010/main">
+        <mc:Choice Requires="a14">
           <p:sp>
             <p:nvSpPr>
               <p:cNvPr id="3" name="Content Placeholder 2"/>
@@ -20358,7 +25835,7 @@
             </p:txBody>
           </p:sp>
         </mc:Choice>
-        <mc:Fallback>
+        <mc:Fallback xmlns="">
           <p:sp>
             <p:nvSpPr>
               <p:cNvPr id="3" name="Content Placeholder 2"/>
@@ -20397,6 +25874,245 @@
   <p:clrMapOvr>
     <a:masterClrMapping/>
   </p:clrMapOvr>
+  <p:timing>
+    <p:tnLst>
+      <p:par>
+        <p:cTn id="1" dur="indefinite" restart="never" nodeType="tmRoot">
+          <p:childTnLst>
+            <p:seq concurrent="1" nextAc="seek">
+              <p:cTn id="2" dur="indefinite" nodeType="mainSeq">
+                <p:childTnLst>
+                  <p:par>
+                    <p:cTn id="3" fill="hold">
+                      <p:stCondLst>
+                        <p:cond delay="indefinite"/>
+                      </p:stCondLst>
+                      <p:childTnLst>
+                        <p:par>
+                          <p:cTn id="4" fill="hold">
+                            <p:stCondLst>
+                              <p:cond delay="0"/>
+                            </p:stCondLst>
+                            <p:childTnLst>
+                              <p:par>
+                                <p:cTn id="5" presetID="1" presetClass="entr" presetSubtype="0" fill="hold" nodeType="clickEffect">
+                                  <p:stCondLst>
+                                    <p:cond delay="0"/>
+                                  </p:stCondLst>
+                                  <p:childTnLst>
+                                    <p:set>
+                                      <p:cBhvr>
+                                        <p:cTn id="6" dur="1" fill="hold">
+                                          <p:stCondLst>
+                                            <p:cond delay="0"/>
+                                          </p:stCondLst>
+                                        </p:cTn>
+                                        <p:tgtEl>
+                                          <p:spTgt spid="3">
+                                            <p:txEl>
+                                              <p:pRg st="1" end="1"/>
+                                            </p:txEl>
+                                          </p:spTgt>
+                                        </p:tgtEl>
+                                        <p:attrNameLst>
+                                          <p:attrName>style.visibility</p:attrName>
+                                        </p:attrNameLst>
+                                      </p:cBhvr>
+                                      <p:to>
+                                        <p:strVal val="visible"/>
+                                      </p:to>
+                                    </p:set>
+                                  </p:childTnLst>
+                                </p:cTn>
+                              </p:par>
+                              <p:par>
+                                <p:cTn id="7" presetID="1" presetClass="entr" presetSubtype="0" fill="hold" nodeType="withEffect">
+                                  <p:stCondLst>
+                                    <p:cond delay="0"/>
+                                  </p:stCondLst>
+                                  <p:childTnLst>
+                                    <p:set>
+                                      <p:cBhvr>
+                                        <p:cTn id="8" dur="1" fill="hold">
+                                          <p:stCondLst>
+                                            <p:cond delay="0"/>
+                                          </p:stCondLst>
+                                        </p:cTn>
+                                        <p:tgtEl>
+                                          <p:spTgt spid="3">
+                                            <p:txEl>
+                                              <p:pRg st="2" end="2"/>
+                                            </p:txEl>
+                                          </p:spTgt>
+                                        </p:tgtEl>
+                                        <p:attrNameLst>
+                                          <p:attrName>style.visibility</p:attrName>
+                                        </p:attrNameLst>
+                                      </p:cBhvr>
+                                      <p:to>
+                                        <p:strVal val="visible"/>
+                                      </p:to>
+                                    </p:set>
+                                  </p:childTnLst>
+                                </p:cTn>
+                              </p:par>
+                              <p:par>
+                                <p:cTn id="9" presetID="1" presetClass="entr" presetSubtype="0" fill="hold" nodeType="withEffect">
+                                  <p:stCondLst>
+                                    <p:cond delay="0"/>
+                                  </p:stCondLst>
+                                  <p:childTnLst>
+                                    <p:set>
+                                      <p:cBhvr>
+                                        <p:cTn id="10" dur="1" fill="hold">
+                                          <p:stCondLst>
+                                            <p:cond delay="0"/>
+                                          </p:stCondLst>
+                                        </p:cTn>
+                                        <p:tgtEl>
+                                          <p:spTgt spid="3">
+                                            <p:txEl>
+                                              <p:pRg st="3" end="3"/>
+                                            </p:txEl>
+                                          </p:spTgt>
+                                        </p:tgtEl>
+                                        <p:attrNameLst>
+                                          <p:attrName>style.visibility</p:attrName>
+                                        </p:attrNameLst>
+                                      </p:cBhvr>
+                                      <p:to>
+                                        <p:strVal val="visible"/>
+                                      </p:to>
+                                    </p:set>
+                                  </p:childTnLst>
+                                </p:cTn>
+                              </p:par>
+                            </p:childTnLst>
+                          </p:cTn>
+                        </p:par>
+                      </p:childTnLst>
+                    </p:cTn>
+                  </p:par>
+                  <p:par>
+                    <p:cTn id="11" fill="hold">
+                      <p:stCondLst>
+                        <p:cond delay="indefinite"/>
+                      </p:stCondLst>
+                      <p:childTnLst>
+                        <p:par>
+                          <p:cTn id="12" fill="hold">
+                            <p:stCondLst>
+                              <p:cond delay="0"/>
+                            </p:stCondLst>
+                            <p:childTnLst>
+                              <p:par>
+                                <p:cTn id="13" presetID="1" presetClass="entr" presetSubtype="0" fill="hold" nodeType="clickEffect">
+                                  <p:stCondLst>
+                                    <p:cond delay="0"/>
+                                  </p:stCondLst>
+                                  <p:childTnLst>
+                                    <p:set>
+                                      <p:cBhvr>
+                                        <p:cTn id="14" dur="1" fill="hold">
+                                          <p:stCondLst>
+                                            <p:cond delay="0"/>
+                                          </p:stCondLst>
+                                        </p:cTn>
+                                        <p:tgtEl>
+                                          <p:spTgt spid="3">
+                                            <p:txEl>
+                                              <p:pRg st="4" end="4"/>
+                                            </p:txEl>
+                                          </p:spTgt>
+                                        </p:tgtEl>
+                                        <p:attrNameLst>
+                                          <p:attrName>style.visibility</p:attrName>
+                                        </p:attrNameLst>
+                                      </p:cBhvr>
+                                      <p:to>
+                                        <p:strVal val="visible"/>
+                                      </p:to>
+                                    </p:set>
+                                  </p:childTnLst>
+                                </p:cTn>
+                              </p:par>
+                            </p:childTnLst>
+                          </p:cTn>
+                        </p:par>
+                      </p:childTnLst>
+                    </p:cTn>
+                  </p:par>
+                  <p:par>
+                    <p:cTn id="15" fill="hold">
+                      <p:stCondLst>
+                        <p:cond delay="indefinite"/>
+                      </p:stCondLst>
+                      <p:childTnLst>
+                        <p:par>
+                          <p:cTn id="16" fill="hold">
+                            <p:stCondLst>
+                              <p:cond delay="0"/>
+                            </p:stCondLst>
+                            <p:childTnLst>
+                              <p:par>
+                                <p:cTn id="17" presetID="1" presetClass="entr" presetSubtype="0" fill="hold" nodeType="clickEffect">
+                                  <p:stCondLst>
+                                    <p:cond delay="0"/>
+                                  </p:stCondLst>
+                                  <p:childTnLst>
+                                    <p:set>
+                                      <p:cBhvr>
+                                        <p:cTn id="18" dur="1" fill="hold">
+                                          <p:stCondLst>
+                                            <p:cond delay="0"/>
+                                          </p:stCondLst>
+                                        </p:cTn>
+                                        <p:tgtEl>
+                                          <p:spTgt spid="3">
+                                            <p:txEl>
+                                              <p:pRg st="5" end="5"/>
+                                            </p:txEl>
+                                          </p:spTgt>
+                                        </p:tgtEl>
+                                        <p:attrNameLst>
+                                          <p:attrName>style.visibility</p:attrName>
+                                        </p:attrNameLst>
+                                      </p:cBhvr>
+                                      <p:to>
+                                        <p:strVal val="visible"/>
+                                      </p:to>
+                                    </p:set>
+                                  </p:childTnLst>
+                                </p:cTn>
+                              </p:par>
+                            </p:childTnLst>
+                          </p:cTn>
+                        </p:par>
+                      </p:childTnLst>
+                    </p:cTn>
+                  </p:par>
+                </p:childTnLst>
+              </p:cTn>
+              <p:prevCondLst>
+                <p:cond evt="onPrev" delay="0">
+                  <p:tgtEl>
+                    <p:sldTgt/>
+                  </p:tgtEl>
+                </p:cond>
+              </p:prevCondLst>
+              <p:nextCondLst>
+                <p:cond evt="onNext" delay="0">
+                  <p:tgtEl>
+                    <p:sldTgt/>
+                  </p:tgtEl>
+                </p:cond>
+              </p:nextCondLst>
+            </p:seq>
+          </p:childTnLst>
+        </p:cTn>
+      </p:par>
+    </p:tnLst>
+  </p:timing>
 </p:sld>
 </file>
 
@@ -20444,8 +26160,8 @@
           </a:p>
         </p:txBody>
       </p:sp>
-      <mc:AlternateContent xmlns:mc="http://schemas.openxmlformats.org/markup-compatibility/2006">
-        <mc:Choice xmlns:a14="http://schemas.microsoft.com/office/drawing/2010/main" Requires="a14">
+      <mc:AlternateContent xmlns:mc="http://schemas.openxmlformats.org/markup-compatibility/2006" xmlns:a14="http://schemas.microsoft.com/office/drawing/2010/main">
+        <mc:Choice Requires="a14">
           <p:sp>
             <p:nvSpPr>
               <p:cNvPr id="3" name="Content Placeholder 2"/>
@@ -21159,7 +26875,7 @@
             </p:txBody>
           </p:sp>
         </mc:Choice>
-        <mc:Fallback>
+        <mc:Fallback xmlns="">
           <p:sp>
             <p:nvSpPr>
               <p:cNvPr id="3" name="Content Placeholder 2"/>
@@ -21202,6 +26918,227 @@
   <p:clrMapOvr>
     <a:masterClrMapping/>
   </p:clrMapOvr>
+  <p:timing>
+    <p:tnLst>
+      <p:par>
+        <p:cTn id="1" dur="indefinite" restart="never" nodeType="tmRoot">
+          <p:childTnLst>
+            <p:seq concurrent="1" nextAc="seek">
+              <p:cTn id="2" dur="indefinite" nodeType="mainSeq">
+                <p:childTnLst>
+                  <p:par>
+                    <p:cTn id="3" fill="hold">
+                      <p:stCondLst>
+                        <p:cond delay="indefinite"/>
+                      </p:stCondLst>
+                      <p:childTnLst>
+                        <p:par>
+                          <p:cTn id="4" fill="hold">
+                            <p:stCondLst>
+                              <p:cond delay="0"/>
+                            </p:stCondLst>
+                            <p:childTnLst>
+                              <p:par>
+                                <p:cTn id="5" presetID="1" presetClass="entr" presetSubtype="0" fill="hold" nodeType="clickEffect">
+                                  <p:stCondLst>
+                                    <p:cond delay="0"/>
+                                  </p:stCondLst>
+                                  <p:childTnLst>
+                                    <p:set>
+                                      <p:cBhvr>
+                                        <p:cTn id="6" dur="1" fill="hold">
+                                          <p:stCondLst>
+                                            <p:cond delay="0"/>
+                                          </p:stCondLst>
+                                        </p:cTn>
+                                        <p:tgtEl>
+                                          <p:spTgt spid="3">
+                                            <p:txEl>
+                                              <p:pRg st="5" end="5"/>
+                                            </p:txEl>
+                                          </p:spTgt>
+                                        </p:tgtEl>
+                                        <p:attrNameLst>
+                                          <p:attrName>style.visibility</p:attrName>
+                                        </p:attrNameLst>
+                                      </p:cBhvr>
+                                      <p:to>
+                                        <p:strVal val="visible"/>
+                                      </p:to>
+                                    </p:set>
+                                  </p:childTnLst>
+                                </p:cTn>
+                              </p:par>
+                              <p:par>
+                                <p:cTn id="7" presetID="1" presetClass="entr" presetSubtype="0" fill="hold" nodeType="withEffect">
+                                  <p:stCondLst>
+                                    <p:cond delay="0"/>
+                                  </p:stCondLst>
+                                  <p:childTnLst>
+                                    <p:set>
+                                      <p:cBhvr>
+                                        <p:cTn id="8" dur="1" fill="hold">
+                                          <p:stCondLst>
+                                            <p:cond delay="0"/>
+                                          </p:stCondLst>
+                                        </p:cTn>
+                                        <p:tgtEl>
+                                          <p:spTgt spid="3">
+                                            <p:txEl>
+                                              <p:pRg st="6" end="6"/>
+                                            </p:txEl>
+                                          </p:spTgt>
+                                        </p:tgtEl>
+                                        <p:attrNameLst>
+                                          <p:attrName>style.visibility</p:attrName>
+                                        </p:attrNameLst>
+                                      </p:cBhvr>
+                                      <p:to>
+                                        <p:strVal val="visible"/>
+                                      </p:to>
+                                    </p:set>
+                                  </p:childTnLst>
+                                </p:cTn>
+                              </p:par>
+                            </p:childTnLst>
+                          </p:cTn>
+                        </p:par>
+                      </p:childTnLst>
+                    </p:cTn>
+                  </p:par>
+                  <p:par>
+                    <p:cTn id="9" fill="hold">
+                      <p:stCondLst>
+                        <p:cond delay="indefinite"/>
+                      </p:stCondLst>
+                      <p:childTnLst>
+                        <p:par>
+                          <p:cTn id="10" fill="hold">
+                            <p:stCondLst>
+                              <p:cond delay="0"/>
+                            </p:stCondLst>
+                            <p:childTnLst>
+                              <p:par>
+                                <p:cTn id="11" presetID="1" presetClass="entr" presetSubtype="0" fill="hold" nodeType="clickEffect">
+                                  <p:stCondLst>
+                                    <p:cond delay="0"/>
+                                  </p:stCondLst>
+                                  <p:childTnLst>
+                                    <p:set>
+                                      <p:cBhvr>
+                                        <p:cTn id="12" dur="1" fill="hold">
+                                          <p:stCondLst>
+                                            <p:cond delay="0"/>
+                                          </p:stCondLst>
+                                        </p:cTn>
+                                        <p:tgtEl>
+                                          <p:spTgt spid="3">
+                                            <p:txEl>
+                                              <p:pRg st="7" end="7"/>
+                                            </p:txEl>
+                                          </p:spTgt>
+                                        </p:tgtEl>
+                                        <p:attrNameLst>
+                                          <p:attrName>style.visibility</p:attrName>
+                                        </p:attrNameLst>
+                                      </p:cBhvr>
+                                      <p:to>
+                                        <p:strVal val="visible"/>
+                                      </p:to>
+                                    </p:set>
+                                  </p:childTnLst>
+                                </p:cTn>
+                              </p:par>
+                              <p:par>
+                                <p:cTn id="13" presetID="1" presetClass="entr" presetSubtype="0" fill="hold" nodeType="withEffect">
+                                  <p:stCondLst>
+                                    <p:cond delay="0"/>
+                                  </p:stCondLst>
+                                  <p:childTnLst>
+                                    <p:set>
+                                      <p:cBhvr>
+                                        <p:cTn id="14" dur="1" fill="hold">
+                                          <p:stCondLst>
+                                            <p:cond delay="0"/>
+                                          </p:stCondLst>
+                                        </p:cTn>
+                                        <p:tgtEl>
+                                          <p:spTgt spid="3">
+                                            <p:txEl>
+                                              <p:pRg st="8" end="8"/>
+                                            </p:txEl>
+                                          </p:spTgt>
+                                        </p:tgtEl>
+                                        <p:attrNameLst>
+                                          <p:attrName>style.visibility</p:attrName>
+                                        </p:attrNameLst>
+                                      </p:cBhvr>
+                                      <p:to>
+                                        <p:strVal val="visible"/>
+                                      </p:to>
+                                    </p:set>
+                                  </p:childTnLst>
+                                </p:cTn>
+                              </p:par>
+                              <p:par>
+                                <p:cTn id="15" presetID="1" presetClass="entr" presetSubtype="0" fill="hold" nodeType="withEffect">
+                                  <p:stCondLst>
+                                    <p:cond delay="0"/>
+                                  </p:stCondLst>
+                                  <p:childTnLst>
+                                    <p:set>
+                                      <p:cBhvr>
+                                        <p:cTn id="16" dur="1" fill="hold">
+                                          <p:stCondLst>
+                                            <p:cond delay="0"/>
+                                          </p:stCondLst>
+                                        </p:cTn>
+                                        <p:tgtEl>
+                                          <p:spTgt spid="3">
+                                            <p:txEl>
+                                              <p:pRg st="9" end="9"/>
+                                            </p:txEl>
+                                          </p:spTgt>
+                                        </p:tgtEl>
+                                        <p:attrNameLst>
+                                          <p:attrName>style.visibility</p:attrName>
+                                        </p:attrNameLst>
+                                      </p:cBhvr>
+                                      <p:to>
+                                        <p:strVal val="visible"/>
+                                      </p:to>
+                                    </p:set>
+                                  </p:childTnLst>
+                                </p:cTn>
+                              </p:par>
+                            </p:childTnLst>
+                          </p:cTn>
+                        </p:par>
+                      </p:childTnLst>
+                    </p:cTn>
+                  </p:par>
+                </p:childTnLst>
+              </p:cTn>
+              <p:prevCondLst>
+                <p:cond evt="onPrev" delay="0">
+                  <p:tgtEl>
+                    <p:sldTgt/>
+                  </p:tgtEl>
+                </p:cond>
+              </p:prevCondLst>
+              <p:nextCondLst>
+                <p:cond evt="onNext" delay="0">
+                  <p:tgtEl>
+                    <p:sldTgt/>
+                  </p:tgtEl>
+                </p:cond>
+              </p:nextCondLst>
+            </p:seq>
+          </p:childTnLst>
+        </p:cTn>
+      </p:par>
+    </p:tnLst>
+  </p:timing>
 </p:sld>
 </file>
 
